--- a/ppts/Teoría Clasificación de Texto.pptx
+++ b/ppts/Teoría Clasificación de Texto.pptx
@@ -1,33 +1,33 @@
 
 <file path=ppt/presentation.xml><?xml version="1.0" encoding="utf-8"?>
-<p:presentation xmlns:a="http://schemas.openxmlformats.org/drawingml/2006/main" xmlns:r="http://schemas.openxmlformats.org/officeDocument/2006/relationships" xmlns:mc="http://schemas.openxmlformats.org/markup-compatibility/2006" xmlns:mv="urn:schemas-microsoft-com:mac:vml" xmlns:p="http://schemas.openxmlformats.org/presentationml/2006/main" xmlns:c="http://schemas.openxmlformats.org/drawingml/2006/chart" xmlns:dgm="http://schemas.openxmlformats.org/drawingml/2006/diagram" xmlns:o="urn:schemas-microsoft-com:office:office" xmlns:v="urn:schemas-microsoft-com:vml" xmlns:pvml="urn:schemas-microsoft-com:office:powerpoint" xmlns:com="http://schemas.openxmlformats.org/drawingml/2006/compatibility" xmlns:p14="http://schemas.microsoft.com/office/powerpoint/2010/main" xmlns:p15="http://schemas.microsoft.com/office/powerpoint/2012/main" xmlns:ahyp="http://schemas.microsoft.com/office/drawing/2018/hyperlinkcolor" autoCompressPictures="0" embedTrueTypeFonts="1" strictFirstAndLastChars="0" saveSubsetFonts="1">
+<p:presentation xmlns:a="http://schemas.openxmlformats.org/drawingml/2006/main" xmlns:r="http://schemas.openxmlformats.org/officeDocument/2006/relationships" xmlns:p="http://schemas.openxmlformats.org/presentationml/2006/main" strictFirstAndLastChars="0" embedTrueTypeFonts="1" saveSubsetFonts="1" autoCompressPictures="0">
   <p:sldMasterIdLst>
-    <p:sldMasterId id="2147483659" r:id="rId4"/>
+    <p:sldMasterId id="2147483659" r:id="rId1"/>
   </p:sldMasterIdLst>
   <p:notesMasterIdLst>
-    <p:notesMasterId r:id="rId5"/>
+    <p:notesMasterId r:id="rId10"/>
   </p:notesMasterIdLst>
   <p:sldIdLst>
-    <p:sldId id="256" r:id="rId6"/>
-    <p:sldId id="257" r:id="rId7"/>
-    <p:sldId id="258" r:id="rId8"/>
-    <p:sldId id="259" r:id="rId9"/>
-    <p:sldId id="260" r:id="rId10"/>
-    <p:sldId id="261" r:id="rId11"/>
-    <p:sldId id="262" r:id="rId12"/>
-    <p:sldId id="263" r:id="rId13"/>
+    <p:sldId id="256" r:id="rId2"/>
+    <p:sldId id="257" r:id="rId3"/>
+    <p:sldId id="258" r:id="rId4"/>
+    <p:sldId id="259" r:id="rId5"/>
+    <p:sldId id="260" r:id="rId6"/>
+    <p:sldId id="261" r:id="rId7"/>
+    <p:sldId id="262" r:id="rId8"/>
+    <p:sldId id="263" r:id="rId9"/>
   </p:sldIdLst>
-  <p:sldSz cy="5143500" cx="9144000"/>
+  <p:sldSz cx="9144000" cy="5143500" type="screen16x9"/>
   <p:notesSz cx="6858000" cy="9144000"/>
   <p:embeddedFontLst>
     <p:embeddedFont>
-      <p:font typeface="Sora"/>
-      <p:regular r:id="rId14"/>
-      <p:bold r:id="rId15"/>
+      <p:font typeface="Sora" panose="020B0604020202020204" charset="0"/>
+      <p:regular r:id="rId11"/>
+      <p:bold r:id="rId12"/>
     </p:embeddedFont>
   </p:embeddedFontLst>
   <p:defaultTextStyle>
-    <a:defPPr lvl="0" marR="0" rtl="0" algn="l">
+    <a:defPPr marR="0" lvl="0" algn="l" rtl="0">
       <a:lnSpc>
         <a:spcPct val="100000"/>
       </a:lnSpc>
@@ -38,7 +38,7 @@
         <a:spcPts val="0"/>
       </a:spcAft>
     </a:defPPr>
-    <a:lvl1pPr lvl="0" marR="0" rtl="0" algn="l">
+    <a:lvl1pPr marR="0" lvl="0" algn="l" rtl="0">
       <a:lnSpc>
         <a:spcPct val="100000"/>
       </a:lnSpc>
@@ -52,7 +52,7 @@
         <a:srgbClr val="000000"/>
       </a:buClr>
       <a:buFont typeface="Arial"/>
-      <a:defRPr b="0" i="0" sz="1400" u="none" cap="none" strike="noStrike">
+      <a:defRPr sz="1400" b="0" i="0" u="none" strike="noStrike" cap="none">
         <a:solidFill>
           <a:srgbClr val="000000"/>
         </a:solidFill>
@@ -62,7 +62,7 @@
         <a:sym typeface="Arial"/>
       </a:defRPr>
     </a:lvl1pPr>
-    <a:lvl2pPr lvl="1" marR="0" rtl="0" algn="l">
+    <a:lvl2pPr marR="0" lvl="1" algn="l" rtl="0">
       <a:lnSpc>
         <a:spcPct val="100000"/>
       </a:lnSpc>
@@ -76,7 +76,7 @@
         <a:srgbClr val="000000"/>
       </a:buClr>
       <a:buFont typeface="Arial"/>
-      <a:defRPr b="0" i="0" sz="1400" u="none" cap="none" strike="noStrike">
+      <a:defRPr sz="1400" b="0" i="0" u="none" strike="noStrike" cap="none">
         <a:solidFill>
           <a:srgbClr val="000000"/>
         </a:solidFill>
@@ -86,7 +86,7 @@
         <a:sym typeface="Arial"/>
       </a:defRPr>
     </a:lvl2pPr>
-    <a:lvl3pPr lvl="2" marR="0" rtl="0" algn="l">
+    <a:lvl3pPr marR="0" lvl="2" algn="l" rtl="0">
       <a:lnSpc>
         <a:spcPct val="100000"/>
       </a:lnSpc>
@@ -100,7 +100,7 @@
         <a:srgbClr val="000000"/>
       </a:buClr>
       <a:buFont typeface="Arial"/>
-      <a:defRPr b="0" i="0" sz="1400" u="none" cap="none" strike="noStrike">
+      <a:defRPr sz="1400" b="0" i="0" u="none" strike="noStrike" cap="none">
         <a:solidFill>
           <a:srgbClr val="000000"/>
         </a:solidFill>
@@ -110,7 +110,7 @@
         <a:sym typeface="Arial"/>
       </a:defRPr>
     </a:lvl3pPr>
-    <a:lvl4pPr lvl="3" marR="0" rtl="0" algn="l">
+    <a:lvl4pPr marR="0" lvl="3" algn="l" rtl="0">
       <a:lnSpc>
         <a:spcPct val="100000"/>
       </a:lnSpc>
@@ -124,7 +124,7 @@
         <a:srgbClr val="000000"/>
       </a:buClr>
       <a:buFont typeface="Arial"/>
-      <a:defRPr b="0" i="0" sz="1400" u="none" cap="none" strike="noStrike">
+      <a:defRPr sz="1400" b="0" i="0" u="none" strike="noStrike" cap="none">
         <a:solidFill>
           <a:srgbClr val="000000"/>
         </a:solidFill>
@@ -134,7 +134,7 @@
         <a:sym typeface="Arial"/>
       </a:defRPr>
     </a:lvl4pPr>
-    <a:lvl5pPr lvl="4" marR="0" rtl="0" algn="l">
+    <a:lvl5pPr marR="0" lvl="4" algn="l" rtl="0">
       <a:lnSpc>
         <a:spcPct val="100000"/>
       </a:lnSpc>
@@ -148,7 +148,7 @@
         <a:srgbClr val="000000"/>
       </a:buClr>
       <a:buFont typeface="Arial"/>
-      <a:defRPr b="0" i="0" sz="1400" u="none" cap="none" strike="noStrike">
+      <a:defRPr sz="1400" b="0" i="0" u="none" strike="noStrike" cap="none">
         <a:solidFill>
           <a:srgbClr val="000000"/>
         </a:solidFill>
@@ -158,7 +158,7 @@
         <a:sym typeface="Arial"/>
       </a:defRPr>
     </a:lvl5pPr>
-    <a:lvl6pPr lvl="5" marR="0" rtl="0" algn="l">
+    <a:lvl6pPr marR="0" lvl="5" algn="l" rtl="0">
       <a:lnSpc>
         <a:spcPct val="100000"/>
       </a:lnSpc>
@@ -172,7 +172,7 @@
         <a:srgbClr val="000000"/>
       </a:buClr>
       <a:buFont typeface="Arial"/>
-      <a:defRPr b="0" i="0" sz="1400" u="none" cap="none" strike="noStrike">
+      <a:defRPr sz="1400" b="0" i="0" u="none" strike="noStrike" cap="none">
         <a:solidFill>
           <a:srgbClr val="000000"/>
         </a:solidFill>
@@ -182,7 +182,7 @@
         <a:sym typeface="Arial"/>
       </a:defRPr>
     </a:lvl6pPr>
-    <a:lvl7pPr lvl="6" marR="0" rtl="0" algn="l">
+    <a:lvl7pPr marR="0" lvl="6" algn="l" rtl="0">
       <a:lnSpc>
         <a:spcPct val="100000"/>
       </a:lnSpc>
@@ -196,7 +196,7 @@
         <a:srgbClr val="000000"/>
       </a:buClr>
       <a:buFont typeface="Arial"/>
-      <a:defRPr b="0" i="0" sz="1400" u="none" cap="none" strike="noStrike">
+      <a:defRPr sz="1400" b="0" i="0" u="none" strike="noStrike" cap="none">
         <a:solidFill>
           <a:srgbClr val="000000"/>
         </a:solidFill>
@@ -206,7 +206,7 @@
         <a:sym typeface="Arial"/>
       </a:defRPr>
     </a:lvl7pPr>
-    <a:lvl8pPr lvl="7" marR="0" rtl="0" algn="l">
+    <a:lvl8pPr marR="0" lvl="7" algn="l" rtl="0">
       <a:lnSpc>
         <a:spcPct val="100000"/>
       </a:lnSpc>
@@ -220,7 +220,7 @@
         <a:srgbClr val="000000"/>
       </a:buClr>
       <a:buFont typeface="Arial"/>
-      <a:defRPr b="0" i="0" sz="1400" u="none" cap="none" strike="noStrike">
+      <a:defRPr sz="1400" b="0" i="0" u="none" strike="noStrike" cap="none">
         <a:solidFill>
           <a:srgbClr val="000000"/>
         </a:solidFill>
@@ -230,7 +230,7 @@
         <a:sym typeface="Arial"/>
       </a:defRPr>
     </a:lvl8pPr>
-    <a:lvl9pPr lvl="8" marR="0" rtl="0" algn="l">
+    <a:lvl9pPr marR="0" lvl="8" algn="l" rtl="0">
       <a:lnSpc>
         <a:spcPct val="100000"/>
       </a:lnSpc>
@@ -244,7 +244,7 @@
         <a:srgbClr val="000000"/>
       </a:buClr>
       <a:buFont typeface="Arial"/>
-      <a:defRPr b="0" i="0" sz="1400" u="none" cap="none" strike="noStrike">
+      <a:defRPr sz="1400" b="0" i="0" u="none" strike="noStrike" cap="none">
         <a:solidFill>
           <a:srgbClr val="000000"/>
         </a:solidFill>
@@ -257,7 +257,7 @@
   </p:defaultTextStyle>
   <p:extLst>
     <p:ext uri="{EFAFB233-063F-42B5-8137-9DF3F51BA10A}">
-      <p15:sldGuideLst>
+      <p15:sldGuideLst xmlns:p15="http://schemas.microsoft.com/office/powerpoint/2012/main">
         <p15:guide id="1" orient="horz" pos="1620">
           <p15:clr>
             <a:srgbClr val="747775"/>
@@ -274,12 +274,46 @@
 </p:presentation>
 </file>
 
+<file path=ppt/changesInfos/changesInfo1.xml><?xml version="1.0" encoding="utf-8"?>
+<pc:chgInfo xmlns:a="http://schemas.openxmlformats.org/drawingml/2006/main" xmlns:r="http://schemas.openxmlformats.org/officeDocument/2006/relationships" xmlns:ac="http://schemas.microsoft.com/office/drawing/2013/main/command" xmlns:pc="http://schemas.microsoft.com/office/powerpoint/2013/main/command">
+  <pc:docChgLst>
+    <pc:chgData name="Sharon Pesca Alba" userId="e0b434a8-459f-4db2-b279-4dd028cb1c3a" providerId="ADAL" clId="{A0B38528-139F-45AC-98AB-5E2BBB5B833F}"/>
+    <pc:docChg chg="modSld">
+      <pc:chgData name="Sharon Pesca Alba" userId="e0b434a8-459f-4db2-b279-4dd028cb1c3a" providerId="ADAL" clId="{A0B38528-139F-45AC-98AB-5E2BBB5B833F}" dt="2026-05-03T23:00:22.732" v="0" actId="14100"/>
+      <pc:docMkLst>
+        <pc:docMk/>
+      </pc:docMkLst>
+      <pc:sldChg chg="modSp mod">
+        <pc:chgData name="Sharon Pesca Alba" userId="e0b434a8-459f-4db2-b279-4dd028cb1c3a" providerId="ADAL" clId="{A0B38528-139F-45AC-98AB-5E2BBB5B833F}" dt="2026-05-03T23:00:22.732" v="0" actId="14100"/>
+        <pc:sldMkLst>
+          <pc:docMk/>
+          <pc:sldMk cId="0" sldId="263"/>
+        </pc:sldMkLst>
+        <pc:picChg chg="mod">
+          <ac:chgData name="Sharon Pesca Alba" userId="e0b434a8-459f-4db2-b279-4dd028cb1c3a" providerId="ADAL" clId="{A0B38528-139F-45AC-98AB-5E2BBB5B833F}" dt="2026-05-03T23:00:22.732" v="0" actId="14100"/>
+          <ac:picMkLst>
+            <pc:docMk/>
+            <pc:sldMk cId="0" sldId="263"/>
+            <ac:picMk id="175" creationId="{00000000-0000-0000-0000-000000000000}"/>
+          </ac:picMkLst>
+        </pc:picChg>
+      </pc:sldChg>
+    </pc:docChg>
+  </pc:docChgLst>
+</pc:chgInfo>
+</file>
+
 <file path=ppt/notesMasters/notesMaster1.xml><?xml version="1.0" encoding="utf-8"?>
-<p:notesMaster xmlns:a="http://schemas.openxmlformats.org/drawingml/2006/main" xmlns:r="http://schemas.openxmlformats.org/officeDocument/2006/relationships" xmlns:mc="http://schemas.openxmlformats.org/markup-compatibility/2006" xmlns:mv="urn:schemas-microsoft-com:mac:vml" xmlns:p="http://schemas.openxmlformats.org/presentationml/2006/main" xmlns:c="http://schemas.openxmlformats.org/drawingml/2006/chart" xmlns:dgm="http://schemas.openxmlformats.org/drawingml/2006/diagram" xmlns:o="urn:schemas-microsoft-com:office:office" xmlns:v="urn:schemas-microsoft-com:vml" xmlns:pvml="urn:schemas-microsoft-com:office:powerpoint" xmlns:com="http://schemas.openxmlformats.org/drawingml/2006/compatibility" xmlns:p14="http://schemas.microsoft.com/office/powerpoint/2010/main" xmlns:p15="http://schemas.microsoft.com/office/powerpoint/2012/main" xmlns:ahyp="http://schemas.microsoft.com/office/drawing/2018/hyperlinkcolor">
+<p:notesMaster xmlns:a="http://schemas.openxmlformats.org/drawingml/2006/main" xmlns:r="http://schemas.openxmlformats.org/officeDocument/2006/relationships" xmlns:p="http://schemas.openxmlformats.org/presentationml/2006/main">
   <p:cSld>
+    <p:bg>
+      <p:bgRef idx="1001">
+        <a:schemeClr val="bg1"/>
+      </p:bgRef>
+    </p:bg>
     <p:spTree>
       <p:nvGrpSpPr>
-        <p:cNvPr id="2" name="Shape 2"/>
+        <p:cNvPr id="1" name="Shape 2"/>
         <p:cNvGrpSpPr/>
         <p:nvPr/>
       </p:nvGrpSpPr>
@@ -294,9 +328,11 @@
       <p:sp>
         <p:nvSpPr>
           <p:cNvPr id="3" name="Google Shape;3;n"/>
-          <p:cNvSpPr/>
+          <p:cNvSpPr>
+            <a:spLocks noGrp="1" noRot="1" noChangeAspect="1"/>
+          </p:cNvSpPr>
           <p:nvPr>
-            <p:ph idx="2" type="sldImg"/>
+            <p:ph type="sldImg" idx="2"/>
           </p:nvPr>
         </p:nvSpPr>
         <p:spPr>
@@ -305,9 +341,13 @@
             <a:ext cx="6096075" cy="3429000"/>
           </a:xfrm>
           <a:custGeom>
-            <a:rect b="b" l="l" r="r" t="t"/>
+            <a:avLst/>
+            <a:gdLst/>
+            <a:ahLst/>
+            <a:cxnLst/>
+            <a:rect l="l" t="t" r="r" b="b"/>
             <a:pathLst>
-              <a:path extrusionOk="0" h="120000" w="120000">
+              <a:path w="120000" h="120000" extrusionOk="0">
                 <a:moveTo>
                   <a:pt x="0" y="0"/>
                 </a:moveTo>
@@ -325,23 +365,25 @@
             </a:pathLst>
           </a:custGeom>
           <a:noFill/>
-          <a:ln cap="flat" cmpd="sng" w="9525">
+          <a:ln w="9525" cap="flat" cmpd="sng">
             <a:solidFill>
               <a:srgbClr val="000000"/>
             </a:solidFill>
             <a:prstDash val="solid"/>
             <a:round/>
-            <a:headEnd len="sm" w="sm" type="none"/>
-            <a:tailEnd len="sm" w="sm" type="none"/>
+            <a:headEnd type="none" w="sm" len="sm"/>
+            <a:tailEnd type="none" w="sm" len="sm"/>
           </a:ln>
         </p:spPr>
       </p:sp>
       <p:sp>
         <p:nvSpPr>
           <p:cNvPr id="4" name="Google Shape;4;n"/>
-          <p:cNvSpPr txBox="1"/>
+          <p:cNvSpPr txBox="1">
+            <a:spLocks noGrp="1"/>
+          </p:cNvSpPr>
           <p:nvPr>
-            <p:ph idx="1" type="body"/>
+            <p:ph type="body" idx="1"/>
           </p:nvPr>
         </p:nvSpPr>
         <p:spPr>
@@ -358,11 +400,11 @@
           </a:ln>
         </p:spPr>
         <p:txBody>
-          <a:bodyPr anchorCtr="0" anchor="t" bIns="91425" lIns="91425" spcFirstLastPara="1" rIns="91425" wrap="square" tIns="91425">
+          <a:bodyPr spcFirstLastPara="1" wrap="square" lIns="91425" tIns="91425" rIns="91425" bIns="91425" anchor="t" anchorCtr="0">
             <a:noAutofit/>
           </a:bodyPr>
           <a:lstStyle>
-            <a:lvl1pPr indent="-298450" lvl="0" marL="457200">
+            <a:lvl1pPr marL="457200" lvl="0" indent="-298450">
               <a:spcBef>
                 <a:spcPts val="0"/>
               </a:spcBef>
@@ -373,7 +415,7 @@
               <a:buChar char="●"/>
               <a:defRPr sz="1100"/>
             </a:lvl1pPr>
-            <a:lvl2pPr indent="-298450" lvl="1" marL="914400">
+            <a:lvl2pPr marL="914400" lvl="1" indent="-298450">
               <a:spcBef>
                 <a:spcPts val="0"/>
               </a:spcBef>
@@ -384,7 +426,7 @@
               <a:buChar char="○"/>
               <a:defRPr sz="1100"/>
             </a:lvl2pPr>
-            <a:lvl3pPr indent="-298450" lvl="2" marL="1371600">
+            <a:lvl3pPr marL="1371600" lvl="2" indent="-298450">
               <a:spcBef>
                 <a:spcPts val="0"/>
               </a:spcBef>
@@ -395,7 +437,7 @@
               <a:buChar char="■"/>
               <a:defRPr sz="1100"/>
             </a:lvl3pPr>
-            <a:lvl4pPr indent="-298450" lvl="3" marL="1828800">
+            <a:lvl4pPr marL="1828800" lvl="3" indent="-298450">
               <a:spcBef>
                 <a:spcPts val="0"/>
               </a:spcBef>
@@ -406,7 +448,7 @@
               <a:buChar char="●"/>
               <a:defRPr sz="1100"/>
             </a:lvl4pPr>
-            <a:lvl5pPr indent="-298450" lvl="4" marL="2286000">
+            <a:lvl5pPr marL="2286000" lvl="4" indent="-298450">
               <a:spcBef>
                 <a:spcPts val="0"/>
               </a:spcBef>
@@ -417,7 +459,7 @@
               <a:buChar char="○"/>
               <a:defRPr sz="1100"/>
             </a:lvl5pPr>
-            <a:lvl6pPr indent="-298450" lvl="5" marL="2743200">
+            <a:lvl6pPr marL="2743200" lvl="5" indent="-298450">
               <a:spcBef>
                 <a:spcPts val="0"/>
               </a:spcBef>
@@ -428,7 +470,7 @@
               <a:buChar char="■"/>
               <a:defRPr sz="1100"/>
             </a:lvl6pPr>
-            <a:lvl7pPr indent="-298450" lvl="6" marL="3200400">
+            <a:lvl7pPr marL="3200400" lvl="6" indent="-298450">
               <a:spcBef>
                 <a:spcPts val="0"/>
               </a:spcBef>
@@ -439,7 +481,7 @@
               <a:buChar char="●"/>
               <a:defRPr sz="1100"/>
             </a:lvl7pPr>
-            <a:lvl8pPr indent="-298450" lvl="7" marL="3657600">
+            <a:lvl8pPr marL="3657600" lvl="7" indent="-298450">
               <a:spcBef>
                 <a:spcPts val="0"/>
               </a:spcBef>
@@ -450,7 +492,7 @@
               <a:buChar char="○"/>
               <a:defRPr sz="1100"/>
             </a:lvl8pPr>
-            <a:lvl9pPr indent="-298450" lvl="8" marL="4114800">
+            <a:lvl9pPr marL="4114800" lvl="8" indent="-298450">
               <a:spcBef>
                 <a:spcPts val="0"/>
               </a:spcBef>
@@ -462,14 +504,16 @@
               <a:defRPr sz="1100"/>
             </a:lvl9pPr>
           </a:lstStyle>
-          <a:p/>
+          <a:p>
+            <a:endParaRPr/>
+          </a:p>
         </p:txBody>
       </p:sp>
     </p:spTree>
   </p:cSld>
-  <p:clrMap accent1="accent1" accent2="accent2" accent3="accent3" accent4="accent4" accent5="accent5" accent6="accent6" bg1="lt1" bg2="dk2" tx1="dk1" tx2="lt2" folHlink="folHlink" hlink="hlink"/>
+  <p:clrMap bg1="lt1" tx1="dk1" bg2="dk2" tx2="lt2" accent1="accent1" accent2="accent2" accent3="accent3" accent4="accent4" accent5="accent5" accent6="accent6" hlink="hlink" folHlink="folHlink"/>
   <p:notesStyle>
-    <a:defPPr lvl="0" marR="0" rtl="0" algn="l">
+    <a:defPPr marR="0" lvl="0" algn="l" rtl="0">
       <a:lnSpc>
         <a:spcPct val="100000"/>
       </a:lnSpc>
@@ -480,7 +524,7 @@
         <a:spcPts val="0"/>
       </a:spcAft>
     </a:defPPr>
-    <a:lvl1pPr lvl="0" marR="0" rtl="0" algn="l">
+    <a:lvl1pPr marR="0" lvl="0" algn="l" rtl="0">
       <a:lnSpc>
         <a:spcPct val="100000"/>
       </a:lnSpc>
@@ -494,7 +538,7 @@
         <a:srgbClr val="000000"/>
       </a:buClr>
       <a:buFont typeface="Arial"/>
-      <a:defRPr b="0" i="0" sz="1400" u="none" cap="none" strike="noStrike">
+      <a:defRPr sz="1400" b="0" i="0" u="none" strike="noStrike" cap="none">
         <a:solidFill>
           <a:srgbClr val="000000"/>
         </a:solidFill>
@@ -504,7 +548,7 @@
         <a:sym typeface="Arial"/>
       </a:defRPr>
     </a:lvl1pPr>
-    <a:lvl2pPr lvl="1" marR="0" rtl="0" algn="l">
+    <a:lvl2pPr marR="0" lvl="1" algn="l" rtl="0">
       <a:lnSpc>
         <a:spcPct val="100000"/>
       </a:lnSpc>
@@ -518,7 +562,7 @@
         <a:srgbClr val="000000"/>
       </a:buClr>
       <a:buFont typeface="Arial"/>
-      <a:defRPr b="0" i="0" sz="1400" u="none" cap="none" strike="noStrike">
+      <a:defRPr sz="1400" b="0" i="0" u="none" strike="noStrike" cap="none">
         <a:solidFill>
           <a:srgbClr val="000000"/>
         </a:solidFill>
@@ -528,7 +572,7 @@
         <a:sym typeface="Arial"/>
       </a:defRPr>
     </a:lvl2pPr>
-    <a:lvl3pPr lvl="2" marR="0" rtl="0" algn="l">
+    <a:lvl3pPr marR="0" lvl="2" algn="l" rtl="0">
       <a:lnSpc>
         <a:spcPct val="100000"/>
       </a:lnSpc>
@@ -542,7 +586,7 @@
         <a:srgbClr val="000000"/>
       </a:buClr>
       <a:buFont typeface="Arial"/>
-      <a:defRPr b="0" i="0" sz="1400" u="none" cap="none" strike="noStrike">
+      <a:defRPr sz="1400" b="0" i="0" u="none" strike="noStrike" cap="none">
         <a:solidFill>
           <a:srgbClr val="000000"/>
         </a:solidFill>
@@ -552,7 +596,7 @@
         <a:sym typeface="Arial"/>
       </a:defRPr>
     </a:lvl3pPr>
-    <a:lvl4pPr lvl="3" marR="0" rtl="0" algn="l">
+    <a:lvl4pPr marR="0" lvl="3" algn="l" rtl="0">
       <a:lnSpc>
         <a:spcPct val="100000"/>
       </a:lnSpc>
@@ -566,7 +610,7 @@
         <a:srgbClr val="000000"/>
       </a:buClr>
       <a:buFont typeface="Arial"/>
-      <a:defRPr b="0" i="0" sz="1400" u="none" cap="none" strike="noStrike">
+      <a:defRPr sz="1400" b="0" i="0" u="none" strike="noStrike" cap="none">
         <a:solidFill>
           <a:srgbClr val="000000"/>
         </a:solidFill>
@@ -576,7 +620,7 @@
         <a:sym typeface="Arial"/>
       </a:defRPr>
     </a:lvl4pPr>
-    <a:lvl5pPr lvl="4" marR="0" rtl="0" algn="l">
+    <a:lvl5pPr marR="0" lvl="4" algn="l" rtl="0">
       <a:lnSpc>
         <a:spcPct val="100000"/>
       </a:lnSpc>
@@ -590,7 +634,7 @@
         <a:srgbClr val="000000"/>
       </a:buClr>
       <a:buFont typeface="Arial"/>
-      <a:defRPr b="0" i="0" sz="1400" u="none" cap="none" strike="noStrike">
+      <a:defRPr sz="1400" b="0" i="0" u="none" strike="noStrike" cap="none">
         <a:solidFill>
           <a:srgbClr val="000000"/>
         </a:solidFill>
@@ -600,7 +644,7 @@
         <a:sym typeface="Arial"/>
       </a:defRPr>
     </a:lvl5pPr>
-    <a:lvl6pPr lvl="5" marR="0" rtl="0" algn="l">
+    <a:lvl6pPr marR="0" lvl="5" algn="l" rtl="0">
       <a:lnSpc>
         <a:spcPct val="100000"/>
       </a:lnSpc>
@@ -614,7 +658,7 @@
         <a:srgbClr val="000000"/>
       </a:buClr>
       <a:buFont typeface="Arial"/>
-      <a:defRPr b="0" i="0" sz="1400" u="none" cap="none" strike="noStrike">
+      <a:defRPr sz="1400" b="0" i="0" u="none" strike="noStrike" cap="none">
         <a:solidFill>
           <a:srgbClr val="000000"/>
         </a:solidFill>
@@ -624,7 +668,7 @@
         <a:sym typeface="Arial"/>
       </a:defRPr>
     </a:lvl6pPr>
-    <a:lvl7pPr lvl="6" marR="0" rtl="0" algn="l">
+    <a:lvl7pPr marR="0" lvl="6" algn="l" rtl="0">
       <a:lnSpc>
         <a:spcPct val="100000"/>
       </a:lnSpc>
@@ -638,7 +682,7 @@
         <a:srgbClr val="000000"/>
       </a:buClr>
       <a:buFont typeface="Arial"/>
-      <a:defRPr b="0" i="0" sz="1400" u="none" cap="none" strike="noStrike">
+      <a:defRPr sz="1400" b="0" i="0" u="none" strike="noStrike" cap="none">
         <a:solidFill>
           <a:srgbClr val="000000"/>
         </a:solidFill>
@@ -648,7 +692,7 @@
         <a:sym typeface="Arial"/>
       </a:defRPr>
     </a:lvl7pPr>
-    <a:lvl8pPr lvl="7" marR="0" rtl="0" algn="l">
+    <a:lvl8pPr marR="0" lvl="7" algn="l" rtl="0">
       <a:lnSpc>
         <a:spcPct val="100000"/>
       </a:lnSpc>
@@ -662,7 +706,7 @@
         <a:srgbClr val="000000"/>
       </a:buClr>
       <a:buFont typeface="Arial"/>
-      <a:defRPr b="0" i="0" sz="1400" u="none" cap="none" strike="noStrike">
+      <a:defRPr sz="1400" b="0" i="0" u="none" strike="noStrike" cap="none">
         <a:solidFill>
           <a:srgbClr val="000000"/>
         </a:solidFill>
@@ -672,7 +716,7 @@
         <a:sym typeface="Arial"/>
       </a:defRPr>
     </a:lvl8pPr>
-    <a:lvl9pPr lvl="8" marR="0" rtl="0" algn="l">
+    <a:lvl9pPr marR="0" lvl="8" algn="l" rtl="0">
       <a:lnSpc>
         <a:spcPct val="100000"/>
       </a:lnSpc>
@@ -686,7 +730,7 @@
         <a:srgbClr val="000000"/>
       </a:buClr>
       <a:buFont typeface="Arial"/>
-      <a:defRPr b="0" i="0" sz="1400" u="none" cap="none" strike="noStrike">
+      <a:defRPr sz="1400" b="0" i="0" u="none" strike="noStrike" cap="none">
         <a:solidFill>
           <a:srgbClr val="000000"/>
         </a:solidFill>
@@ -701,11 +745,11 @@
 </file>
 
 <file path=ppt/notesSlides/notesSlide1.xml><?xml version="1.0" encoding="utf-8"?>
-<p:notes xmlns:a="http://schemas.openxmlformats.org/drawingml/2006/main" xmlns:r="http://schemas.openxmlformats.org/officeDocument/2006/relationships" xmlns:mc="http://schemas.openxmlformats.org/markup-compatibility/2006" xmlns:mv="urn:schemas-microsoft-com:mac:vml" xmlns:p="http://schemas.openxmlformats.org/presentationml/2006/main" xmlns:c="http://schemas.openxmlformats.org/drawingml/2006/chart" xmlns:dgm="http://schemas.openxmlformats.org/drawingml/2006/diagram" xmlns:o="urn:schemas-microsoft-com:office:office" xmlns:v="urn:schemas-microsoft-com:vml" xmlns:pvml="urn:schemas-microsoft-com:office:powerpoint" xmlns:com="http://schemas.openxmlformats.org/drawingml/2006/compatibility" xmlns:p14="http://schemas.microsoft.com/office/powerpoint/2010/main" xmlns:p15="http://schemas.microsoft.com/office/powerpoint/2012/main" xmlns:ahyp="http://schemas.microsoft.com/office/drawing/2018/hyperlinkcolor" showMasterPhAnim="0" showMasterSp="0">
+<p:notes xmlns:a="http://schemas.openxmlformats.org/drawingml/2006/main" xmlns:r="http://schemas.openxmlformats.org/officeDocument/2006/relationships" xmlns:p="http://schemas.openxmlformats.org/presentationml/2006/main" showMasterSp="0" showMasterPhAnim="0">
   <p:cSld>
     <p:spTree>
       <p:nvGrpSpPr>
-        <p:cNvPr id="50" name="Shape 50"/>
+        <p:cNvPr id="1" name="Shape 50"/>
         <p:cNvGrpSpPr/>
         <p:nvPr/>
       </p:nvGrpSpPr>
@@ -720,9 +764,11 @@
       <p:sp>
         <p:nvSpPr>
           <p:cNvPr id="51" name="Google Shape;51;p:notes"/>
-          <p:cNvSpPr/>
+          <p:cNvSpPr>
+            <a:spLocks noGrp="1" noRot="1" noChangeAspect="1"/>
+          </p:cNvSpPr>
           <p:nvPr>
-            <p:ph idx="2" type="sldImg"/>
+            <p:ph type="sldImg" idx="2"/>
           </p:nvPr>
         </p:nvSpPr>
         <p:spPr>
@@ -731,9 +777,13 @@
             <a:ext cx="6096075" cy="3429000"/>
           </a:xfrm>
           <a:custGeom>
-            <a:rect b="b" l="l" r="r" t="t"/>
+            <a:avLst/>
+            <a:gdLst/>
+            <a:ahLst/>
+            <a:cxnLst/>
+            <a:rect l="l" t="t" r="r" b="b"/>
             <a:pathLst>
-              <a:path extrusionOk="0" h="120000" w="120000">
+              <a:path w="120000" h="120000" extrusionOk="0">
                 <a:moveTo>
                   <a:pt x="0" y="0"/>
                 </a:moveTo>
@@ -755,9 +805,11 @@
       <p:sp>
         <p:nvSpPr>
           <p:cNvPr id="52" name="Google Shape;52;p:notes"/>
-          <p:cNvSpPr txBox="1"/>
+          <p:cNvSpPr txBox="1">
+            <a:spLocks noGrp="1"/>
+          </p:cNvSpPr>
           <p:nvPr>
-            <p:ph idx="1" type="body"/>
+            <p:ph type="body" idx="1"/>
           </p:nvPr>
         </p:nvSpPr>
         <p:spPr>
@@ -770,23 +822,20 @@
           </a:prstGeom>
         </p:spPr>
         <p:txBody>
-          <a:bodyPr anchorCtr="0" anchor="t" bIns="91425" lIns="91425" spcFirstLastPara="1" rIns="91425" wrap="square" tIns="91425">
+          <a:bodyPr spcFirstLastPara="1" wrap="square" lIns="91425" tIns="91425" rIns="91425" bIns="91425" anchor="t" anchorCtr="0">
             <a:noAutofit/>
           </a:bodyPr>
           <a:lstStyle/>
           <a:p>
-            <a:pPr indent="0" lvl="0" marL="0" rtl="0" algn="l">
-              <a:spcBef>
-                <a:spcPts val="0"/>
-              </a:spcBef>
-              <a:spcAft>
-                <a:spcPts val="0"/>
-              </a:spcAft>
-              <a:buNone/>
-            </a:pPr>
-            <a:r>
-              <a:t/>
-            </a:r>
+            <a:pPr marL="0" lvl="0" indent="0" algn="l" rtl="0">
+              <a:spcBef>
+                <a:spcPts val="0"/>
+              </a:spcBef>
+              <a:spcAft>
+                <a:spcPts val="0"/>
+              </a:spcAft>
+              <a:buNone/>
+            </a:pPr>
             <a:endParaRPr/>
           </a:p>
         </p:txBody>
@@ -800,11 +849,11 @@
 </file>
 
 <file path=ppt/notesSlides/notesSlide2.xml><?xml version="1.0" encoding="utf-8"?>
-<p:notes xmlns:a="http://schemas.openxmlformats.org/drawingml/2006/main" xmlns:r="http://schemas.openxmlformats.org/officeDocument/2006/relationships" xmlns:mc="http://schemas.openxmlformats.org/markup-compatibility/2006" xmlns:mv="urn:schemas-microsoft-com:mac:vml" xmlns:p="http://schemas.openxmlformats.org/presentationml/2006/main" xmlns:c="http://schemas.openxmlformats.org/drawingml/2006/chart" xmlns:dgm="http://schemas.openxmlformats.org/drawingml/2006/diagram" xmlns:o="urn:schemas-microsoft-com:office:office" xmlns:v="urn:schemas-microsoft-com:vml" xmlns:pvml="urn:schemas-microsoft-com:office:powerpoint" xmlns:com="http://schemas.openxmlformats.org/drawingml/2006/compatibility" xmlns:p14="http://schemas.microsoft.com/office/powerpoint/2010/main" xmlns:p15="http://schemas.microsoft.com/office/powerpoint/2012/main" xmlns:ahyp="http://schemas.microsoft.com/office/drawing/2018/hyperlinkcolor" showMasterPhAnim="0" showMasterSp="0">
+<p:notes xmlns:a="http://schemas.openxmlformats.org/drawingml/2006/main" xmlns:r="http://schemas.openxmlformats.org/officeDocument/2006/relationships" xmlns:p="http://schemas.openxmlformats.org/presentationml/2006/main" showMasterSp="0" showMasterPhAnim="0">
   <p:cSld>
     <p:spTree>
       <p:nvGrpSpPr>
-        <p:cNvPr id="56" name="Shape 56"/>
+        <p:cNvPr id="1" name="Shape 56"/>
         <p:cNvGrpSpPr/>
         <p:nvPr/>
       </p:nvGrpSpPr>
@@ -819,9 +868,11 @@
       <p:sp>
         <p:nvSpPr>
           <p:cNvPr id="57" name="Google Shape;57;g202fefc93e3_0_7:notes"/>
-          <p:cNvSpPr/>
+          <p:cNvSpPr>
+            <a:spLocks noGrp="1" noRot="1" noChangeAspect="1"/>
+          </p:cNvSpPr>
           <p:nvPr>
-            <p:ph idx="2" type="sldImg"/>
+            <p:ph type="sldImg" idx="2"/>
           </p:nvPr>
         </p:nvSpPr>
         <p:spPr>
@@ -830,9 +881,13 @@
             <a:ext cx="6096000" cy="3429000"/>
           </a:xfrm>
           <a:custGeom>
-            <a:rect b="b" l="l" r="r" t="t"/>
+            <a:avLst/>
+            <a:gdLst/>
+            <a:ahLst/>
+            <a:cxnLst/>
+            <a:rect l="l" t="t" r="r" b="b"/>
             <a:pathLst>
-              <a:path extrusionOk="0" h="120000" w="120000">
+              <a:path w="120000" h="120000" extrusionOk="0">
                 <a:moveTo>
                   <a:pt x="0" y="0"/>
                 </a:moveTo>
@@ -854,9 +909,11 @@
       <p:sp>
         <p:nvSpPr>
           <p:cNvPr id="58" name="Google Shape;58;g202fefc93e3_0_7:notes"/>
-          <p:cNvSpPr txBox="1"/>
+          <p:cNvSpPr txBox="1">
+            <a:spLocks noGrp="1"/>
+          </p:cNvSpPr>
           <p:nvPr>
-            <p:ph idx="1" type="body"/>
+            <p:ph type="body" idx="1"/>
           </p:nvPr>
         </p:nvSpPr>
         <p:spPr>
@@ -869,23 +926,20 @@
           </a:prstGeom>
         </p:spPr>
         <p:txBody>
-          <a:bodyPr anchorCtr="0" anchor="t" bIns="91425" lIns="91425" spcFirstLastPara="1" rIns="91425" wrap="square" tIns="91425">
+          <a:bodyPr spcFirstLastPara="1" wrap="square" lIns="91425" tIns="91425" rIns="91425" bIns="91425" anchor="t" anchorCtr="0">
             <a:noAutofit/>
           </a:bodyPr>
           <a:lstStyle/>
           <a:p>
-            <a:pPr indent="0" lvl="0" marL="0" rtl="0" algn="l">
-              <a:spcBef>
-                <a:spcPts val="0"/>
-              </a:spcBef>
-              <a:spcAft>
-                <a:spcPts val="0"/>
-              </a:spcAft>
-              <a:buNone/>
-            </a:pPr>
-            <a:r>
-              <a:t/>
-            </a:r>
+            <a:pPr marL="0" lvl="0" indent="0" algn="l" rtl="0">
+              <a:spcBef>
+                <a:spcPts val="0"/>
+              </a:spcBef>
+              <a:spcAft>
+                <a:spcPts val="0"/>
+              </a:spcAft>
+              <a:buNone/>
+            </a:pPr>
             <a:endParaRPr/>
           </a:p>
         </p:txBody>
@@ -899,11 +953,11 @@
 </file>
 
 <file path=ppt/notesSlides/notesSlide3.xml><?xml version="1.0" encoding="utf-8"?>
-<p:notes xmlns:a="http://schemas.openxmlformats.org/drawingml/2006/main" xmlns:r="http://schemas.openxmlformats.org/officeDocument/2006/relationships" xmlns:mc="http://schemas.openxmlformats.org/markup-compatibility/2006" xmlns:mv="urn:schemas-microsoft-com:mac:vml" xmlns:p="http://schemas.openxmlformats.org/presentationml/2006/main" xmlns:c="http://schemas.openxmlformats.org/drawingml/2006/chart" xmlns:dgm="http://schemas.openxmlformats.org/drawingml/2006/diagram" xmlns:o="urn:schemas-microsoft-com:office:office" xmlns:v="urn:schemas-microsoft-com:vml" xmlns:pvml="urn:schemas-microsoft-com:office:powerpoint" xmlns:com="http://schemas.openxmlformats.org/drawingml/2006/compatibility" xmlns:p14="http://schemas.microsoft.com/office/powerpoint/2010/main" xmlns:p15="http://schemas.microsoft.com/office/powerpoint/2012/main" xmlns:ahyp="http://schemas.microsoft.com/office/drawing/2018/hyperlinkcolor" showMasterPhAnim="0" showMasterSp="0">
+<p:notes xmlns:a="http://schemas.openxmlformats.org/drawingml/2006/main" xmlns:r="http://schemas.openxmlformats.org/officeDocument/2006/relationships" xmlns:p="http://schemas.openxmlformats.org/presentationml/2006/main" showMasterSp="0" showMasterPhAnim="0">
   <p:cSld>
     <p:spTree>
       <p:nvGrpSpPr>
-        <p:cNvPr id="71" name="Shape 71"/>
+        <p:cNvPr id="1" name="Shape 71"/>
         <p:cNvGrpSpPr/>
         <p:nvPr/>
       </p:nvGrpSpPr>
@@ -918,9 +972,11 @@
       <p:sp>
         <p:nvSpPr>
           <p:cNvPr id="72" name="Google Shape;72;g211f5b0a173_0_35:notes"/>
-          <p:cNvSpPr/>
+          <p:cNvSpPr>
+            <a:spLocks noGrp="1" noRot="1" noChangeAspect="1"/>
+          </p:cNvSpPr>
           <p:nvPr>
-            <p:ph idx="2" type="sldImg"/>
+            <p:ph type="sldImg" idx="2"/>
           </p:nvPr>
         </p:nvSpPr>
         <p:spPr>
@@ -929,9 +985,13 @@
             <a:ext cx="6096000" cy="3429000"/>
           </a:xfrm>
           <a:custGeom>
-            <a:rect b="b" l="l" r="r" t="t"/>
+            <a:avLst/>
+            <a:gdLst/>
+            <a:ahLst/>
+            <a:cxnLst/>
+            <a:rect l="l" t="t" r="r" b="b"/>
             <a:pathLst>
-              <a:path extrusionOk="0" h="120000" w="120000">
+              <a:path w="120000" h="120000" extrusionOk="0">
                 <a:moveTo>
                   <a:pt x="0" y="0"/>
                 </a:moveTo>
@@ -953,9 +1013,11 @@
       <p:sp>
         <p:nvSpPr>
           <p:cNvPr id="73" name="Google Shape;73;g211f5b0a173_0_35:notes"/>
-          <p:cNvSpPr txBox="1"/>
+          <p:cNvSpPr txBox="1">
+            <a:spLocks noGrp="1"/>
+          </p:cNvSpPr>
           <p:nvPr>
-            <p:ph idx="1" type="body"/>
+            <p:ph type="body" idx="1"/>
           </p:nvPr>
         </p:nvSpPr>
         <p:spPr>
@@ -968,23 +1030,20 @@
           </a:prstGeom>
         </p:spPr>
         <p:txBody>
-          <a:bodyPr anchorCtr="0" anchor="t" bIns="91425" lIns="91425" spcFirstLastPara="1" rIns="91425" wrap="square" tIns="91425">
+          <a:bodyPr spcFirstLastPara="1" wrap="square" lIns="91425" tIns="91425" rIns="91425" bIns="91425" anchor="t" anchorCtr="0">
             <a:noAutofit/>
           </a:bodyPr>
           <a:lstStyle/>
           <a:p>
-            <a:pPr indent="0" lvl="0" marL="0" rtl="0" algn="l">
-              <a:spcBef>
-                <a:spcPts val="0"/>
-              </a:spcBef>
-              <a:spcAft>
-                <a:spcPts val="0"/>
-              </a:spcAft>
-              <a:buNone/>
-            </a:pPr>
-            <a:r>
-              <a:t/>
-            </a:r>
+            <a:pPr marL="0" lvl="0" indent="0" algn="l" rtl="0">
+              <a:spcBef>
+                <a:spcPts val="0"/>
+              </a:spcBef>
+              <a:spcAft>
+                <a:spcPts val="0"/>
+              </a:spcAft>
+              <a:buNone/>
+            </a:pPr>
             <a:endParaRPr/>
           </a:p>
         </p:txBody>
@@ -998,11 +1057,11 @@
 </file>
 
 <file path=ppt/notesSlides/notesSlide4.xml><?xml version="1.0" encoding="utf-8"?>
-<p:notes xmlns:a="http://schemas.openxmlformats.org/drawingml/2006/main" xmlns:r="http://schemas.openxmlformats.org/officeDocument/2006/relationships" xmlns:mc="http://schemas.openxmlformats.org/markup-compatibility/2006" xmlns:mv="urn:schemas-microsoft-com:mac:vml" xmlns:p="http://schemas.openxmlformats.org/presentationml/2006/main" xmlns:c="http://schemas.openxmlformats.org/drawingml/2006/chart" xmlns:dgm="http://schemas.openxmlformats.org/drawingml/2006/diagram" xmlns:o="urn:schemas-microsoft-com:office:office" xmlns:v="urn:schemas-microsoft-com:vml" xmlns:pvml="urn:schemas-microsoft-com:office:powerpoint" xmlns:com="http://schemas.openxmlformats.org/drawingml/2006/compatibility" xmlns:p14="http://schemas.microsoft.com/office/powerpoint/2010/main" xmlns:p15="http://schemas.microsoft.com/office/powerpoint/2012/main" xmlns:ahyp="http://schemas.microsoft.com/office/drawing/2018/hyperlinkcolor" showMasterPhAnim="0" showMasterSp="0">
+<p:notes xmlns:a="http://schemas.openxmlformats.org/drawingml/2006/main" xmlns:r="http://schemas.openxmlformats.org/officeDocument/2006/relationships" xmlns:p="http://schemas.openxmlformats.org/presentationml/2006/main" showMasterSp="0" showMasterPhAnim="0">
   <p:cSld>
     <p:spTree>
       <p:nvGrpSpPr>
-        <p:cNvPr id="97" name="Shape 97"/>
+        <p:cNvPr id="1" name="Shape 97"/>
         <p:cNvGrpSpPr/>
         <p:nvPr/>
       </p:nvGrpSpPr>
@@ -1017,9 +1076,11 @@
       <p:sp>
         <p:nvSpPr>
           <p:cNvPr id="98" name="Google Shape;98;g2152ce65bcc_0_23:notes"/>
-          <p:cNvSpPr/>
+          <p:cNvSpPr>
+            <a:spLocks noGrp="1" noRot="1" noChangeAspect="1"/>
+          </p:cNvSpPr>
           <p:nvPr>
-            <p:ph idx="2" type="sldImg"/>
+            <p:ph type="sldImg" idx="2"/>
           </p:nvPr>
         </p:nvSpPr>
         <p:spPr>
@@ -1028,9 +1089,13 @@
             <a:ext cx="6096000" cy="3429000"/>
           </a:xfrm>
           <a:custGeom>
-            <a:rect b="b" l="l" r="r" t="t"/>
+            <a:avLst/>
+            <a:gdLst/>
+            <a:ahLst/>
+            <a:cxnLst/>
+            <a:rect l="l" t="t" r="r" b="b"/>
             <a:pathLst>
-              <a:path extrusionOk="0" h="120000" w="120000">
+              <a:path w="120000" h="120000" extrusionOk="0">
                 <a:moveTo>
                   <a:pt x="0" y="0"/>
                 </a:moveTo>
@@ -1052,9 +1117,11 @@
       <p:sp>
         <p:nvSpPr>
           <p:cNvPr id="99" name="Google Shape;99;g2152ce65bcc_0_23:notes"/>
-          <p:cNvSpPr txBox="1"/>
+          <p:cNvSpPr txBox="1">
+            <a:spLocks noGrp="1"/>
+          </p:cNvSpPr>
           <p:nvPr>
-            <p:ph idx="1" type="body"/>
+            <p:ph type="body" idx="1"/>
           </p:nvPr>
         </p:nvSpPr>
         <p:spPr>
@@ -1067,23 +1134,20 @@
           </a:prstGeom>
         </p:spPr>
         <p:txBody>
-          <a:bodyPr anchorCtr="0" anchor="t" bIns="91425" lIns="91425" spcFirstLastPara="1" rIns="91425" wrap="square" tIns="91425">
+          <a:bodyPr spcFirstLastPara="1" wrap="square" lIns="91425" tIns="91425" rIns="91425" bIns="91425" anchor="t" anchorCtr="0">
             <a:noAutofit/>
           </a:bodyPr>
           <a:lstStyle/>
           <a:p>
-            <a:pPr indent="0" lvl="0" marL="0" rtl="0" algn="l">
-              <a:spcBef>
-                <a:spcPts val="0"/>
-              </a:spcBef>
-              <a:spcAft>
-                <a:spcPts val="0"/>
-              </a:spcAft>
-              <a:buNone/>
-            </a:pPr>
-            <a:r>
-              <a:t/>
-            </a:r>
+            <a:pPr marL="0" lvl="0" indent="0" algn="l" rtl="0">
+              <a:spcBef>
+                <a:spcPts val="0"/>
+              </a:spcBef>
+              <a:spcAft>
+                <a:spcPts val="0"/>
+              </a:spcAft>
+              <a:buNone/>
+            </a:pPr>
             <a:endParaRPr/>
           </a:p>
         </p:txBody>
@@ -1097,11 +1161,11 @@
 </file>
 
 <file path=ppt/notesSlides/notesSlide5.xml><?xml version="1.0" encoding="utf-8"?>
-<p:notes xmlns:a="http://schemas.openxmlformats.org/drawingml/2006/main" xmlns:r="http://schemas.openxmlformats.org/officeDocument/2006/relationships" xmlns:mc="http://schemas.openxmlformats.org/markup-compatibility/2006" xmlns:mv="urn:schemas-microsoft-com:mac:vml" xmlns:p="http://schemas.openxmlformats.org/presentationml/2006/main" xmlns:c="http://schemas.openxmlformats.org/drawingml/2006/chart" xmlns:dgm="http://schemas.openxmlformats.org/drawingml/2006/diagram" xmlns:o="urn:schemas-microsoft-com:office:office" xmlns:v="urn:schemas-microsoft-com:vml" xmlns:pvml="urn:schemas-microsoft-com:office:powerpoint" xmlns:com="http://schemas.openxmlformats.org/drawingml/2006/compatibility" xmlns:p14="http://schemas.microsoft.com/office/powerpoint/2010/main" xmlns:p15="http://schemas.microsoft.com/office/powerpoint/2012/main" xmlns:ahyp="http://schemas.microsoft.com/office/drawing/2018/hyperlinkcolor" showMasterPhAnim="0" showMasterSp="0">
+<p:notes xmlns:a="http://schemas.openxmlformats.org/drawingml/2006/main" xmlns:r="http://schemas.openxmlformats.org/officeDocument/2006/relationships" xmlns:p="http://schemas.openxmlformats.org/presentationml/2006/main" showMasterSp="0" showMasterPhAnim="0">
   <p:cSld>
     <p:spTree>
       <p:nvGrpSpPr>
-        <p:cNvPr id="109" name="Shape 109"/>
+        <p:cNvPr id="1" name="Shape 109"/>
         <p:cNvGrpSpPr/>
         <p:nvPr/>
       </p:nvGrpSpPr>
@@ -1116,9 +1180,11 @@
       <p:sp>
         <p:nvSpPr>
           <p:cNvPr id="110" name="Google Shape;110;g2152ce65bcc_0_54:notes"/>
-          <p:cNvSpPr/>
+          <p:cNvSpPr>
+            <a:spLocks noGrp="1" noRot="1" noChangeAspect="1"/>
+          </p:cNvSpPr>
           <p:nvPr>
-            <p:ph idx="2" type="sldImg"/>
+            <p:ph type="sldImg" idx="2"/>
           </p:nvPr>
         </p:nvSpPr>
         <p:spPr>
@@ -1127,9 +1193,13 @@
             <a:ext cx="6096000" cy="3429000"/>
           </a:xfrm>
           <a:custGeom>
-            <a:rect b="b" l="l" r="r" t="t"/>
+            <a:avLst/>
+            <a:gdLst/>
+            <a:ahLst/>
+            <a:cxnLst/>
+            <a:rect l="l" t="t" r="r" b="b"/>
             <a:pathLst>
-              <a:path extrusionOk="0" h="120000" w="120000">
+              <a:path w="120000" h="120000" extrusionOk="0">
                 <a:moveTo>
                   <a:pt x="0" y="0"/>
                 </a:moveTo>
@@ -1151,9 +1221,11 @@
       <p:sp>
         <p:nvSpPr>
           <p:cNvPr id="111" name="Google Shape;111;g2152ce65bcc_0_54:notes"/>
-          <p:cNvSpPr txBox="1"/>
+          <p:cNvSpPr txBox="1">
+            <a:spLocks noGrp="1"/>
+          </p:cNvSpPr>
           <p:nvPr>
-            <p:ph idx="1" type="body"/>
+            <p:ph type="body" idx="1"/>
           </p:nvPr>
         </p:nvSpPr>
         <p:spPr>
@@ -1166,23 +1238,20 @@
           </a:prstGeom>
         </p:spPr>
         <p:txBody>
-          <a:bodyPr anchorCtr="0" anchor="t" bIns="91425" lIns="91425" spcFirstLastPara="1" rIns="91425" wrap="square" tIns="91425">
+          <a:bodyPr spcFirstLastPara="1" wrap="square" lIns="91425" tIns="91425" rIns="91425" bIns="91425" anchor="t" anchorCtr="0">
             <a:noAutofit/>
           </a:bodyPr>
           <a:lstStyle/>
           <a:p>
-            <a:pPr indent="0" lvl="0" marL="0" rtl="0" algn="l">
-              <a:spcBef>
-                <a:spcPts val="0"/>
-              </a:spcBef>
-              <a:spcAft>
-                <a:spcPts val="0"/>
-              </a:spcAft>
-              <a:buNone/>
-            </a:pPr>
-            <a:r>
-              <a:t/>
-            </a:r>
+            <a:pPr marL="0" lvl="0" indent="0" algn="l" rtl="0">
+              <a:spcBef>
+                <a:spcPts val="0"/>
+              </a:spcBef>
+              <a:spcAft>
+                <a:spcPts val="0"/>
+              </a:spcAft>
+              <a:buNone/>
+            </a:pPr>
             <a:endParaRPr/>
           </a:p>
         </p:txBody>
@@ -1196,11 +1265,11 @@
 </file>
 
 <file path=ppt/notesSlides/notesSlide6.xml><?xml version="1.0" encoding="utf-8"?>
-<p:notes xmlns:a="http://schemas.openxmlformats.org/drawingml/2006/main" xmlns:r="http://schemas.openxmlformats.org/officeDocument/2006/relationships" xmlns:mc="http://schemas.openxmlformats.org/markup-compatibility/2006" xmlns:mv="urn:schemas-microsoft-com:mac:vml" xmlns:p="http://schemas.openxmlformats.org/presentationml/2006/main" xmlns:c="http://schemas.openxmlformats.org/drawingml/2006/chart" xmlns:dgm="http://schemas.openxmlformats.org/drawingml/2006/diagram" xmlns:o="urn:schemas-microsoft-com:office:office" xmlns:v="urn:schemas-microsoft-com:vml" xmlns:pvml="urn:schemas-microsoft-com:office:powerpoint" xmlns:com="http://schemas.openxmlformats.org/drawingml/2006/compatibility" xmlns:p14="http://schemas.microsoft.com/office/powerpoint/2010/main" xmlns:p15="http://schemas.microsoft.com/office/powerpoint/2012/main" xmlns:ahyp="http://schemas.microsoft.com/office/drawing/2018/hyperlinkcolor" showMasterPhAnim="0" showMasterSp="0">
+<p:notes xmlns:a="http://schemas.openxmlformats.org/drawingml/2006/main" xmlns:r="http://schemas.openxmlformats.org/officeDocument/2006/relationships" xmlns:p="http://schemas.openxmlformats.org/presentationml/2006/main" showMasterSp="0" showMasterPhAnim="0">
   <p:cSld>
     <p:spTree>
       <p:nvGrpSpPr>
-        <p:cNvPr id="124" name="Shape 124"/>
+        <p:cNvPr id="1" name="Shape 124"/>
         <p:cNvGrpSpPr/>
         <p:nvPr/>
       </p:nvGrpSpPr>
@@ -1215,9 +1284,11 @@
       <p:sp>
         <p:nvSpPr>
           <p:cNvPr id="125" name="Google Shape;125;g2152ce65bcc_0_71:notes"/>
-          <p:cNvSpPr/>
+          <p:cNvSpPr>
+            <a:spLocks noGrp="1" noRot="1" noChangeAspect="1"/>
+          </p:cNvSpPr>
           <p:nvPr>
-            <p:ph idx="2" type="sldImg"/>
+            <p:ph type="sldImg" idx="2"/>
           </p:nvPr>
         </p:nvSpPr>
         <p:spPr>
@@ -1226,9 +1297,13 @@
             <a:ext cx="6096000" cy="3429000"/>
           </a:xfrm>
           <a:custGeom>
-            <a:rect b="b" l="l" r="r" t="t"/>
+            <a:avLst/>
+            <a:gdLst/>
+            <a:ahLst/>
+            <a:cxnLst/>
+            <a:rect l="l" t="t" r="r" b="b"/>
             <a:pathLst>
-              <a:path extrusionOk="0" h="120000" w="120000">
+              <a:path w="120000" h="120000" extrusionOk="0">
                 <a:moveTo>
                   <a:pt x="0" y="0"/>
                 </a:moveTo>
@@ -1250,9 +1325,11 @@
       <p:sp>
         <p:nvSpPr>
           <p:cNvPr id="126" name="Google Shape;126;g2152ce65bcc_0_71:notes"/>
-          <p:cNvSpPr txBox="1"/>
+          <p:cNvSpPr txBox="1">
+            <a:spLocks noGrp="1"/>
+          </p:cNvSpPr>
           <p:nvPr>
-            <p:ph idx="1" type="body"/>
+            <p:ph type="body" idx="1"/>
           </p:nvPr>
         </p:nvSpPr>
         <p:spPr>
@@ -1265,23 +1342,20 @@
           </a:prstGeom>
         </p:spPr>
         <p:txBody>
-          <a:bodyPr anchorCtr="0" anchor="t" bIns="91425" lIns="91425" spcFirstLastPara="1" rIns="91425" wrap="square" tIns="91425">
+          <a:bodyPr spcFirstLastPara="1" wrap="square" lIns="91425" tIns="91425" rIns="91425" bIns="91425" anchor="t" anchorCtr="0">
             <a:noAutofit/>
           </a:bodyPr>
           <a:lstStyle/>
           <a:p>
-            <a:pPr indent="0" lvl="0" marL="0" rtl="0" algn="l">
-              <a:spcBef>
-                <a:spcPts val="0"/>
-              </a:spcBef>
-              <a:spcAft>
-                <a:spcPts val="0"/>
-              </a:spcAft>
-              <a:buNone/>
-            </a:pPr>
-            <a:r>
-              <a:t/>
-            </a:r>
+            <a:pPr marL="0" lvl="0" indent="0" algn="l" rtl="0">
+              <a:spcBef>
+                <a:spcPts val="0"/>
+              </a:spcBef>
+              <a:spcAft>
+                <a:spcPts val="0"/>
+              </a:spcAft>
+              <a:buNone/>
+            </a:pPr>
             <a:endParaRPr/>
           </a:p>
         </p:txBody>
@@ -1295,11 +1369,11 @@
 </file>
 
 <file path=ppt/notesSlides/notesSlide7.xml><?xml version="1.0" encoding="utf-8"?>
-<p:notes xmlns:a="http://schemas.openxmlformats.org/drawingml/2006/main" xmlns:r="http://schemas.openxmlformats.org/officeDocument/2006/relationships" xmlns:mc="http://schemas.openxmlformats.org/markup-compatibility/2006" xmlns:mv="urn:schemas-microsoft-com:mac:vml" xmlns:p="http://schemas.openxmlformats.org/presentationml/2006/main" xmlns:c="http://schemas.openxmlformats.org/drawingml/2006/chart" xmlns:dgm="http://schemas.openxmlformats.org/drawingml/2006/diagram" xmlns:o="urn:schemas-microsoft-com:office:office" xmlns:v="urn:schemas-microsoft-com:vml" xmlns:pvml="urn:schemas-microsoft-com:office:powerpoint" xmlns:com="http://schemas.openxmlformats.org/drawingml/2006/compatibility" xmlns:p14="http://schemas.microsoft.com/office/powerpoint/2010/main" xmlns:p15="http://schemas.microsoft.com/office/powerpoint/2012/main" xmlns:ahyp="http://schemas.microsoft.com/office/drawing/2018/hyperlinkcolor" showMasterPhAnim="0" showMasterSp="0">
+<p:notes xmlns:a="http://schemas.openxmlformats.org/drawingml/2006/main" xmlns:r="http://schemas.openxmlformats.org/officeDocument/2006/relationships" xmlns:p="http://schemas.openxmlformats.org/presentationml/2006/main" showMasterSp="0" showMasterPhAnim="0">
   <p:cSld>
     <p:spTree>
       <p:nvGrpSpPr>
-        <p:cNvPr id="140" name="Shape 140"/>
+        <p:cNvPr id="1" name="Shape 140"/>
         <p:cNvGrpSpPr/>
         <p:nvPr/>
       </p:nvGrpSpPr>
@@ -1314,9 +1388,11 @@
       <p:sp>
         <p:nvSpPr>
           <p:cNvPr id="141" name="Google Shape;141;g35698d0d106_0_0:notes"/>
-          <p:cNvSpPr/>
+          <p:cNvSpPr>
+            <a:spLocks noGrp="1" noRot="1" noChangeAspect="1"/>
+          </p:cNvSpPr>
           <p:nvPr>
-            <p:ph idx="2" type="sldImg"/>
+            <p:ph type="sldImg" idx="2"/>
           </p:nvPr>
         </p:nvSpPr>
         <p:spPr>
@@ -1325,9 +1401,13 @@
             <a:ext cx="6096000" cy="3429000"/>
           </a:xfrm>
           <a:custGeom>
-            <a:rect b="b" l="l" r="r" t="t"/>
+            <a:avLst/>
+            <a:gdLst/>
+            <a:ahLst/>
+            <a:cxnLst/>
+            <a:rect l="l" t="t" r="r" b="b"/>
             <a:pathLst>
-              <a:path extrusionOk="0" h="120000" w="120000">
+              <a:path w="120000" h="120000" extrusionOk="0">
                 <a:moveTo>
                   <a:pt x="0" y="0"/>
                 </a:moveTo>
@@ -1349,9 +1429,11 @@
       <p:sp>
         <p:nvSpPr>
           <p:cNvPr id="142" name="Google Shape;142;g35698d0d106_0_0:notes"/>
-          <p:cNvSpPr txBox="1"/>
+          <p:cNvSpPr txBox="1">
+            <a:spLocks noGrp="1"/>
+          </p:cNvSpPr>
           <p:nvPr>
-            <p:ph idx="1" type="body"/>
+            <p:ph type="body" idx="1"/>
           </p:nvPr>
         </p:nvSpPr>
         <p:spPr>
@@ -1364,23 +1446,20 @@
           </a:prstGeom>
         </p:spPr>
         <p:txBody>
-          <a:bodyPr anchorCtr="0" anchor="t" bIns="91425" lIns="91425" spcFirstLastPara="1" rIns="91425" wrap="square" tIns="91425">
+          <a:bodyPr spcFirstLastPara="1" wrap="square" lIns="91425" tIns="91425" rIns="91425" bIns="91425" anchor="t" anchorCtr="0">
             <a:noAutofit/>
           </a:bodyPr>
           <a:lstStyle/>
           <a:p>
-            <a:pPr indent="0" lvl="0" marL="0" rtl="0" algn="l">
-              <a:spcBef>
-                <a:spcPts val="0"/>
-              </a:spcBef>
-              <a:spcAft>
-                <a:spcPts val="0"/>
-              </a:spcAft>
-              <a:buNone/>
-            </a:pPr>
-            <a:r>
-              <a:t/>
-            </a:r>
+            <a:pPr marL="0" lvl="0" indent="0" algn="l" rtl="0">
+              <a:spcBef>
+                <a:spcPts val="0"/>
+              </a:spcBef>
+              <a:spcAft>
+                <a:spcPts val="0"/>
+              </a:spcAft>
+              <a:buNone/>
+            </a:pPr>
             <a:endParaRPr/>
           </a:p>
         </p:txBody>
@@ -1394,11 +1473,11 @@
 </file>
 
 <file path=ppt/notesSlides/notesSlide8.xml><?xml version="1.0" encoding="utf-8"?>
-<p:notes xmlns:a="http://schemas.openxmlformats.org/drawingml/2006/main" xmlns:r="http://schemas.openxmlformats.org/officeDocument/2006/relationships" xmlns:mc="http://schemas.openxmlformats.org/markup-compatibility/2006" xmlns:mv="urn:schemas-microsoft-com:mac:vml" xmlns:p="http://schemas.openxmlformats.org/presentationml/2006/main" xmlns:c="http://schemas.openxmlformats.org/drawingml/2006/chart" xmlns:dgm="http://schemas.openxmlformats.org/drawingml/2006/diagram" xmlns:o="urn:schemas-microsoft-com:office:office" xmlns:v="urn:schemas-microsoft-com:vml" xmlns:pvml="urn:schemas-microsoft-com:office:powerpoint" xmlns:com="http://schemas.openxmlformats.org/drawingml/2006/compatibility" xmlns:p14="http://schemas.microsoft.com/office/powerpoint/2010/main" xmlns:p15="http://schemas.microsoft.com/office/powerpoint/2012/main" xmlns:ahyp="http://schemas.microsoft.com/office/drawing/2018/hyperlinkcolor" showMasterPhAnim="0" showMasterSp="0">
+<p:notes xmlns:a="http://schemas.openxmlformats.org/drawingml/2006/main" xmlns:r="http://schemas.openxmlformats.org/officeDocument/2006/relationships" xmlns:p="http://schemas.openxmlformats.org/presentationml/2006/main" showMasterSp="0" showMasterPhAnim="0">
   <p:cSld>
     <p:spTree>
       <p:nvGrpSpPr>
-        <p:cNvPr id="167" name="Shape 167"/>
+        <p:cNvPr id="1" name="Shape 167"/>
         <p:cNvGrpSpPr/>
         <p:nvPr/>
       </p:nvGrpSpPr>
@@ -1413,20 +1492,26 @@
       <p:sp>
         <p:nvSpPr>
           <p:cNvPr id="168" name="Google Shape;168;g35698d0d106_0_35:notes"/>
-          <p:cNvSpPr/>
+          <p:cNvSpPr>
+            <a:spLocks noGrp="1" noRot="1" noChangeAspect="1"/>
+          </p:cNvSpPr>
           <p:nvPr>
-            <p:ph idx="2" type="sldImg"/>
+            <p:ph type="sldImg" idx="2"/>
           </p:nvPr>
         </p:nvSpPr>
         <p:spPr>
           <a:xfrm>
-            <a:off x="381300" y="685800"/>
+            <a:off x="381000" y="685800"/>
             <a:ext cx="6096000" cy="3429000"/>
           </a:xfrm>
           <a:custGeom>
-            <a:rect b="b" l="l" r="r" t="t"/>
+            <a:avLst/>
+            <a:gdLst/>
+            <a:ahLst/>
+            <a:cxnLst/>
+            <a:rect l="l" t="t" r="r" b="b"/>
             <a:pathLst>
-              <a:path extrusionOk="0" h="120000" w="120000">
+              <a:path w="120000" h="120000" extrusionOk="0">
                 <a:moveTo>
                   <a:pt x="0" y="0"/>
                 </a:moveTo>
@@ -1448,9 +1533,11 @@
       <p:sp>
         <p:nvSpPr>
           <p:cNvPr id="169" name="Google Shape;169;g35698d0d106_0_35:notes"/>
-          <p:cNvSpPr txBox="1"/>
+          <p:cNvSpPr txBox="1">
+            <a:spLocks noGrp="1"/>
+          </p:cNvSpPr>
           <p:nvPr>
-            <p:ph idx="1" type="body"/>
+            <p:ph type="body" idx="1"/>
           </p:nvPr>
         </p:nvSpPr>
         <p:spPr>
@@ -1463,23 +1550,20 @@
           </a:prstGeom>
         </p:spPr>
         <p:txBody>
-          <a:bodyPr anchorCtr="0" anchor="t" bIns="91425" lIns="91425" spcFirstLastPara="1" rIns="91425" wrap="square" tIns="91425">
+          <a:bodyPr spcFirstLastPara="1" wrap="square" lIns="91425" tIns="91425" rIns="91425" bIns="91425" anchor="t" anchorCtr="0">
             <a:noAutofit/>
           </a:bodyPr>
           <a:lstStyle/>
           <a:p>
-            <a:pPr indent="0" lvl="0" marL="0" rtl="0" algn="l">
-              <a:spcBef>
-                <a:spcPts val="0"/>
-              </a:spcBef>
-              <a:spcAft>
-                <a:spcPts val="0"/>
-              </a:spcAft>
-              <a:buNone/>
-            </a:pPr>
-            <a:r>
-              <a:t/>
-            </a:r>
+            <a:pPr marL="0" lvl="0" indent="0" algn="l" rtl="0">
+              <a:spcBef>
+                <a:spcPts val="0"/>
+              </a:spcBef>
+              <a:spcAft>
+                <a:spcPts val="0"/>
+              </a:spcAft>
+              <a:buNone/>
+            </a:pPr>
             <a:endParaRPr/>
           </a:p>
         </p:txBody>
@@ -1493,11 +1577,11 @@
 </file>
 
 <file path=ppt/slideLayouts/slideLayout1.xml><?xml version="1.0" encoding="utf-8"?>
-<p:sldLayout xmlns:a="http://schemas.openxmlformats.org/drawingml/2006/main" xmlns:r="http://schemas.openxmlformats.org/officeDocument/2006/relationships" xmlns:mc="http://schemas.openxmlformats.org/markup-compatibility/2006" xmlns:mv="urn:schemas-microsoft-com:mac:vml" xmlns:p="http://schemas.openxmlformats.org/presentationml/2006/main" xmlns:c="http://schemas.openxmlformats.org/drawingml/2006/chart" xmlns:dgm="http://schemas.openxmlformats.org/drawingml/2006/diagram" xmlns:o="urn:schemas-microsoft-com:office:office" xmlns:v="urn:schemas-microsoft-com:vml" xmlns:pvml="urn:schemas-microsoft-com:office:powerpoint" xmlns:com="http://schemas.openxmlformats.org/drawingml/2006/compatibility" xmlns:p14="http://schemas.microsoft.com/office/powerpoint/2010/main" xmlns:p15="http://schemas.microsoft.com/office/powerpoint/2012/main" xmlns:ahyp="http://schemas.microsoft.com/office/drawing/2018/hyperlinkcolor" matchingName="Title slide" type="title">
+<p:sldLayout xmlns:a="http://schemas.openxmlformats.org/drawingml/2006/main" xmlns:r="http://schemas.openxmlformats.org/officeDocument/2006/relationships" xmlns:p="http://schemas.openxmlformats.org/presentationml/2006/main" matchingName="Title slide" type="title">
   <p:cSld name="TITLE">
     <p:spTree>
       <p:nvGrpSpPr>
-        <p:cNvPr id="9" name="Shape 9"/>
+        <p:cNvPr id="1" name="Shape 9"/>
         <p:cNvGrpSpPr/>
         <p:nvPr/>
       </p:nvGrpSpPr>
@@ -1512,7 +1596,9 @@
       <p:sp>
         <p:nvSpPr>
           <p:cNvPr id="10" name="Google Shape;10;p2"/>
-          <p:cNvSpPr txBox="1"/>
+          <p:cNvSpPr txBox="1">
+            <a:spLocks noGrp="1"/>
+          </p:cNvSpPr>
           <p:nvPr>
             <p:ph type="ctrTitle"/>
           </p:nvPr>
@@ -1527,7 +1613,7 @@
           </a:prstGeom>
         </p:spPr>
         <p:txBody>
-          <a:bodyPr anchorCtr="0" anchor="b" bIns="91425" lIns="91425" spcFirstLastPara="1" rIns="91425" wrap="square" tIns="91425">
+          <a:bodyPr spcFirstLastPara="1" wrap="square" lIns="91425" tIns="91425" rIns="91425" bIns="91425" anchor="b" anchorCtr="0">
             <a:normAutofit/>
           </a:bodyPr>
           <a:lstStyle>
@@ -1631,15 +1717,19 @@
               <a:defRPr sz="5200"/>
             </a:lvl9pPr>
           </a:lstStyle>
-          <a:p/>
+          <a:p>
+            <a:endParaRPr/>
+          </a:p>
         </p:txBody>
       </p:sp>
       <p:sp>
         <p:nvSpPr>
           <p:cNvPr id="11" name="Google Shape;11;p2"/>
-          <p:cNvSpPr txBox="1"/>
+          <p:cNvSpPr txBox="1">
+            <a:spLocks noGrp="1"/>
+          </p:cNvSpPr>
           <p:nvPr>
-            <p:ph idx="1" type="subTitle"/>
+            <p:ph type="subTitle" idx="1"/>
           </p:nvPr>
         </p:nvSpPr>
         <p:spPr>
@@ -1652,7 +1742,7 @@
           </a:prstGeom>
         </p:spPr>
         <p:txBody>
-          <a:bodyPr anchorCtr="0" anchor="t" bIns="91425" lIns="91425" spcFirstLastPara="1" rIns="91425" wrap="square" tIns="91425">
+          <a:bodyPr spcFirstLastPara="1" wrap="square" lIns="91425" tIns="91425" rIns="91425" bIns="91425" anchor="t" anchorCtr="0">
             <a:normAutofit/>
           </a:bodyPr>
           <a:lstStyle>
@@ -1783,15 +1873,19 @@
               <a:defRPr sz="2800"/>
             </a:lvl9pPr>
           </a:lstStyle>
-          <a:p/>
+          <a:p>
+            <a:endParaRPr/>
+          </a:p>
         </p:txBody>
       </p:sp>
       <p:sp>
         <p:nvSpPr>
           <p:cNvPr id="12" name="Google Shape;12;p2"/>
-          <p:cNvSpPr txBox="1"/>
+          <p:cNvSpPr txBox="1">
+            <a:spLocks noGrp="1"/>
+          </p:cNvSpPr>
           <p:nvPr>
-            <p:ph idx="12" type="sldNum"/>
+            <p:ph type="sldNum" idx="12"/>
           </p:nvPr>
         </p:nvSpPr>
         <p:spPr>
@@ -1804,7 +1898,7 @@
           </a:prstGeom>
         </p:spPr>
         <p:txBody>
-          <a:bodyPr anchorCtr="0" anchor="ctr" bIns="91425" lIns="91425" spcFirstLastPara="1" rIns="91425" wrap="square" tIns="91425">
+          <a:bodyPr spcFirstLastPara="1" wrap="square" lIns="91425" tIns="91425" rIns="91425" bIns="91425" anchor="ctr" anchorCtr="0">
             <a:normAutofit/>
           </a:bodyPr>
           <a:lstStyle>
@@ -1846,7 +1940,7 @@
             </a:lvl9pPr>
           </a:lstStyle>
           <a:p>
-            <a:pPr indent="0" lvl="0" marL="0" rtl="0" algn="r">
+            <a:pPr marL="0" lvl="0" indent="0" algn="r" rtl="0">
               <a:spcBef>
                 <a:spcPts val="0"/>
               </a:spcBef>
@@ -1857,7 +1951,7 @@
             </a:pPr>
             <a:fld id="{00000000-1234-1234-1234-123412341234}" type="slidenum">
               <a:rPr lang="es"/>
-              <a:t>‹#›</a:t>
+              <a:t>‹Nº›</a:t>
             </a:fld>
             <a:endParaRPr/>
           </a:p>
@@ -1872,11 +1966,11 @@
 </file>
 
 <file path=ppt/slideLayouts/slideLayout10.xml><?xml version="1.0" encoding="utf-8"?>
-<p:sldLayout xmlns:a="http://schemas.openxmlformats.org/drawingml/2006/main" xmlns:r="http://schemas.openxmlformats.org/officeDocument/2006/relationships" xmlns:mc="http://schemas.openxmlformats.org/markup-compatibility/2006" xmlns:mv="urn:schemas-microsoft-com:mac:vml" xmlns:p="http://schemas.openxmlformats.org/presentationml/2006/main" xmlns:c="http://schemas.openxmlformats.org/drawingml/2006/chart" xmlns:dgm="http://schemas.openxmlformats.org/drawingml/2006/diagram" xmlns:o="urn:schemas-microsoft-com:office:office" xmlns:v="urn:schemas-microsoft-com:vml" xmlns:pvml="urn:schemas-microsoft-com:office:powerpoint" xmlns:com="http://schemas.openxmlformats.org/drawingml/2006/compatibility" xmlns:p14="http://schemas.microsoft.com/office/powerpoint/2010/main" xmlns:p15="http://schemas.microsoft.com/office/powerpoint/2012/main" xmlns:ahyp="http://schemas.microsoft.com/office/drawing/2018/hyperlinkcolor" matchingName="Big number">
+<p:sldLayout xmlns:a="http://schemas.openxmlformats.org/drawingml/2006/main" xmlns:r="http://schemas.openxmlformats.org/officeDocument/2006/relationships" xmlns:p="http://schemas.openxmlformats.org/presentationml/2006/main" matchingName="Big number">
   <p:cSld name="BIG_NUMBER">
     <p:spTree>
       <p:nvGrpSpPr>
-        <p:cNvPr id="44" name="Shape 44"/>
+        <p:cNvPr id="1" name="Shape 44"/>
         <p:cNvGrpSpPr/>
         <p:nvPr/>
       </p:nvGrpSpPr>
@@ -1891,9 +1985,11 @@
       <p:sp>
         <p:nvSpPr>
           <p:cNvPr id="45" name="Google Shape;45;p11"/>
-          <p:cNvSpPr txBox="1"/>
+          <p:cNvSpPr txBox="1">
+            <a:spLocks noGrp="1"/>
+          </p:cNvSpPr>
           <p:nvPr>
-            <p:ph hasCustomPrompt="1" type="title"/>
+            <p:ph type="title" hasCustomPrompt="1"/>
           </p:nvPr>
         </p:nvSpPr>
         <p:spPr>
@@ -1906,7 +2002,7 @@
           </a:prstGeom>
         </p:spPr>
         <p:txBody>
-          <a:bodyPr anchorCtr="0" anchor="b" bIns="91425" lIns="91425" spcFirstLastPara="1" rIns="91425" wrap="square" tIns="91425">
+          <a:bodyPr spcFirstLastPara="1" wrap="square" lIns="91425" tIns="91425" rIns="91425" bIns="91425" anchor="b" anchorCtr="0">
             <a:normAutofit/>
           </a:bodyPr>
           <a:lstStyle>
@@ -2020,9 +2116,11 @@
       <p:sp>
         <p:nvSpPr>
           <p:cNvPr id="46" name="Google Shape;46;p11"/>
-          <p:cNvSpPr txBox="1"/>
+          <p:cNvSpPr txBox="1">
+            <a:spLocks noGrp="1"/>
+          </p:cNvSpPr>
           <p:nvPr>
-            <p:ph idx="1" type="body"/>
+            <p:ph type="body" idx="1"/>
           </p:nvPr>
         </p:nvSpPr>
         <p:spPr>
@@ -2035,11 +2133,11 @@
           </a:prstGeom>
         </p:spPr>
         <p:txBody>
-          <a:bodyPr anchorCtr="0" anchor="t" bIns="91425" lIns="91425" spcFirstLastPara="1" rIns="91425" wrap="square" tIns="91425">
+          <a:bodyPr spcFirstLastPara="1" wrap="square" lIns="91425" tIns="91425" rIns="91425" bIns="91425" anchor="t" anchorCtr="0">
             <a:normAutofit/>
           </a:bodyPr>
           <a:lstStyle>
-            <a:lvl1pPr indent="-342900" lvl="0" marL="457200" algn="ctr">
+            <a:lvl1pPr marL="457200" lvl="0" indent="-342900" algn="ctr">
               <a:spcBef>
                 <a:spcPts val="0"/>
               </a:spcBef>
@@ -2050,7 +2148,7 @@
               <a:buChar char="●"/>
               <a:defRPr/>
             </a:lvl1pPr>
-            <a:lvl2pPr indent="-317500" lvl="1" marL="914400" algn="ctr">
+            <a:lvl2pPr marL="914400" lvl="1" indent="-317500" algn="ctr">
               <a:spcBef>
                 <a:spcPts val="0"/>
               </a:spcBef>
@@ -2061,7 +2159,7 @@
               <a:buChar char="○"/>
               <a:defRPr/>
             </a:lvl2pPr>
-            <a:lvl3pPr indent="-317500" lvl="2" marL="1371600" algn="ctr">
+            <a:lvl3pPr marL="1371600" lvl="2" indent="-317500" algn="ctr">
               <a:spcBef>
                 <a:spcPts val="0"/>
               </a:spcBef>
@@ -2072,7 +2170,7 @@
               <a:buChar char="■"/>
               <a:defRPr/>
             </a:lvl3pPr>
-            <a:lvl4pPr indent="-317500" lvl="3" marL="1828800" algn="ctr">
+            <a:lvl4pPr marL="1828800" lvl="3" indent="-317500" algn="ctr">
               <a:spcBef>
                 <a:spcPts val="0"/>
               </a:spcBef>
@@ -2083,7 +2181,7 @@
               <a:buChar char="●"/>
               <a:defRPr/>
             </a:lvl4pPr>
-            <a:lvl5pPr indent="-317500" lvl="4" marL="2286000" algn="ctr">
+            <a:lvl5pPr marL="2286000" lvl="4" indent="-317500" algn="ctr">
               <a:spcBef>
                 <a:spcPts val="0"/>
               </a:spcBef>
@@ -2094,7 +2192,7 @@
               <a:buChar char="○"/>
               <a:defRPr/>
             </a:lvl5pPr>
-            <a:lvl6pPr indent="-317500" lvl="5" marL="2743200" algn="ctr">
+            <a:lvl6pPr marL="2743200" lvl="5" indent="-317500" algn="ctr">
               <a:spcBef>
                 <a:spcPts val="0"/>
               </a:spcBef>
@@ -2105,7 +2203,7 @@
               <a:buChar char="■"/>
               <a:defRPr/>
             </a:lvl6pPr>
-            <a:lvl7pPr indent="-317500" lvl="6" marL="3200400" algn="ctr">
+            <a:lvl7pPr marL="3200400" lvl="6" indent="-317500" algn="ctr">
               <a:spcBef>
                 <a:spcPts val="0"/>
               </a:spcBef>
@@ -2116,7 +2214,7 @@
               <a:buChar char="●"/>
               <a:defRPr/>
             </a:lvl7pPr>
-            <a:lvl8pPr indent="-317500" lvl="7" marL="3657600" algn="ctr">
+            <a:lvl8pPr marL="3657600" lvl="7" indent="-317500" algn="ctr">
               <a:spcBef>
                 <a:spcPts val="0"/>
               </a:spcBef>
@@ -2127,7 +2225,7 @@
               <a:buChar char="○"/>
               <a:defRPr/>
             </a:lvl8pPr>
-            <a:lvl9pPr indent="-317500" lvl="8" marL="4114800" algn="ctr">
+            <a:lvl9pPr marL="4114800" lvl="8" indent="-317500" algn="ctr">
               <a:spcBef>
                 <a:spcPts val="0"/>
               </a:spcBef>
@@ -2139,15 +2237,19 @@
               <a:defRPr/>
             </a:lvl9pPr>
           </a:lstStyle>
-          <a:p/>
+          <a:p>
+            <a:endParaRPr/>
+          </a:p>
         </p:txBody>
       </p:sp>
       <p:sp>
         <p:nvSpPr>
           <p:cNvPr id="47" name="Google Shape;47;p11"/>
-          <p:cNvSpPr txBox="1"/>
+          <p:cNvSpPr txBox="1">
+            <a:spLocks noGrp="1"/>
+          </p:cNvSpPr>
           <p:nvPr>
-            <p:ph idx="12" type="sldNum"/>
+            <p:ph type="sldNum" idx="12"/>
           </p:nvPr>
         </p:nvSpPr>
         <p:spPr>
@@ -2160,7 +2262,7 @@
           </a:prstGeom>
         </p:spPr>
         <p:txBody>
-          <a:bodyPr anchorCtr="0" anchor="ctr" bIns="91425" lIns="91425" spcFirstLastPara="1" rIns="91425" wrap="square" tIns="91425">
+          <a:bodyPr spcFirstLastPara="1" wrap="square" lIns="91425" tIns="91425" rIns="91425" bIns="91425" anchor="ctr" anchorCtr="0">
             <a:normAutofit/>
           </a:bodyPr>
           <a:lstStyle>
@@ -2202,7 +2304,7 @@
             </a:lvl9pPr>
           </a:lstStyle>
           <a:p>
-            <a:pPr indent="0" lvl="0" marL="0" rtl="0" algn="r">
+            <a:pPr marL="0" lvl="0" indent="0" algn="r" rtl="0">
               <a:spcBef>
                 <a:spcPts val="0"/>
               </a:spcBef>
@@ -2213,7 +2315,7 @@
             </a:pPr>
             <a:fld id="{00000000-1234-1234-1234-123412341234}" type="slidenum">
               <a:rPr lang="es"/>
-              <a:t>‹#›</a:t>
+              <a:t>‹Nº›</a:t>
             </a:fld>
             <a:endParaRPr/>
           </a:p>
@@ -2228,11 +2330,11 @@
 </file>
 
 <file path=ppt/slideLayouts/slideLayout11.xml><?xml version="1.0" encoding="utf-8"?>
-<p:sldLayout xmlns:a="http://schemas.openxmlformats.org/drawingml/2006/main" xmlns:r="http://schemas.openxmlformats.org/officeDocument/2006/relationships" xmlns:mc="http://schemas.openxmlformats.org/markup-compatibility/2006" xmlns:mv="urn:schemas-microsoft-com:mac:vml" xmlns:p="http://schemas.openxmlformats.org/presentationml/2006/main" xmlns:c="http://schemas.openxmlformats.org/drawingml/2006/chart" xmlns:dgm="http://schemas.openxmlformats.org/drawingml/2006/diagram" xmlns:o="urn:schemas-microsoft-com:office:office" xmlns:v="urn:schemas-microsoft-com:vml" xmlns:pvml="urn:schemas-microsoft-com:office:powerpoint" xmlns:com="http://schemas.openxmlformats.org/drawingml/2006/compatibility" xmlns:p14="http://schemas.microsoft.com/office/powerpoint/2010/main" xmlns:p15="http://schemas.microsoft.com/office/powerpoint/2012/main" xmlns:ahyp="http://schemas.microsoft.com/office/drawing/2018/hyperlinkcolor" matchingName="Blank" type="blank">
+<p:sldLayout xmlns:a="http://schemas.openxmlformats.org/drawingml/2006/main" xmlns:r="http://schemas.openxmlformats.org/officeDocument/2006/relationships" xmlns:p="http://schemas.openxmlformats.org/presentationml/2006/main" matchingName="Blank" type="blank">
   <p:cSld name="BLANK">
     <p:spTree>
       <p:nvGrpSpPr>
-        <p:cNvPr id="48" name="Shape 48"/>
+        <p:cNvPr id="1" name="Shape 48"/>
         <p:cNvGrpSpPr/>
         <p:nvPr/>
       </p:nvGrpSpPr>
@@ -2247,9 +2349,11 @@
       <p:sp>
         <p:nvSpPr>
           <p:cNvPr id="49" name="Google Shape;49;p12"/>
-          <p:cNvSpPr txBox="1"/>
+          <p:cNvSpPr txBox="1">
+            <a:spLocks noGrp="1"/>
+          </p:cNvSpPr>
           <p:nvPr>
-            <p:ph idx="12" type="sldNum"/>
+            <p:ph type="sldNum" idx="12"/>
           </p:nvPr>
         </p:nvSpPr>
         <p:spPr>
@@ -2262,7 +2366,7 @@
           </a:prstGeom>
         </p:spPr>
         <p:txBody>
-          <a:bodyPr anchorCtr="0" anchor="ctr" bIns="91425" lIns="91425" spcFirstLastPara="1" rIns="91425" wrap="square" tIns="91425">
+          <a:bodyPr spcFirstLastPara="1" wrap="square" lIns="91425" tIns="91425" rIns="91425" bIns="91425" anchor="ctr" anchorCtr="0">
             <a:normAutofit/>
           </a:bodyPr>
           <a:lstStyle>
@@ -2304,7 +2408,7 @@
             </a:lvl9pPr>
           </a:lstStyle>
           <a:p>
-            <a:pPr indent="0" lvl="0" marL="0" rtl="0" algn="r">
+            <a:pPr marL="0" lvl="0" indent="0" algn="r" rtl="0">
               <a:spcBef>
                 <a:spcPts val="0"/>
               </a:spcBef>
@@ -2315,7 +2419,7 @@
             </a:pPr>
             <a:fld id="{00000000-1234-1234-1234-123412341234}" type="slidenum">
               <a:rPr lang="es"/>
-              <a:t>‹#›</a:t>
+              <a:t>‹Nº›</a:t>
             </a:fld>
             <a:endParaRPr/>
           </a:p>
@@ -2330,11 +2434,11 @@
 </file>
 
 <file path=ppt/slideLayouts/slideLayout2.xml><?xml version="1.0" encoding="utf-8"?>
-<p:sldLayout xmlns:a="http://schemas.openxmlformats.org/drawingml/2006/main" xmlns:r="http://schemas.openxmlformats.org/officeDocument/2006/relationships" xmlns:mc="http://schemas.openxmlformats.org/markup-compatibility/2006" xmlns:mv="urn:schemas-microsoft-com:mac:vml" xmlns:p="http://schemas.openxmlformats.org/presentationml/2006/main" xmlns:c="http://schemas.openxmlformats.org/drawingml/2006/chart" xmlns:dgm="http://schemas.openxmlformats.org/drawingml/2006/diagram" xmlns:o="urn:schemas-microsoft-com:office:office" xmlns:v="urn:schemas-microsoft-com:vml" xmlns:pvml="urn:schemas-microsoft-com:office:powerpoint" xmlns:com="http://schemas.openxmlformats.org/drawingml/2006/compatibility" xmlns:p14="http://schemas.microsoft.com/office/powerpoint/2010/main" xmlns:p15="http://schemas.microsoft.com/office/powerpoint/2012/main" xmlns:ahyp="http://schemas.microsoft.com/office/drawing/2018/hyperlinkcolor" matchingName="Section header" type="secHead">
+<p:sldLayout xmlns:a="http://schemas.openxmlformats.org/drawingml/2006/main" xmlns:r="http://schemas.openxmlformats.org/officeDocument/2006/relationships" xmlns:p="http://schemas.openxmlformats.org/presentationml/2006/main" matchingName="Section header" type="secHead">
   <p:cSld name="SECTION_HEADER">
     <p:spTree>
       <p:nvGrpSpPr>
-        <p:cNvPr id="13" name="Shape 13"/>
+        <p:cNvPr id="1" name="Shape 13"/>
         <p:cNvGrpSpPr/>
         <p:nvPr/>
       </p:nvGrpSpPr>
@@ -2349,7 +2453,9 @@
       <p:sp>
         <p:nvSpPr>
           <p:cNvPr id="14" name="Google Shape;14;p3"/>
-          <p:cNvSpPr txBox="1"/>
+          <p:cNvSpPr txBox="1">
+            <a:spLocks noGrp="1"/>
+          </p:cNvSpPr>
           <p:nvPr>
             <p:ph type="title"/>
           </p:nvPr>
@@ -2364,7 +2470,7 @@
           </a:prstGeom>
         </p:spPr>
         <p:txBody>
-          <a:bodyPr anchorCtr="0" anchor="ctr" bIns="91425" lIns="91425" spcFirstLastPara="1" rIns="91425" wrap="square" tIns="91425">
+          <a:bodyPr spcFirstLastPara="1" wrap="square" lIns="91425" tIns="91425" rIns="91425" bIns="91425" anchor="ctr" anchorCtr="0">
             <a:normAutofit/>
           </a:bodyPr>
           <a:lstStyle>
@@ -2468,15 +2574,19 @@
               <a:defRPr sz="3600"/>
             </a:lvl9pPr>
           </a:lstStyle>
-          <a:p/>
+          <a:p>
+            <a:endParaRPr/>
+          </a:p>
         </p:txBody>
       </p:sp>
       <p:sp>
         <p:nvSpPr>
           <p:cNvPr id="15" name="Google Shape;15;p3"/>
-          <p:cNvSpPr txBox="1"/>
+          <p:cNvSpPr txBox="1">
+            <a:spLocks noGrp="1"/>
+          </p:cNvSpPr>
           <p:nvPr>
-            <p:ph idx="12" type="sldNum"/>
+            <p:ph type="sldNum" idx="12"/>
           </p:nvPr>
         </p:nvSpPr>
         <p:spPr>
@@ -2489,7 +2599,7 @@
           </a:prstGeom>
         </p:spPr>
         <p:txBody>
-          <a:bodyPr anchorCtr="0" anchor="ctr" bIns="91425" lIns="91425" spcFirstLastPara="1" rIns="91425" wrap="square" tIns="91425">
+          <a:bodyPr spcFirstLastPara="1" wrap="square" lIns="91425" tIns="91425" rIns="91425" bIns="91425" anchor="ctr" anchorCtr="0">
             <a:normAutofit/>
           </a:bodyPr>
           <a:lstStyle>
@@ -2531,7 +2641,7 @@
             </a:lvl9pPr>
           </a:lstStyle>
           <a:p>
-            <a:pPr indent="0" lvl="0" marL="0" rtl="0" algn="r">
+            <a:pPr marL="0" lvl="0" indent="0" algn="r" rtl="0">
               <a:spcBef>
                 <a:spcPts val="0"/>
               </a:spcBef>
@@ -2542,7 +2652,7 @@
             </a:pPr>
             <a:fld id="{00000000-1234-1234-1234-123412341234}" type="slidenum">
               <a:rPr lang="es"/>
-              <a:t>‹#›</a:t>
+              <a:t>‹Nº›</a:t>
             </a:fld>
             <a:endParaRPr/>
           </a:p>
@@ -2557,11 +2667,11 @@
 </file>
 
 <file path=ppt/slideLayouts/slideLayout3.xml><?xml version="1.0" encoding="utf-8"?>
-<p:sldLayout xmlns:a="http://schemas.openxmlformats.org/drawingml/2006/main" xmlns:r="http://schemas.openxmlformats.org/officeDocument/2006/relationships" xmlns:mc="http://schemas.openxmlformats.org/markup-compatibility/2006" xmlns:mv="urn:schemas-microsoft-com:mac:vml" xmlns:p="http://schemas.openxmlformats.org/presentationml/2006/main" xmlns:c="http://schemas.openxmlformats.org/drawingml/2006/chart" xmlns:dgm="http://schemas.openxmlformats.org/drawingml/2006/diagram" xmlns:o="urn:schemas-microsoft-com:office:office" xmlns:v="urn:schemas-microsoft-com:vml" xmlns:pvml="urn:schemas-microsoft-com:office:powerpoint" xmlns:com="http://schemas.openxmlformats.org/drawingml/2006/compatibility" xmlns:p14="http://schemas.microsoft.com/office/powerpoint/2010/main" xmlns:p15="http://schemas.microsoft.com/office/powerpoint/2012/main" xmlns:ahyp="http://schemas.microsoft.com/office/drawing/2018/hyperlinkcolor" matchingName="Title and body" type="tx">
+<p:sldLayout xmlns:a="http://schemas.openxmlformats.org/drawingml/2006/main" xmlns:r="http://schemas.openxmlformats.org/officeDocument/2006/relationships" xmlns:p="http://schemas.openxmlformats.org/presentationml/2006/main" matchingName="Title and body" type="tx">
   <p:cSld name="TITLE_AND_BODY">
     <p:spTree>
       <p:nvGrpSpPr>
-        <p:cNvPr id="16" name="Shape 16"/>
+        <p:cNvPr id="1" name="Shape 16"/>
         <p:cNvGrpSpPr/>
         <p:nvPr/>
       </p:nvGrpSpPr>
@@ -2576,7 +2686,9 @@
       <p:sp>
         <p:nvSpPr>
           <p:cNvPr id="17" name="Google Shape;17;p4"/>
-          <p:cNvSpPr txBox="1"/>
+          <p:cNvSpPr txBox="1">
+            <a:spLocks noGrp="1"/>
+          </p:cNvSpPr>
           <p:nvPr>
             <p:ph type="title"/>
           </p:nvPr>
@@ -2591,7 +2703,7 @@
           </a:prstGeom>
         </p:spPr>
         <p:txBody>
-          <a:bodyPr anchorCtr="0" anchor="t" bIns="91425" lIns="91425" spcFirstLastPara="1" rIns="91425" wrap="square" tIns="91425">
+          <a:bodyPr spcFirstLastPara="1" wrap="square" lIns="91425" tIns="91425" rIns="91425" bIns="91425" anchor="t" anchorCtr="0">
             <a:normAutofit/>
           </a:bodyPr>
           <a:lstStyle>
@@ -2695,15 +2807,19 @@
               <a:defRPr/>
             </a:lvl9pPr>
           </a:lstStyle>
-          <a:p/>
+          <a:p>
+            <a:endParaRPr/>
+          </a:p>
         </p:txBody>
       </p:sp>
       <p:sp>
         <p:nvSpPr>
           <p:cNvPr id="18" name="Google Shape;18;p4"/>
-          <p:cNvSpPr txBox="1"/>
+          <p:cNvSpPr txBox="1">
+            <a:spLocks noGrp="1"/>
+          </p:cNvSpPr>
           <p:nvPr>
-            <p:ph idx="1" type="body"/>
+            <p:ph type="body" idx="1"/>
           </p:nvPr>
         </p:nvSpPr>
         <p:spPr>
@@ -2716,11 +2832,11 @@
           </a:prstGeom>
         </p:spPr>
         <p:txBody>
-          <a:bodyPr anchorCtr="0" anchor="t" bIns="91425" lIns="91425" spcFirstLastPara="1" rIns="91425" wrap="square" tIns="91425">
+          <a:bodyPr spcFirstLastPara="1" wrap="square" lIns="91425" tIns="91425" rIns="91425" bIns="91425" anchor="t" anchorCtr="0">
             <a:normAutofit/>
           </a:bodyPr>
           <a:lstStyle>
-            <a:lvl1pPr indent="-342900" lvl="0" marL="457200">
+            <a:lvl1pPr marL="457200" lvl="0" indent="-342900">
               <a:spcBef>
                 <a:spcPts val="0"/>
               </a:spcBef>
@@ -2731,7 +2847,7 @@
               <a:buChar char="●"/>
               <a:defRPr/>
             </a:lvl1pPr>
-            <a:lvl2pPr indent="-317500" lvl="1" marL="914400">
+            <a:lvl2pPr marL="914400" lvl="1" indent="-317500">
               <a:spcBef>
                 <a:spcPts val="0"/>
               </a:spcBef>
@@ -2742,7 +2858,7 @@
               <a:buChar char="○"/>
               <a:defRPr/>
             </a:lvl2pPr>
-            <a:lvl3pPr indent="-317500" lvl="2" marL="1371600">
+            <a:lvl3pPr marL="1371600" lvl="2" indent="-317500">
               <a:spcBef>
                 <a:spcPts val="0"/>
               </a:spcBef>
@@ -2753,7 +2869,7 @@
               <a:buChar char="■"/>
               <a:defRPr/>
             </a:lvl3pPr>
-            <a:lvl4pPr indent="-317500" lvl="3" marL="1828800">
+            <a:lvl4pPr marL="1828800" lvl="3" indent="-317500">
               <a:spcBef>
                 <a:spcPts val="0"/>
               </a:spcBef>
@@ -2764,7 +2880,7 @@
               <a:buChar char="●"/>
               <a:defRPr/>
             </a:lvl4pPr>
-            <a:lvl5pPr indent="-317500" lvl="4" marL="2286000">
+            <a:lvl5pPr marL="2286000" lvl="4" indent="-317500">
               <a:spcBef>
                 <a:spcPts val="0"/>
               </a:spcBef>
@@ -2775,7 +2891,7 @@
               <a:buChar char="○"/>
               <a:defRPr/>
             </a:lvl5pPr>
-            <a:lvl6pPr indent="-317500" lvl="5" marL="2743200">
+            <a:lvl6pPr marL="2743200" lvl="5" indent="-317500">
               <a:spcBef>
                 <a:spcPts val="0"/>
               </a:spcBef>
@@ -2786,7 +2902,7 @@
               <a:buChar char="■"/>
               <a:defRPr/>
             </a:lvl6pPr>
-            <a:lvl7pPr indent="-317500" lvl="6" marL="3200400">
+            <a:lvl7pPr marL="3200400" lvl="6" indent="-317500">
               <a:spcBef>
                 <a:spcPts val="0"/>
               </a:spcBef>
@@ -2797,7 +2913,7 @@
               <a:buChar char="●"/>
               <a:defRPr/>
             </a:lvl7pPr>
-            <a:lvl8pPr indent="-317500" lvl="7" marL="3657600">
+            <a:lvl8pPr marL="3657600" lvl="7" indent="-317500">
               <a:spcBef>
                 <a:spcPts val="0"/>
               </a:spcBef>
@@ -2808,7 +2924,7 @@
               <a:buChar char="○"/>
               <a:defRPr/>
             </a:lvl8pPr>
-            <a:lvl9pPr indent="-317500" lvl="8" marL="4114800">
+            <a:lvl9pPr marL="4114800" lvl="8" indent="-317500">
               <a:spcBef>
                 <a:spcPts val="0"/>
               </a:spcBef>
@@ -2820,15 +2936,19 @@
               <a:defRPr/>
             </a:lvl9pPr>
           </a:lstStyle>
-          <a:p/>
+          <a:p>
+            <a:endParaRPr/>
+          </a:p>
         </p:txBody>
       </p:sp>
       <p:sp>
         <p:nvSpPr>
           <p:cNvPr id="19" name="Google Shape;19;p4"/>
-          <p:cNvSpPr txBox="1"/>
+          <p:cNvSpPr txBox="1">
+            <a:spLocks noGrp="1"/>
+          </p:cNvSpPr>
           <p:nvPr>
-            <p:ph idx="12" type="sldNum"/>
+            <p:ph type="sldNum" idx="12"/>
           </p:nvPr>
         </p:nvSpPr>
         <p:spPr>
@@ -2841,7 +2961,7 @@
           </a:prstGeom>
         </p:spPr>
         <p:txBody>
-          <a:bodyPr anchorCtr="0" anchor="ctr" bIns="91425" lIns="91425" spcFirstLastPara="1" rIns="91425" wrap="square" tIns="91425">
+          <a:bodyPr spcFirstLastPara="1" wrap="square" lIns="91425" tIns="91425" rIns="91425" bIns="91425" anchor="ctr" anchorCtr="0">
             <a:normAutofit/>
           </a:bodyPr>
           <a:lstStyle>
@@ -2883,7 +3003,7 @@
             </a:lvl9pPr>
           </a:lstStyle>
           <a:p>
-            <a:pPr indent="0" lvl="0" marL="0" rtl="0" algn="r">
+            <a:pPr marL="0" lvl="0" indent="0" algn="r" rtl="0">
               <a:spcBef>
                 <a:spcPts val="0"/>
               </a:spcBef>
@@ -2894,7 +3014,7 @@
             </a:pPr>
             <a:fld id="{00000000-1234-1234-1234-123412341234}" type="slidenum">
               <a:rPr lang="es"/>
-              <a:t>‹#›</a:t>
+              <a:t>‹Nº›</a:t>
             </a:fld>
             <a:endParaRPr/>
           </a:p>
@@ -2909,11 +3029,11 @@
 </file>
 
 <file path=ppt/slideLayouts/slideLayout4.xml><?xml version="1.0" encoding="utf-8"?>
-<p:sldLayout xmlns:a="http://schemas.openxmlformats.org/drawingml/2006/main" xmlns:r="http://schemas.openxmlformats.org/officeDocument/2006/relationships" xmlns:mc="http://schemas.openxmlformats.org/markup-compatibility/2006" xmlns:mv="urn:schemas-microsoft-com:mac:vml" xmlns:p="http://schemas.openxmlformats.org/presentationml/2006/main" xmlns:c="http://schemas.openxmlformats.org/drawingml/2006/chart" xmlns:dgm="http://schemas.openxmlformats.org/drawingml/2006/diagram" xmlns:o="urn:schemas-microsoft-com:office:office" xmlns:v="urn:schemas-microsoft-com:vml" xmlns:pvml="urn:schemas-microsoft-com:office:powerpoint" xmlns:com="http://schemas.openxmlformats.org/drawingml/2006/compatibility" xmlns:p14="http://schemas.microsoft.com/office/powerpoint/2010/main" xmlns:p15="http://schemas.microsoft.com/office/powerpoint/2012/main" xmlns:ahyp="http://schemas.microsoft.com/office/drawing/2018/hyperlinkcolor" matchingName="Title and two columns" type="twoColTx">
+<p:sldLayout xmlns:a="http://schemas.openxmlformats.org/drawingml/2006/main" xmlns:r="http://schemas.openxmlformats.org/officeDocument/2006/relationships" xmlns:p="http://schemas.openxmlformats.org/presentationml/2006/main" matchingName="Title and two columns" type="twoColTx">
   <p:cSld name="TITLE_AND_TWO_COLUMNS">
     <p:spTree>
       <p:nvGrpSpPr>
-        <p:cNvPr id="20" name="Shape 20"/>
+        <p:cNvPr id="1" name="Shape 20"/>
         <p:cNvGrpSpPr/>
         <p:nvPr/>
       </p:nvGrpSpPr>
@@ -2928,7 +3048,9 @@
       <p:sp>
         <p:nvSpPr>
           <p:cNvPr id="21" name="Google Shape;21;p5"/>
-          <p:cNvSpPr txBox="1"/>
+          <p:cNvSpPr txBox="1">
+            <a:spLocks noGrp="1"/>
+          </p:cNvSpPr>
           <p:nvPr>
             <p:ph type="title"/>
           </p:nvPr>
@@ -2943,7 +3065,7 @@
           </a:prstGeom>
         </p:spPr>
         <p:txBody>
-          <a:bodyPr anchorCtr="0" anchor="t" bIns="91425" lIns="91425" spcFirstLastPara="1" rIns="91425" wrap="square" tIns="91425">
+          <a:bodyPr spcFirstLastPara="1" wrap="square" lIns="91425" tIns="91425" rIns="91425" bIns="91425" anchor="t" anchorCtr="0">
             <a:normAutofit/>
           </a:bodyPr>
           <a:lstStyle>
@@ -3047,15 +3169,19 @@
               <a:defRPr/>
             </a:lvl9pPr>
           </a:lstStyle>
-          <a:p/>
+          <a:p>
+            <a:endParaRPr/>
+          </a:p>
         </p:txBody>
       </p:sp>
       <p:sp>
         <p:nvSpPr>
           <p:cNvPr id="22" name="Google Shape;22;p5"/>
-          <p:cNvSpPr txBox="1"/>
+          <p:cNvSpPr txBox="1">
+            <a:spLocks noGrp="1"/>
+          </p:cNvSpPr>
           <p:nvPr>
-            <p:ph idx="1" type="body"/>
+            <p:ph type="body" idx="1"/>
           </p:nvPr>
         </p:nvSpPr>
         <p:spPr>
@@ -3068,11 +3194,11 @@
           </a:prstGeom>
         </p:spPr>
         <p:txBody>
-          <a:bodyPr anchorCtr="0" anchor="t" bIns="91425" lIns="91425" spcFirstLastPara="1" rIns="91425" wrap="square" tIns="91425">
+          <a:bodyPr spcFirstLastPara="1" wrap="square" lIns="91425" tIns="91425" rIns="91425" bIns="91425" anchor="t" anchorCtr="0">
             <a:normAutofit/>
           </a:bodyPr>
           <a:lstStyle>
-            <a:lvl1pPr indent="-317500" lvl="0" marL="457200">
+            <a:lvl1pPr marL="457200" lvl="0" indent="-317500">
               <a:spcBef>
                 <a:spcPts val="0"/>
               </a:spcBef>
@@ -3083,7 +3209,7 @@
               <a:buChar char="●"/>
               <a:defRPr sz="1400"/>
             </a:lvl1pPr>
-            <a:lvl2pPr indent="-304800" lvl="1" marL="914400">
+            <a:lvl2pPr marL="914400" lvl="1" indent="-304800">
               <a:spcBef>
                 <a:spcPts val="0"/>
               </a:spcBef>
@@ -3094,7 +3220,7 @@
               <a:buChar char="○"/>
               <a:defRPr sz="1200"/>
             </a:lvl2pPr>
-            <a:lvl3pPr indent="-304800" lvl="2" marL="1371600">
+            <a:lvl3pPr marL="1371600" lvl="2" indent="-304800">
               <a:spcBef>
                 <a:spcPts val="0"/>
               </a:spcBef>
@@ -3105,7 +3231,7 @@
               <a:buChar char="■"/>
               <a:defRPr sz="1200"/>
             </a:lvl3pPr>
-            <a:lvl4pPr indent="-304800" lvl="3" marL="1828800">
+            <a:lvl4pPr marL="1828800" lvl="3" indent="-304800">
               <a:spcBef>
                 <a:spcPts val="0"/>
               </a:spcBef>
@@ -3116,7 +3242,7 @@
               <a:buChar char="●"/>
               <a:defRPr sz="1200"/>
             </a:lvl4pPr>
-            <a:lvl5pPr indent="-304800" lvl="4" marL="2286000">
+            <a:lvl5pPr marL="2286000" lvl="4" indent="-304800">
               <a:spcBef>
                 <a:spcPts val="0"/>
               </a:spcBef>
@@ -3127,7 +3253,7 @@
               <a:buChar char="○"/>
               <a:defRPr sz="1200"/>
             </a:lvl5pPr>
-            <a:lvl6pPr indent="-304800" lvl="5" marL="2743200">
+            <a:lvl6pPr marL="2743200" lvl="5" indent="-304800">
               <a:spcBef>
                 <a:spcPts val="0"/>
               </a:spcBef>
@@ -3138,7 +3264,7 @@
               <a:buChar char="■"/>
               <a:defRPr sz="1200"/>
             </a:lvl6pPr>
-            <a:lvl7pPr indent="-304800" lvl="6" marL="3200400">
+            <a:lvl7pPr marL="3200400" lvl="6" indent="-304800">
               <a:spcBef>
                 <a:spcPts val="0"/>
               </a:spcBef>
@@ -3149,7 +3275,7 @@
               <a:buChar char="●"/>
               <a:defRPr sz="1200"/>
             </a:lvl7pPr>
-            <a:lvl8pPr indent="-304800" lvl="7" marL="3657600">
+            <a:lvl8pPr marL="3657600" lvl="7" indent="-304800">
               <a:spcBef>
                 <a:spcPts val="0"/>
               </a:spcBef>
@@ -3160,7 +3286,7 @@
               <a:buChar char="○"/>
               <a:defRPr sz="1200"/>
             </a:lvl8pPr>
-            <a:lvl9pPr indent="-304800" lvl="8" marL="4114800">
+            <a:lvl9pPr marL="4114800" lvl="8" indent="-304800">
               <a:spcBef>
                 <a:spcPts val="0"/>
               </a:spcBef>
@@ -3172,15 +3298,19 @@
               <a:defRPr sz="1200"/>
             </a:lvl9pPr>
           </a:lstStyle>
-          <a:p/>
+          <a:p>
+            <a:endParaRPr/>
+          </a:p>
         </p:txBody>
       </p:sp>
       <p:sp>
         <p:nvSpPr>
           <p:cNvPr id="23" name="Google Shape;23;p5"/>
-          <p:cNvSpPr txBox="1"/>
+          <p:cNvSpPr txBox="1">
+            <a:spLocks noGrp="1"/>
+          </p:cNvSpPr>
           <p:nvPr>
-            <p:ph idx="2" type="body"/>
+            <p:ph type="body" idx="2"/>
           </p:nvPr>
         </p:nvSpPr>
         <p:spPr>
@@ -3193,11 +3323,11 @@
           </a:prstGeom>
         </p:spPr>
         <p:txBody>
-          <a:bodyPr anchorCtr="0" anchor="t" bIns="91425" lIns="91425" spcFirstLastPara="1" rIns="91425" wrap="square" tIns="91425">
+          <a:bodyPr spcFirstLastPara="1" wrap="square" lIns="91425" tIns="91425" rIns="91425" bIns="91425" anchor="t" anchorCtr="0">
             <a:normAutofit/>
           </a:bodyPr>
           <a:lstStyle>
-            <a:lvl1pPr indent="-317500" lvl="0" marL="457200">
+            <a:lvl1pPr marL="457200" lvl="0" indent="-317500">
               <a:spcBef>
                 <a:spcPts val="0"/>
               </a:spcBef>
@@ -3208,7 +3338,7 @@
               <a:buChar char="●"/>
               <a:defRPr sz="1400"/>
             </a:lvl1pPr>
-            <a:lvl2pPr indent="-304800" lvl="1" marL="914400">
+            <a:lvl2pPr marL="914400" lvl="1" indent="-304800">
               <a:spcBef>
                 <a:spcPts val="0"/>
               </a:spcBef>
@@ -3219,7 +3349,7 @@
               <a:buChar char="○"/>
               <a:defRPr sz="1200"/>
             </a:lvl2pPr>
-            <a:lvl3pPr indent="-304800" lvl="2" marL="1371600">
+            <a:lvl3pPr marL="1371600" lvl="2" indent="-304800">
               <a:spcBef>
                 <a:spcPts val="0"/>
               </a:spcBef>
@@ -3230,7 +3360,7 @@
               <a:buChar char="■"/>
               <a:defRPr sz="1200"/>
             </a:lvl3pPr>
-            <a:lvl4pPr indent="-304800" lvl="3" marL="1828800">
+            <a:lvl4pPr marL="1828800" lvl="3" indent="-304800">
               <a:spcBef>
                 <a:spcPts val="0"/>
               </a:spcBef>
@@ -3241,7 +3371,7 @@
               <a:buChar char="●"/>
               <a:defRPr sz="1200"/>
             </a:lvl4pPr>
-            <a:lvl5pPr indent="-304800" lvl="4" marL="2286000">
+            <a:lvl5pPr marL="2286000" lvl="4" indent="-304800">
               <a:spcBef>
                 <a:spcPts val="0"/>
               </a:spcBef>
@@ -3252,7 +3382,7 @@
               <a:buChar char="○"/>
               <a:defRPr sz="1200"/>
             </a:lvl5pPr>
-            <a:lvl6pPr indent="-304800" lvl="5" marL="2743200">
+            <a:lvl6pPr marL="2743200" lvl="5" indent="-304800">
               <a:spcBef>
                 <a:spcPts val="0"/>
               </a:spcBef>
@@ -3263,7 +3393,7 @@
               <a:buChar char="■"/>
               <a:defRPr sz="1200"/>
             </a:lvl6pPr>
-            <a:lvl7pPr indent="-304800" lvl="6" marL="3200400">
+            <a:lvl7pPr marL="3200400" lvl="6" indent="-304800">
               <a:spcBef>
                 <a:spcPts val="0"/>
               </a:spcBef>
@@ -3274,7 +3404,7 @@
               <a:buChar char="●"/>
               <a:defRPr sz="1200"/>
             </a:lvl7pPr>
-            <a:lvl8pPr indent="-304800" lvl="7" marL="3657600">
+            <a:lvl8pPr marL="3657600" lvl="7" indent="-304800">
               <a:spcBef>
                 <a:spcPts val="0"/>
               </a:spcBef>
@@ -3285,7 +3415,7 @@
               <a:buChar char="○"/>
               <a:defRPr sz="1200"/>
             </a:lvl8pPr>
-            <a:lvl9pPr indent="-304800" lvl="8" marL="4114800">
+            <a:lvl9pPr marL="4114800" lvl="8" indent="-304800">
               <a:spcBef>
                 <a:spcPts val="0"/>
               </a:spcBef>
@@ -3297,15 +3427,19 @@
               <a:defRPr sz="1200"/>
             </a:lvl9pPr>
           </a:lstStyle>
-          <a:p/>
+          <a:p>
+            <a:endParaRPr/>
+          </a:p>
         </p:txBody>
       </p:sp>
       <p:sp>
         <p:nvSpPr>
           <p:cNvPr id="24" name="Google Shape;24;p5"/>
-          <p:cNvSpPr txBox="1"/>
+          <p:cNvSpPr txBox="1">
+            <a:spLocks noGrp="1"/>
+          </p:cNvSpPr>
           <p:nvPr>
-            <p:ph idx="12" type="sldNum"/>
+            <p:ph type="sldNum" idx="12"/>
           </p:nvPr>
         </p:nvSpPr>
         <p:spPr>
@@ -3318,7 +3452,7 @@
           </a:prstGeom>
         </p:spPr>
         <p:txBody>
-          <a:bodyPr anchorCtr="0" anchor="ctr" bIns="91425" lIns="91425" spcFirstLastPara="1" rIns="91425" wrap="square" tIns="91425">
+          <a:bodyPr spcFirstLastPara="1" wrap="square" lIns="91425" tIns="91425" rIns="91425" bIns="91425" anchor="ctr" anchorCtr="0">
             <a:normAutofit/>
           </a:bodyPr>
           <a:lstStyle>
@@ -3360,7 +3494,7 @@
             </a:lvl9pPr>
           </a:lstStyle>
           <a:p>
-            <a:pPr indent="0" lvl="0" marL="0" rtl="0" algn="r">
+            <a:pPr marL="0" lvl="0" indent="0" algn="r" rtl="0">
               <a:spcBef>
                 <a:spcPts val="0"/>
               </a:spcBef>
@@ -3371,7 +3505,7 @@
             </a:pPr>
             <a:fld id="{00000000-1234-1234-1234-123412341234}" type="slidenum">
               <a:rPr lang="es"/>
-              <a:t>‹#›</a:t>
+              <a:t>‹Nº›</a:t>
             </a:fld>
             <a:endParaRPr/>
           </a:p>
@@ -3386,11 +3520,11 @@
 </file>
 
 <file path=ppt/slideLayouts/slideLayout5.xml><?xml version="1.0" encoding="utf-8"?>
-<p:sldLayout xmlns:a="http://schemas.openxmlformats.org/drawingml/2006/main" xmlns:r="http://schemas.openxmlformats.org/officeDocument/2006/relationships" xmlns:mc="http://schemas.openxmlformats.org/markup-compatibility/2006" xmlns:mv="urn:schemas-microsoft-com:mac:vml" xmlns:p="http://schemas.openxmlformats.org/presentationml/2006/main" xmlns:c="http://schemas.openxmlformats.org/drawingml/2006/chart" xmlns:dgm="http://schemas.openxmlformats.org/drawingml/2006/diagram" xmlns:o="urn:schemas-microsoft-com:office:office" xmlns:v="urn:schemas-microsoft-com:vml" xmlns:pvml="urn:schemas-microsoft-com:office:powerpoint" xmlns:com="http://schemas.openxmlformats.org/drawingml/2006/compatibility" xmlns:p14="http://schemas.microsoft.com/office/powerpoint/2010/main" xmlns:p15="http://schemas.microsoft.com/office/powerpoint/2012/main" xmlns:ahyp="http://schemas.microsoft.com/office/drawing/2018/hyperlinkcolor" matchingName="Title only" type="titleOnly">
+<p:sldLayout xmlns:a="http://schemas.openxmlformats.org/drawingml/2006/main" xmlns:r="http://schemas.openxmlformats.org/officeDocument/2006/relationships" xmlns:p="http://schemas.openxmlformats.org/presentationml/2006/main" matchingName="Title only" type="titleOnly">
   <p:cSld name="TITLE_ONLY">
     <p:spTree>
       <p:nvGrpSpPr>
-        <p:cNvPr id="25" name="Shape 25"/>
+        <p:cNvPr id="1" name="Shape 25"/>
         <p:cNvGrpSpPr/>
         <p:nvPr/>
       </p:nvGrpSpPr>
@@ -3405,7 +3539,9 @@
       <p:sp>
         <p:nvSpPr>
           <p:cNvPr id="26" name="Google Shape;26;p6"/>
-          <p:cNvSpPr txBox="1"/>
+          <p:cNvSpPr txBox="1">
+            <a:spLocks noGrp="1"/>
+          </p:cNvSpPr>
           <p:nvPr>
             <p:ph type="title"/>
           </p:nvPr>
@@ -3420,7 +3556,7 @@
           </a:prstGeom>
         </p:spPr>
         <p:txBody>
-          <a:bodyPr anchorCtr="0" anchor="t" bIns="91425" lIns="91425" spcFirstLastPara="1" rIns="91425" wrap="square" tIns="91425">
+          <a:bodyPr spcFirstLastPara="1" wrap="square" lIns="91425" tIns="91425" rIns="91425" bIns="91425" anchor="t" anchorCtr="0">
             <a:normAutofit/>
           </a:bodyPr>
           <a:lstStyle>
@@ -3524,15 +3660,19 @@
               <a:defRPr/>
             </a:lvl9pPr>
           </a:lstStyle>
-          <a:p/>
+          <a:p>
+            <a:endParaRPr/>
+          </a:p>
         </p:txBody>
       </p:sp>
       <p:sp>
         <p:nvSpPr>
           <p:cNvPr id="27" name="Google Shape;27;p6"/>
-          <p:cNvSpPr txBox="1"/>
+          <p:cNvSpPr txBox="1">
+            <a:spLocks noGrp="1"/>
+          </p:cNvSpPr>
           <p:nvPr>
-            <p:ph idx="12" type="sldNum"/>
+            <p:ph type="sldNum" idx="12"/>
           </p:nvPr>
         </p:nvSpPr>
         <p:spPr>
@@ -3545,7 +3685,7 @@
           </a:prstGeom>
         </p:spPr>
         <p:txBody>
-          <a:bodyPr anchorCtr="0" anchor="ctr" bIns="91425" lIns="91425" spcFirstLastPara="1" rIns="91425" wrap="square" tIns="91425">
+          <a:bodyPr spcFirstLastPara="1" wrap="square" lIns="91425" tIns="91425" rIns="91425" bIns="91425" anchor="ctr" anchorCtr="0">
             <a:normAutofit/>
           </a:bodyPr>
           <a:lstStyle>
@@ -3587,7 +3727,7 @@
             </a:lvl9pPr>
           </a:lstStyle>
           <a:p>
-            <a:pPr indent="0" lvl="0" marL="0" rtl="0" algn="r">
+            <a:pPr marL="0" lvl="0" indent="0" algn="r" rtl="0">
               <a:spcBef>
                 <a:spcPts val="0"/>
               </a:spcBef>
@@ -3598,7 +3738,7 @@
             </a:pPr>
             <a:fld id="{00000000-1234-1234-1234-123412341234}" type="slidenum">
               <a:rPr lang="es"/>
-              <a:t>‹#›</a:t>
+              <a:t>‹Nº›</a:t>
             </a:fld>
             <a:endParaRPr/>
           </a:p>
@@ -3613,11 +3753,11 @@
 </file>
 
 <file path=ppt/slideLayouts/slideLayout6.xml><?xml version="1.0" encoding="utf-8"?>
-<p:sldLayout xmlns:a="http://schemas.openxmlformats.org/drawingml/2006/main" xmlns:r="http://schemas.openxmlformats.org/officeDocument/2006/relationships" xmlns:mc="http://schemas.openxmlformats.org/markup-compatibility/2006" xmlns:mv="urn:schemas-microsoft-com:mac:vml" xmlns:p="http://schemas.openxmlformats.org/presentationml/2006/main" xmlns:c="http://schemas.openxmlformats.org/drawingml/2006/chart" xmlns:dgm="http://schemas.openxmlformats.org/drawingml/2006/diagram" xmlns:o="urn:schemas-microsoft-com:office:office" xmlns:v="urn:schemas-microsoft-com:vml" xmlns:pvml="urn:schemas-microsoft-com:office:powerpoint" xmlns:com="http://schemas.openxmlformats.org/drawingml/2006/compatibility" xmlns:p14="http://schemas.microsoft.com/office/powerpoint/2010/main" xmlns:p15="http://schemas.microsoft.com/office/powerpoint/2012/main" xmlns:ahyp="http://schemas.microsoft.com/office/drawing/2018/hyperlinkcolor" matchingName="One column text">
+<p:sldLayout xmlns:a="http://schemas.openxmlformats.org/drawingml/2006/main" xmlns:r="http://schemas.openxmlformats.org/officeDocument/2006/relationships" xmlns:p="http://schemas.openxmlformats.org/presentationml/2006/main" matchingName="One column text">
   <p:cSld name="ONE_COLUMN_TEXT">
     <p:spTree>
       <p:nvGrpSpPr>
-        <p:cNvPr id="28" name="Shape 28"/>
+        <p:cNvPr id="1" name="Shape 28"/>
         <p:cNvGrpSpPr/>
         <p:nvPr/>
       </p:nvGrpSpPr>
@@ -3632,7 +3772,9 @@
       <p:sp>
         <p:nvSpPr>
           <p:cNvPr id="29" name="Google Shape;29;p7"/>
-          <p:cNvSpPr txBox="1"/>
+          <p:cNvSpPr txBox="1">
+            <a:spLocks noGrp="1"/>
+          </p:cNvSpPr>
           <p:nvPr>
             <p:ph type="title"/>
           </p:nvPr>
@@ -3647,7 +3789,7 @@
           </a:prstGeom>
         </p:spPr>
         <p:txBody>
-          <a:bodyPr anchorCtr="0" anchor="b" bIns="91425" lIns="91425" spcFirstLastPara="1" rIns="91425" wrap="square" tIns="91425">
+          <a:bodyPr spcFirstLastPara="1" wrap="square" lIns="91425" tIns="91425" rIns="91425" bIns="91425" anchor="b" anchorCtr="0">
             <a:normAutofit/>
           </a:bodyPr>
           <a:lstStyle>
@@ -3751,15 +3893,19 @@
               <a:defRPr sz="2400"/>
             </a:lvl9pPr>
           </a:lstStyle>
-          <a:p/>
+          <a:p>
+            <a:endParaRPr/>
+          </a:p>
         </p:txBody>
       </p:sp>
       <p:sp>
         <p:nvSpPr>
           <p:cNvPr id="30" name="Google Shape;30;p7"/>
-          <p:cNvSpPr txBox="1"/>
+          <p:cNvSpPr txBox="1">
+            <a:spLocks noGrp="1"/>
+          </p:cNvSpPr>
           <p:nvPr>
-            <p:ph idx="1" type="body"/>
+            <p:ph type="body" idx="1"/>
           </p:nvPr>
         </p:nvSpPr>
         <p:spPr>
@@ -3772,11 +3918,11 @@
           </a:prstGeom>
         </p:spPr>
         <p:txBody>
-          <a:bodyPr anchorCtr="0" anchor="t" bIns="91425" lIns="91425" spcFirstLastPara="1" rIns="91425" wrap="square" tIns="91425">
+          <a:bodyPr spcFirstLastPara="1" wrap="square" lIns="91425" tIns="91425" rIns="91425" bIns="91425" anchor="t" anchorCtr="0">
             <a:normAutofit/>
           </a:bodyPr>
           <a:lstStyle>
-            <a:lvl1pPr indent="-304800" lvl="0" marL="457200">
+            <a:lvl1pPr marL="457200" lvl="0" indent="-304800">
               <a:spcBef>
                 <a:spcPts val="0"/>
               </a:spcBef>
@@ -3787,7 +3933,7 @@
               <a:buChar char="●"/>
               <a:defRPr sz="1200"/>
             </a:lvl1pPr>
-            <a:lvl2pPr indent="-304800" lvl="1" marL="914400">
+            <a:lvl2pPr marL="914400" lvl="1" indent="-304800">
               <a:spcBef>
                 <a:spcPts val="0"/>
               </a:spcBef>
@@ -3798,7 +3944,7 @@
               <a:buChar char="○"/>
               <a:defRPr sz="1200"/>
             </a:lvl2pPr>
-            <a:lvl3pPr indent="-304800" lvl="2" marL="1371600">
+            <a:lvl3pPr marL="1371600" lvl="2" indent="-304800">
               <a:spcBef>
                 <a:spcPts val="0"/>
               </a:spcBef>
@@ -3809,7 +3955,7 @@
               <a:buChar char="■"/>
               <a:defRPr sz="1200"/>
             </a:lvl3pPr>
-            <a:lvl4pPr indent="-304800" lvl="3" marL="1828800">
+            <a:lvl4pPr marL="1828800" lvl="3" indent="-304800">
               <a:spcBef>
                 <a:spcPts val="0"/>
               </a:spcBef>
@@ -3820,7 +3966,7 @@
               <a:buChar char="●"/>
               <a:defRPr sz="1200"/>
             </a:lvl4pPr>
-            <a:lvl5pPr indent="-304800" lvl="4" marL="2286000">
+            <a:lvl5pPr marL="2286000" lvl="4" indent="-304800">
               <a:spcBef>
                 <a:spcPts val="0"/>
               </a:spcBef>
@@ -3831,7 +3977,7 @@
               <a:buChar char="○"/>
               <a:defRPr sz="1200"/>
             </a:lvl5pPr>
-            <a:lvl6pPr indent="-304800" lvl="5" marL="2743200">
+            <a:lvl6pPr marL="2743200" lvl="5" indent="-304800">
               <a:spcBef>
                 <a:spcPts val="0"/>
               </a:spcBef>
@@ -3842,7 +3988,7 @@
               <a:buChar char="■"/>
               <a:defRPr sz="1200"/>
             </a:lvl6pPr>
-            <a:lvl7pPr indent="-304800" lvl="6" marL="3200400">
+            <a:lvl7pPr marL="3200400" lvl="6" indent="-304800">
               <a:spcBef>
                 <a:spcPts val="0"/>
               </a:spcBef>
@@ -3853,7 +3999,7 @@
               <a:buChar char="●"/>
               <a:defRPr sz="1200"/>
             </a:lvl7pPr>
-            <a:lvl8pPr indent="-304800" lvl="7" marL="3657600">
+            <a:lvl8pPr marL="3657600" lvl="7" indent="-304800">
               <a:spcBef>
                 <a:spcPts val="0"/>
               </a:spcBef>
@@ -3864,7 +4010,7 @@
               <a:buChar char="○"/>
               <a:defRPr sz="1200"/>
             </a:lvl8pPr>
-            <a:lvl9pPr indent="-304800" lvl="8" marL="4114800">
+            <a:lvl9pPr marL="4114800" lvl="8" indent="-304800">
               <a:spcBef>
                 <a:spcPts val="0"/>
               </a:spcBef>
@@ -3876,15 +4022,19 @@
               <a:defRPr sz="1200"/>
             </a:lvl9pPr>
           </a:lstStyle>
-          <a:p/>
+          <a:p>
+            <a:endParaRPr/>
+          </a:p>
         </p:txBody>
       </p:sp>
       <p:sp>
         <p:nvSpPr>
           <p:cNvPr id="31" name="Google Shape;31;p7"/>
-          <p:cNvSpPr txBox="1"/>
+          <p:cNvSpPr txBox="1">
+            <a:spLocks noGrp="1"/>
+          </p:cNvSpPr>
           <p:nvPr>
-            <p:ph idx="12" type="sldNum"/>
+            <p:ph type="sldNum" idx="12"/>
           </p:nvPr>
         </p:nvSpPr>
         <p:spPr>
@@ -3897,7 +4047,7 @@
           </a:prstGeom>
         </p:spPr>
         <p:txBody>
-          <a:bodyPr anchorCtr="0" anchor="ctr" bIns="91425" lIns="91425" spcFirstLastPara="1" rIns="91425" wrap="square" tIns="91425">
+          <a:bodyPr spcFirstLastPara="1" wrap="square" lIns="91425" tIns="91425" rIns="91425" bIns="91425" anchor="ctr" anchorCtr="0">
             <a:normAutofit/>
           </a:bodyPr>
           <a:lstStyle>
@@ -3939,7 +4089,7 @@
             </a:lvl9pPr>
           </a:lstStyle>
           <a:p>
-            <a:pPr indent="0" lvl="0" marL="0" rtl="0" algn="r">
+            <a:pPr marL="0" lvl="0" indent="0" algn="r" rtl="0">
               <a:spcBef>
                 <a:spcPts val="0"/>
               </a:spcBef>
@@ -3950,7 +4100,7 @@
             </a:pPr>
             <a:fld id="{00000000-1234-1234-1234-123412341234}" type="slidenum">
               <a:rPr lang="es"/>
-              <a:t>‹#›</a:t>
+              <a:t>‹Nº›</a:t>
             </a:fld>
             <a:endParaRPr/>
           </a:p>
@@ -3965,11 +4115,11 @@
 </file>
 
 <file path=ppt/slideLayouts/slideLayout7.xml><?xml version="1.0" encoding="utf-8"?>
-<p:sldLayout xmlns:a="http://schemas.openxmlformats.org/drawingml/2006/main" xmlns:r="http://schemas.openxmlformats.org/officeDocument/2006/relationships" xmlns:mc="http://schemas.openxmlformats.org/markup-compatibility/2006" xmlns:mv="urn:schemas-microsoft-com:mac:vml" xmlns:p="http://schemas.openxmlformats.org/presentationml/2006/main" xmlns:c="http://schemas.openxmlformats.org/drawingml/2006/chart" xmlns:dgm="http://schemas.openxmlformats.org/drawingml/2006/diagram" xmlns:o="urn:schemas-microsoft-com:office:office" xmlns:v="urn:schemas-microsoft-com:vml" xmlns:pvml="urn:schemas-microsoft-com:office:powerpoint" xmlns:com="http://schemas.openxmlformats.org/drawingml/2006/compatibility" xmlns:p14="http://schemas.microsoft.com/office/powerpoint/2010/main" xmlns:p15="http://schemas.microsoft.com/office/powerpoint/2012/main" xmlns:ahyp="http://schemas.microsoft.com/office/drawing/2018/hyperlinkcolor" matchingName="Main point">
+<p:sldLayout xmlns:a="http://schemas.openxmlformats.org/drawingml/2006/main" xmlns:r="http://schemas.openxmlformats.org/officeDocument/2006/relationships" xmlns:p="http://schemas.openxmlformats.org/presentationml/2006/main" matchingName="Main point">
   <p:cSld name="MAIN_POINT">
     <p:spTree>
       <p:nvGrpSpPr>
-        <p:cNvPr id="32" name="Shape 32"/>
+        <p:cNvPr id="1" name="Shape 32"/>
         <p:cNvGrpSpPr/>
         <p:nvPr/>
       </p:nvGrpSpPr>
@@ -3984,7 +4134,9 @@
       <p:sp>
         <p:nvSpPr>
           <p:cNvPr id="33" name="Google Shape;33;p8"/>
-          <p:cNvSpPr txBox="1"/>
+          <p:cNvSpPr txBox="1">
+            <a:spLocks noGrp="1"/>
+          </p:cNvSpPr>
           <p:nvPr>
             <p:ph type="title"/>
           </p:nvPr>
@@ -3999,7 +4151,7 @@
           </a:prstGeom>
         </p:spPr>
         <p:txBody>
-          <a:bodyPr anchorCtr="0" anchor="ctr" bIns="91425" lIns="91425" spcFirstLastPara="1" rIns="91425" wrap="square" tIns="91425">
+          <a:bodyPr spcFirstLastPara="1" wrap="square" lIns="91425" tIns="91425" rIns="91425" bIns="91425" anchor="ctr" anchorCtr="0">
             <a:normAutofit/>
           </a:bodyPr>
           <a:lstStyle>
@@ -4103,15 +4255,19 @@
               <a:defRPr sz="4800"/>
             </a:lvl9pPr>
           </a:lstStyle>
-          <a:p/>
+          <a:p>
+            <a:endParaRPr/>
+          </a:p>
         </p:txBody>
       </p:sp>
       <p:sp>
         <p:nvSpPr>
           <p:cNvPr id="34" name="Google Shape;34;p8"/>
-          <p:cNvSpPr txBox="1"/>
+          <p:cNvSpPr txBox="1">
+            <a:spLocks noGrp="1"/>
+          </p:cNvSpPr>
           <p:nvPr>
-            <p:ph idx="12" type="sldNum"/>
+            <p:ph type="sldNum" idx="12"/>
           </p:nvPr>
         </p:nvSpPr>
         <p:spPr>
@@ -4124,7 +4280,7 @@
           </a:prstGeom>
         </p:spPr>
         <p:txBody>
-          <a:bodyPr anchorCtr="0" anchor="ctr" bIns="91425" lIns="91425" spcFirstLastPara="1" rIns="91425" wrap="square" tIns="91425">
+          <a:bodyPr spcFirstLastPara="1" wrap="square" lIns="91425" tIns="91425" rIns="91425" bIns="91425" anchor="ctr" anchorCtr="0">
             <a:normAutofit/>
           </a:bodyPr>
           <a:lstStyle>
@@ -4166,7 +4322,7 @@
             </a:lvl9pPr>
           </a:lstStyle>
           <a:p>
-            <a:pPr indent="0" lvl="0" marL="0" rtl="0" algn="r">
+            <a:pPr marL="0" lvl="0" indent="0" algn="r" rtl="0">
               <a:spcBef>
                 <a:spcPts val="0"/>
               </a:spcBef>
@@ -4177,7 +4333,7 @@
             </a:pPr>
             <a:fld id="{00000000-1234-1234-1234-123412341234}" type="slidenum">
               <a:rPr lang="es"/>
-              <a:t>‹#›</a:t>
+              <a:t>‹Nº›</a:t>
             </a:fld>
             <a:endParaRPr/>
           </a:p>
@@ -4192,11 +4348,11 @@
 </file>
 
 <file path=ppt/slideLayouts/slideLayout8.xml><?xml version="1.0" encoding="utf-8"?>
-<p:sldLayout xmlns:a="http://schemas.openxmlformats.org/drawingml/2006/main" xmlns:r="http://schemas.openxmlformats.org/officeDocument/2006/relationships" xmlns:mc="http://schemas.openxmlformats.org/markup-compatibility/2006" xmlns:mv="urn:schemas-microsoft-com:mac:vml" xmlns:p="http://schemas.openxmlformats.org/presentationml/2006/main" xmlns:c="http://schemas.openxmlformats.org/drawingml/2006/chart" xmlns:dgm="http://schemas.openxmlformats.org/drawingml/2006/diagram" xmlns:o="urn:schemas-microsoft-com:office:office" xmlns:v="urn:schemas-microsoft-com:vml" xmlns:pvml="urn:schemas-microsoft-com:office:powerpoint" xmlns:com="http://schemas.openxmlformats.org/drawingml/2006/compatibility" xmlns:p14="http://schemas.microsoft.com/office/powerpoint/2010/main" xmlns:p15="http://schemas.microsoft.com/office/powerpoint/2012/main" xmlns:ahyp="http://schemas.microsoft.com/office/drawing/2018/hyperlinkcolor" matchingName="Section title and description">
+<p:sldLayout xmlns:a="http://schemas.openxmlformats.org/drawingml/2006/main" xmlns:r="http://schemas.openxmlformats.org/officeDocument/2006/relationships" xmlns:p="http://schemas.openxmlformats.org/presentationml/2006/main" matchingName="Section title and description">
   <p:cSld name="SECTION_TITLE_AND_DESCRIPTION">
     <p:spTree>
       <p:nvGrpSpPr>
-        <p:cNvPr id="35" name="Shape 35"/>
+        <p:cNvPr id="1" name="Shape 35"/>
         <p:cNvGrpSpPr/>
         <p:nvPr/>
       </p:nvGrpSpPr>
@@ -4230,23 +4386,20 @@
           </a:ln>
         </p:spPr>
         <p:txBody>
-          <a:bodyPr anchorCtr="0" anchor="ctr" bIns="91425" lIns="91425" spcFirstLastPara="1" rIns="91425" wrap="square" tIns="91425">
+          <a:bodyPr spcFirstLastPara="1" wrap="square" lIns="91425" tIns="91425" rIns="91425" bIns="91425" anchor="ctr" anchorCtr="0">
             <a:noAutofit/>
           </a:bodyPr>
           <a:lstStyle/>
           <a:p>
-            <a:pPr indent="0" lvl="0" marL="0" rtl="0" algn="l">
-              <a:spcBef>
-                <a:spcPts val="0"/>
-              </a:spcBef>
-              <a:spcAft>
-                <a:spcPts val="0"/>
-              </a:spcAft>
-              <a:buNone/>
-            </a:pPr>
-            <a:r>
-              <a:t/>
-            </a:r>
+            <a:pPr marL="0" lvl="0" indent="0" algn="l" rtl="0">
+              <a:spcBef>
+                <a:spcPts val="0"/>
+              </a:spcBef>
+              <a:spcAft>
+                <a:spcPts val="0"/>
+              </a:spcAft>
+              <a:buNone/>
+            </a:pPr>
             <a:endParaRPr/>
           </a:p>
         </p:txBody>
@@ -4254,7 +4407,9 @@
       <p:sp>
         <p:nvSpPr>
           <p:cNvPr id="37" name="Google Shape;37;p9"/>
-          <p:cNvSpPr txBox="1"/>
+          <p:cNvSpPr txBox="1">
+            <a:spLocks noGrp="1"/>
+          </p:cNvSpPr>
           <p:nvPr>
             <p:ph type="title"/>
           </p:nvPr>
@@ -4269,7 +4424,7 @@
           </a:prstGeom>
         </p:spPr>
         <p:txBody>
-          <a:bodyPr anchorCtr="0" anchor="b" bIns="91425" lIns="91425" spcFirstLastPara="1" rIns="91425" wrap="square" tIns="91425">
+          <a:bodyPr spcFirstLastPara="1" wrap="square" lIns="91425" tIns="91425" rIns="91425" bIns="91425" anchor="b" anchorCtr="0">
             <a:normAutofit/>
           </a:bodyPr>
           <a:lstStyle>
@@ -4373,15 +4528,19 @@
               <a:defRPr sz="4200"/>
             </a:lvl9pPr>
           </a:lstStyle>
-          <a:p/>
+          <a:p>
+            <a:endParaRPr/>
+          </a:p>
         </p:txBody>
       </p:sp>
       <p:sp>
         <p:nvSpPr>
           <p:cNvPr id="38" name="Google Shape;38;p9"/>
-          <p:cNvSpPr txBox="1"/>
+          <p:cNvSpPr txBox="1">
+            <a:spLocks noGrp="1"/>
+          </p:cNvSpPr>
           <p:nvPr>
-            <p:ph idx="1" type="subTitle"/>
+            <p:ph type="subTitle" idx="1"/>
           </p:nvPr>
         </p:nvSpPr>
         <p:spPr>
@@ -4394,7 +4553,7 @@
           </a:prstGeom>
         </p:spPr>
         <p:txBody>
-          <a:bodyPr anchorCtr="0" anchor="t" bIns="91425" lIns="91425" spcFirstLastPara="1" rIns="91425" wrap="square" tIns="91425">
+          <a:bodyPr spcFirstLastPara="1" wrap="square" lIns="91425" tIns="91425" rIns="91425" bIns="91425" anchor="t" anchorCtr="0">
             <a:normAutofit/>
           </a:bodyPr>
           <a:lstStyle>
@@ -4525,15 +4684,19 @@
               <a:defRPr sz="2100"/>
             </a:lvl9pPr>
           </a:lstStyle>
-          <a:p/>
+          <a:p>
+            <a:endParaRPr/>
+          </a:p>
         </p:txBody>
       </p:sp>
       <p:sp>
         <p:nvSpPr>
           <p:cNvPr id="39" name="Google Shape;39;p9"/>
-          <p:cNvSpPr txBox="1"/>
+          <p:cNvSpPr txBox="1">
+            <a:spLocks noGrp="1"/>
+          </p:cNvSpPr>
           <p:nvPr>
-            <p:ph idx="2" type="body"/>
+            <p:ph type="body" idx="2"/>
           </p:nvPr>
         </p:nvSpPr>
         <p:spPr>
@@ -4546,11 +4709,11 @@
           </a:prstGeom>
         </p:spPr>
         <p:txBody>
-          <a:bodyPr anchorCtr="0" anchor="ctr" bIns="91425" lIns="91425" spcFirstLastPara="1" rIns="91425" wrap="square" tIns="91425">
+          <a:bodyPr spcFirstLastPara="1" wrap="square" lIns="91425" tIns="91425" rIns="91425" bIns="91425" anchor="ctr" anchorCtr="0">
             <a:normAutofit/>
           </a:bodyPr>
           <a:lstStyle>
-            <a:lvl1pPr indent="-342900" lvl="0" marL="457200">
+            <a:lvl1pPr marL="457200" lvl="0" indent="-342900">
               <a:spcBef>
                 <a:spcPts val="0"/>
               </a:spcBef>
@@ -4561,7 +4724,7 @@
               <a:buChar char="●"/>
               <a:defRPr/>
             </a:lvl1pPr>
-            <a:lvl2pPr indent="-317500" lvl="1" marL="914400">
+            <a:lvl2pPr marL="914400" lvl="1" indent="-317500">
               <a:spcBef>
                 <a:spcPts val="0"/>
               </a:spcBef>
@@ -4572,7 +4735,7 @@
               <a:buChar char="○"/>
               <a:defRPr/>
             </a:lvl2pPr>
-            <a:lvl3pPr indent="-317500" lvl="2" marL="1371600">
+            <a:lvl3pPr marL="1371600" lvl="2" indent="-317500">
               <a:spcBef>
                 <a:spcPts val="0"/>
               </a:spcBef>
@@ -4583,7 +4746,7 @@
               <a:buChar char="■"/>
               <a:defRPr/>
             </a:lvl3pPr>
-            <a:lvl4pPr indent="-317500" lvl="3" marL="1828800">
+            <a:lvl4pPr marL="1828800" lvl="3" indent="-317500">
               <a:spcBef>
                 <a:spcPts val="0"/>
               </a:spcBef>
@@ -4594,7 +4757,7 @@
               <a:buChar char="●"/>
               <a:defRPr/>
             </a:lvl4pPr>
-            <a:lvl5pPr indent="-317500" lvl="4" marL="2286000">
+            <a:lvl5pPr marL="2286000" lvl="4" indent="-317500">
               <a:spcBef>
                 <a:spcPts val="0"/>
               </a:spcBef>
@@ -4605,7 +4768,7 @@
               <a:buChar char="○"/>
               <a:defRPr/>
             </a:lvl5pPr>
-            <a:lvl6pPr indent="-317500" lvl="5" marL="2743200">
+            <a:lvl6pPr marL="2743200" lvl="5" indent="-317500">
               <a:spcBef>
                 <a:spcPts val="0"/>
               </a:spcBef>
@@ -4616,7 +4779,7 @@
               <a:buChar char="■"/>
               <a:defRPr/>
             </a:lvl6pPr>
-            <a:lvl7pPr indent="-317500" lvl="6" marL="3200400">
+            <a:lvl7pPr marL="3200400" lvl="6" indent="-317500">
               <a:spcBef>
                 <a:spcPts val="0"/>
               </a:spcBef>
@@ -4627,7 +4790,7 @@
               <a:buChar char="●"/>
               <a:defRPr/>
             </a:lvl7pPr>
-            <a:lvl8pPr indent="-317500" lvl="7" marL="3657600">
+            <a:lvl8pPr marL="3657600" lvl="7" indent="-317500">
               <a:spcBef>
                 <a:spcPts val="0"/>
               </a:spcBef>
@@ -4638,7 +4801,7 @@
               <a:buChar char="○"/>
               <a:defRPr/>
             </a:lvl8pPr>
-            <a:lvl9pPr indent="-317500" lvl="8" marL="4114800">
+            <a:lvl9pPr marL="4114800" lvl="8" indent="-317500">
               <a:spcBef>
                 <a:spcPts val="0"/>
               </a:spcBef>
@@ -4650,15 +4813,19 @@
               <a:defRPr/>
             </a:lvl9pPr>
           </a:lstStyle>
-          <a:p/>
+          <a:p>
+            <a:endParaRPr/>
+          </a:p>
         </p:txBody>
       </p:sp>
       <p:sp>
         <p:nvSpPr>
           <p:cNvPr id="40" name="Google Shape;40;p9"/>
-          <p:cNvSpPr txBox="1"/>
+          <p:cNvSpPr txBox="1">
+            <a:spLocks noGrp="1"/>
+          </p:cNvSpPr>
           <p:nvPr>
-            <p:ph idx="12" type="sldNum"/>
+            <p:ph type="sldNum" idx="12"/>
           </p:nvPr>
         </p:nvSpPr>
         <p:spPr>
@@ -4671,7 +4838,7 @@
           </a:prstGeom>
         </p:spPr>
         <p:txBody>
-          <a:bodyPr anchorCtr="0" anchor="ctr" bIns="91425" lIns="91425" spcFirstLastPara="1" rIns="91425" wrap="square" tIns="91425">
+          <a:bodyPr spcFirstLastPara="1" wrap="square" lIns="91425" tIns="91425" rIns="91425" bIns="91425" anchor="ctr" anchorCtr="0">
             <a:normAutofit/>
           </a:bodyPr>
           <a:lstStyle>
@@ -4713,7 +4880,7 @@
             </a:lvl9pPr>
           </a:lstStyle>
           <a:p>
-            <a:pPr indent="0" lvl="0" marL="0" rtl="0" algn="r">
+            <a:pPr marL="0" lvl="0" indent="0" algn="r" rtl="0">
               <a:spcBef>
                 <a:spcPts val="0"/>
               </a:spcBef>
@@ -4724,7 +4891,7 @@
             </a:pPr>
             <a:fld id="{00000000-1234-1234-1234-123412341234}" type="slidenum">
               <a:rPr lang="es"/>
-              <a:t>‹#›</a:t>
+              <a:t>‹Nº›</a:t>
             </a:fld>
             <a:endParaRPr/>
           </a:p>
@@ -4739,11 +4906,11 @@
 </file>
 
 <file path=ppt/slideLayouts/slideLayout9.xml><?xml version="1.0" encoding="utf-8"?>
-<p:sldLayout xmlns:a="http://schemas.openxmlformats.org/drawingml/2006/main" xmlns:r="http://schemas.openxmlformats.org/officeDocument/2006/relationships" xmlns:mc="http://schemas.openxmlformats.org/markup-compatibility/2006" xmlns:mv="urn:schemas-microsoft-com:mac:vml" xmlns:p="http://schemas.openxmlformats.org/presentationml/2006/main" xmlns:c="http://schemas.openxmlformats.org/drawingml/2006/chart" xmlns:dgm="http://schemas.openxmlformats.org/drawingml/2006/diagram" xmlns:o="urn:schemas-microsoft-com:office:office" xmlns:v="urn:schemas-microsoft-com:vml" xmlns:pvml="urn:schemas-microsoft-com:office:powerpoint" xmlns:com="http://schemas.openxmlformats.org/drawingml/2006/compatibility" xmlns:p14="http://schemas.microsoft.com/office/powerpoint/2010/main" xmlns:p15="http://schemas.microsoft.com/office/powerpoint/2012/main" xmlns:ahyp="http://schemas.microsoft.com/office/drawing/2018/hyperlinkcolor" matchingName="Caption">
+<p:sldLayout xmlns:a="http://schemas.openxmlformats.org/drawingml/2006/main" xmlns:r="http://schemas.openxmlformats.org/officeDocument/2006/relationships" xmlns:p="http://schemas.openxmlformats.org/presentationml/2006/main" matchingName="Caption">
   <p:cSld name="CAPTION_ONLY">
     <p:spTree>
       <p:nvGrpSpPr>
-        <p:cNvPr id="41" name="Shape 41"/>
+        <p:cNvPr id="1" name="Shape 41"/>
         <p:cNvGrpSpPr/>
         <p:nvPr/>
       </p:nvGrpSpPr>
@@ -4758,9 +4925,11 @@
       <p:sp>
         <p:nvSpPr>
           <p:cNvPr id="42" name="Google Shape;42;p10"/>
-          <p:cNvSpPr txBox="1"/>
+          <p:cNvSpPr txBox="1">
+            <a:spLocks noGrp="1"/>
+          </p:cNvSpPr>
           <p:nvPr>
-            <p:ph idx="1" type="body"/>
+            <p:ph type="body" idx="1"/>
           </p:nvPr>
         </p:nvSpPr>
         <p:spPr>
@@ -4773,11 +4942,11 @@
           </a:prstGeom>
         </p:spPr>
         <p:txBody>
-          <a:bodyPr anchorCtr="0" anchor="ctr" bIns="91425" lIns="91425" spcFirstLastPara="1" rIns="91425" wrap="square" tIns="91425">
+          <a:bodyPr spcFirstLastPara="1" wrap="square" lIns="91425" tIns="91425" rIns="91425" bIns="91425" anchor="ctr" anchorCtr="0">
             <a:normAutofit/>
           </a:bodyPr>
           <a:lstStyle>
-            <a:lvl1pPr indent="-228600" lvl="0" marL="457200">
+            <a:lvl1pPr marL="457200" lvl="0" indent="-228600">
               <a:lnSpc>
                 <a:spcPct val="100000"/>
               </a:lnSpc>
@@ -4792,15 +4961,19 @@
               <a:defRPr/>
             </a:lvl1pPr>
           </a:lstStyle>
-          <a:p/>
+          <a:p>
+            <a:endParaRPr/>
+          </a:p>
         </p:txBody>
       </p:sp>
       <p:sp>
         <p:nvSpPr>
           <p:cNvPr id="43" name="Google Shape;43;p10"/>
-          <p:cNvSpPr txBox="1"/>
+          <p:cNvSpPr txBox="1">
+            <a:spLocks noGrp="1"/>
+          </p:cNvSpPr>
           <p:nvPr>
-            <p:ph idx="12" type="sldNum"/>
+            <p:ph type="sldNum" idx="12"/>
           </p:nvPr>
         </p:nvSpPr>
         <p:spPr>
@@ -4813,7 +4986,7 @@
           </a:prstGeom>
         </p:spPr>
         <p:txBody>
-          <a:bodyPr anchorCtr="0" anchor="ctr" bIns="91425" lIns="91425" spcFirstLastPara="1" rIns="91425" wrap="square" tIns="91425">
+          <a:bodyPr spcFirstLastPara="1" wrap="square" lIns="91425" tIns="91425" rIns="91425" bIns="91425" anchor="ctr" anchorCtr="0">
             <a:normAutofit/>
           </a:bodyPr>
           <a:lstStyle>
@@ -4855,7 +5028,7 @@
             </a:lvl9pPr>
           </a:lstStyle>
           <a:p>
-            <a:pPr indent="0" lvl="0" marL="0" rtl="0" algn="r">
+            <a:pPr marL="0" lvl="0" indent="0" algn="r" rtl="0">
               <a:spcBef>
                 <a:spcPts val="0"/>
               </a:spcBef>
@@ -4866,7 +5039,7 @@
             </a:pPr>
             <a:fld id="{00000000-1234-1234-1234-123412341234}" type="slidenum">
               <a:rPr lang="es"/>
-              <a:t>‹#›</a:t>
+              <a:t>‹Nº›</a:t>
             </a:fld>
             <a:endParaRPr/>
           </a:p>
@@ -4881,18 +5054,19 @@
 </file>
 
 <file path=ppt/slideMasters/slideMaster1.xml><?xml version="1.0" encoding="utf-8"?>
-<p:sldMaster xmlns:a="http://schemas.openxmlformats.org/drawingml/2006/main" xmlns:r="http://schemas.openxmlformats.org/officeDocument/2006/relationships" xmlns:mc="http://schemas.openxmlformats.org/markup-compatibility/2006" xmlns:mv="urn:schemas-microsoft-com:mac:vml" xmlns:p="http://schemas.openxmlformats.org/presentationml/2006/main" xmlns:c="http://schemas.openxmlformats.org/drawingml/2006/chart" xmlns:dgm="http://schemas.openxmlformats.org/drawingml/2006/diagram" xmlns:o="urn:schemas-microsoft-com:office:office" xmlns:v="urn:schemas-microsoft-com:vml" xmlns:pvml="urn:schemas-microsoft-com:office:powerpoint" xmlns:com="http://schemas.openxmlformats.org/drawingml/2006/compatibility" xmlns:p14="http://schemas.microsoft.com/office/powerpoint/2010/main" xmlns:p15="http://schemas.microsoft.com/office/powerpoint/2012/main" xmlns:ahyp="http://schemas.microsoft.com/office/drawing/2018/hyperlinkcolor">
+<p:sldMaster xmlns:a="http://schemas.openxmlformats.org/drawingml/2006/main" xmlns:r="http://schemas.openxmlformats.org/officeDocument/2006/relationships" xmlns:p="http://schemas.openxmlformats.org/presentationml/2006/main">
   <p:cSld name="simple-light-2">
     <p:bg>
       <p:bgPr>
         <a:solidFill>
           <a:schemeClr val="lt1"/>
         </a:solidFill>
+        <a:effectLst/>
       </p:bgPr>
     </p:bg>
     <p:spTree>
       <p:nvGrpSpPr>
-        <p:cNvPr id="5" name="Shape 5"/>
+        <p:cNvPr id="1" name="Shape 5"/>
         <p:cNvGrpSpPr/>
         <p:nvPr/>
       </p:nvGrpSpPr>
@@ -4907,7 +5081,9 @@
       <p:sp>
         <p:nvSpPr>
           <p:cNvPr id="6" name="Google Shape;6;p1"/>
-          <p:cNvSpPr txBox="1"/>
+          <p:cNvSpPr txBox="1">
+            <a:spLocks noGrp="1"/>
+          </p:cNvSpPr>
           <p:nvPr>
             <p:ph type="title"/>
           </p:nvPr>
@@ -4926,7 +5102,7 @@
           </a:ln>
         </p:spPr>
         <p:txBody>
-          <a:bodyPr anchorCtr="0" anchor="t" bIns="91425" lIns="91425" spcFirstLastPara="1" rIns="91425" wrap="square" tIns="91425">
+          <a:bodyPr spcFirstLastPara="1" wrap="square" lIns="91425" tIns="91425" rIns="91425" bIns="91425" anchor="t" anchorCtr="0">
             <a:normAutofit/>
           </a:bodyPr>
           <a:lstStyle>
@@ -5093,15 +5269,19 @@
               </a:defRPr>
             </a:lvl9pPr>
           </a:lstStyle>
-          <a:p/>
+          <a:p>
+            <a:endParaRPr/>
+          </a:p>
         </p:txBody>
       </p:sp>
       <p:sp>
         <p:nvSpPr>
           <p:cNvPr id="7" name="Google Shape;7;p1"/>
-          <p:cNvSpPr txBox="1"/>
+          <p:cNvSpPr txBox="1">
+            <a:spLocks noGrp="1"/>
+          </p:cNvSpPr>
           <p:nvPr>
-            <p:ph idx="1" type="body"/>
+            <p:ph type="body" idx="1"/>
           </p:nvPr>
         </p:nvSpPr>
         <p:spPr>
@@ -5118,11 +5298,11 @@
           </a:ln>
         </p:spPr>
         <p:txBody>
-          <a:bodyPr anchorCtr="0" anchor="t" bIns="91425" lIns="91425" spcFirstLastPara="1" rIns="91425" wrap="square" tIns="91425">
+          <a:bodyPr spcFirstLastPara="1" wrap="square" lIns="91425" tIns="91425" rIns="91425" bIns="91425" anchor="t" anchorCtr="0">
             <a:normAutofit/>
           </a:bodyPr>
           <a:lstStyle>
-            <a:lvl1pPr indent="-342900" lvl="0" marL="457200">
+            <a:lvl1pPr marL="457200" lvl="0" indent="-342900">
               <a:lnSpc>
                 <a:spcPct val="115000"/>
               </a:lnSpc>
@@ -5143,7 +5323,7 @@
                 </a:solidFill>
               </a:defRPr>
             </a:lvl1pPr>
-            <a:lvl2pPr indent="-317500" lvl="1" marL="914400">
+            <a:lvl2pPr marL="914400" lvl="1" indent="-317500">
               <a:lnSpc>
                 <a:spcPct val="115000"/>
               </a:lnSpc>
@@ -5164,7 +5344,7 @@
                 </a:solidFill>
               </a:defRPr>
             </a:lvl2pPr>
-            <a:lvl3pPr indent="-317500" lvl="2" marL="1371600">
+            <a:lvl3pPr marL="1371600" lvl="2" indent="-317500">
               <a:lnSpc>
                 <a:spcPct val="115000"/>
               </a:lnSpc>
@@ -5185,7 +5365,7 @@
                 </a:solidFill>
               </a:defRPr>
             </a:lvl3pPr>
-            <a:lvl4pPr indent="-317500" lvl="3" marL="1828800">
+            <a:lvl4pPr marL="1828800" lvl="3" indent="-317500">
               <a:lnSpc>
                 <a:spcPct val="115000"/>
               </a:lnSpc>
@@ -5206,7 +5386,7 @@
                 </a:solidFill>
               </a:defRPr>
             </a:lvl4pPr>
-            <a:lvl5pPr indent="-317500" lvl="4" marL="2286000">
+            <a:lvl5pPr marL="2286000" lvl="4" indent="-317500">
               <a:lnSpc>
                 <a:spcPct val="115000"/>
               </a:lnSpc>
@@ -5227,7 +5407,7 @@
                 </a:solidFill>
               </a:defRPr>
             </a:lvl5pPr>
-            <a:lvl6pPr indent="-317500" lvl="5" marL="2743200">
+            <a:lvl6pPr marL="2743200" lvl="5" indent="-317500">
               <a:lnSpc>
                 <a:spcPct val="115000"/>
               </a:lnSpc>
@@ -5248,7 +5428,7 @@
                 </a:solidFill>
               </a:defRPr>
             </a:lvl6pPr>
-            <a:lvl7pPr indent="-317500" lvl="6" marL="3200400">
+            <a:lvl7pPr marL="3200400" lvl="6" indent="-317500">
               <a:lnSpc>
                 <a:spcPct val="115000"/>
               </a:lnSpc>
@@ -5269,7 +5449,7 @@
                 </a:solidFill>
               </a:defRPr>
             </a:lvl7pPr>
-            <a:lvl8pPr indent="-317500" lvl="7" marL="3657600">
+            <a:lvl8pPr marL="3657600" lvl="7" indent="-317500">
               <a:lnSpc>
                 <a:spcPct val="115000"/>
               </a:lnSpc>
@@ -5290,7 +5470,7 @@
                 </a:solidFill>
               </a:defRPr>
             </a:lvl8pPr>
-            <a:lvl9pPr indent="-317500" lvl="8" marL="4114800">
+            <a:lvl9pPr marL="4114800" lvl="8" indent="-317500">
               <a:lnSpc>
                 <a:spcPct val="115000"/>
               </a:lnSpc>
@@ -5312,15 +5492,19 @@
               </a:defRPr>
             </a:lvl9pPr>
           </a:lstStyle>
-          <a:p/>
+          <a:p>
+            <a:endParaRPr/>
+          </a:p>
         </p:txBody>
       </p:sp>
       <p:sp>
         <p:nvSpPr>
           <p:cNvPr id="8" name="Google Shape;8;p1"/>
-          <p:cNvSpPr txBox="1"/>
+          <p:cNvSpPr txBox="1">
+            <a:spLocks noGrp="1"/>
+          </p:cNvSpPr>
           <p:nvPr>
-            <p:ph idx="12" type="sldNum"/>
+            <p:ph type="sldNum" idx="12"/>
           </p:nvPr>
         </p:nvSpPr>
         <p:spPr>
@@ -5337,7 +5521,7 @@
           </a:ln>
         </p:spPr>
         <p:txBody>
-          <a:bodyPr anchorCtr="0" anchor="ctr" bIns="91425" lIns="91425" spcFirstLastPara="1" rIns="91425" wrap="square" tIns="91425">
+          <a:bodyPr spcFirstLastPara="1" wrap="square" lIns="91425" tIns="91425" rIns="91425" bIns="91425" anchor="ctr" anchorCtr="0">
             <a:normAutofit/>
           </a:bodyPr>
           <a:lstStyle>
@@ -5415,7 +5599,7 @@
             </a:lvl9pPr>
           </a:lstStyle>
           <a:p>
-            <a:pPr indent="0" lvl="0" marL="0" rtl="0" algn="r">
+            <a:pPr marL="0" lvl="0" indent="0" algn="r" rtl="0">
               <a:spcBef>
                 <a:spcPts val="0"/>
               </a:spcBef>
@@ -5426,7 +5610,7 @@
             </a:pPr>
             <a:fld id="{00000000-1234-1234-1234-123412341234}" type="slidenum">
               <a:rPr lang="es"/>
-              <a:t>‹#›</a:t>
+              <a:t>‹Nº›</a:t>
             </a:fld>
             <a:endParaRPr/>
           </a:p>
@@ -5434,7 +5618,7 @@
       </p:sp>
     </p:spTree>
   </p:cSld>
-  <p:clrMap accent1="accent1" accent2="accent2" accent3="accent3" accent4="accent4" accent5="accent5" accent6="accent6" bg1="lt1" bg2="dk2" tx1="dk1" tx2="lt2" folHlink="folHlink" hlink="hlink"/>
+  <p:clrMap bg1="lt1" tx1="dk1" bg2="dk2" tx2="lt2" accent1="accent1" accent2="accent2" accent3="accent3" accent4="accent4" accent5="accent5" accent6="accent6" hlink="hlink" folHlink="folHlink"/>
   <p:sldLayoutIdLst>
     <p:sldLayoutId id="2147483648" r:id="rId1"/>
     <p:sldLayoutId id="2147483649" r:id="rId2"/>
@@ -5448,10 +5632,10 @@
     <p:sldLayoutId id="2147483657" r:id="rId10"/>
     <p:sldLayoutId id="2147483658" r:id="rId11"/>
   </p:sldLayoutIdLst>
-  <p:hf dt="0" ftr="0" hdr="0" sldNum="0"/>
+  <p:hf sldNum="0" hdr="0" ftr="0" dt="0"/>
   <p:txStyles>
     <p:titleStyle>
-      <a:defPPr lvl="0" marR="0" rtl="0" algn="l">
+      <a:defPPr marR="0" lvl="0" algn="l" rtl="0">
         <a:lnSpc>
           <a:spcPct val="100000"/>
         </a:lnSpc>
@@ -5462,7 +5646,7 @@
           <a:spcPts val="0"/>
         </a:spcAft>
       </a:defPPr>
-      <a:lvl1pPr lvl="0" marR="0" rtl="0" algn="l">
+      <a:lvl1pPr marR="0" lvl="0" algn="l" rtl="0">
         <a:lnSpc>
           <a:spcPct val="100000"/>
         </a:lnSpc>
@@ -5476,7 +5660,7 @@
           <a:srgbClr val="000000"/>
         </a:buClr>
         <a:buFont typeface="Arial"/>
-        <a:defRPr b="0" i="0" sz="1400" u="none" cap="none" strike="noStrike">
+        <a:defRPr sz="1400" b="0" i="0" u="none" strike="noStrike" cap="none">
           <a:solidFill>
             <a:srgbClr val="000000"/>
           </a:solidFill>
@@ -5486,7 +5670,7 @@
           <a:sym typeface="Arial"/>
         </a:defRPr>
       </a:lvl1pPr>
-      <a:lvl2pPr lvl="1" marR="0" rtl="0" algn="l">
+      <a:lvl2pPr marR="0" lvl="1" algn="l" rtl="0">
         <a:lnSpc>
           <a:spcPct val="100000"/>
         </a:lnSpc>
@@ -5500,7 +5684,7 @@
           <a:srgbClr val="000000"/>
         </a:buClr>
         <a:buFont typeface="Arial"/>
-        <a:defRPr b="0" i="0" sz="1400" u="none" cap="none" strike="noStrike">
+        <a:defRPr sz="1400" b="0" i="0" u="none" strike="noStrike" cap="none">
           <a:solidFill>
             <a:srgbClr val="000000"/>
           </a:solidFill>
@@ -5510,7 +5694,7 @@
           <a:sym typeface="Arial"/>
         </a:defRPr>
       </a:lvl2pPr>
-      <a:lvl3pPr lvl="2" marR="0" rtl="0" algn="l">
+      <a:lvl3pPr marR="0" lvl="2" algn="l" rtl="0">
         <a:lnSpc>
           <a:spcPct val="100000"/>
         </a:lnSpc>
@@ -5524,7 +5708,7 @@
           <a:srgbClr val="000000"/>
         </a:buClr>
         <a:buFont typeface="Arial"/>
-        <a:defRPr b="0" i="0" sz="1400" u="none" cap="none" strike="noStrike">
+        <a:defRPr sz="1400" b="0" i="0" u="none" strike="noStrike" cap="none">
           <a:solidFill>
             <a:srgbClr val="000000"/>
           </a:solidFill>
@@ -5534,7 +5718,7 @@
           <a:sym typeface="Arial"/>
         </a:defRPr>
       </a:lvl3pPr>
-      <a:lvl4pPr lvl="3" marR="0" rtl="0" algn="l">
+      <a:lvl4pPr marR="0" lvl="3" algn="l" rtl="0">
         <a:lnSpc>
           <a:spcPct val="100000"/>
         </a:lnSpc>
@@ -5548,7 +5732,7 @@
           <a:srgbClr val="000000"/>
         </a:buClr>
         <a:buFont typeface="Arial"/>
-        <a:defRPr b="0" i="0" sz="1400" u="none" cap="none" strike="noStrike">
+        <a:defRPr sz="1400" b="0" i="0" u="none" strike="noStrike" cap="none">
           <a:solidFill>
             <a:srgbClr val="000000"/>
           </a:solidFill>
@@ -5558,7 +5742,7 @@
           <a:sym typeface="Arial"/>
         </a:defRPr>
       </a:lvl4pPr>
-      <a:lvl5pPr lvl="4" marR="0" rtl="0" algn="l">
+      <a:lvl5pPr marR="0" lvl="4" algn="l" rtl="0">
         <a:lnSpc>
           <a:spcPct val="100000"/>
         </a:lnSpc>
@@ -5572,7 +5756,7 @@
           <a:srgbClr val="000000"/>
         </a:buClr>
         <a:buFont typeface="Arial"/>
-        <a:defRPr b="0" i="0" sz="1400" u="none" cap="none" strike="noStrike">
+        <a:defRPr sz="1400" b="0" i="0" u="none" strike="noStrike" cap="none">
           <a:solidFill>
             <a:srgbClr val="000000"/>
           </a:solidFill>
@@ -5582,7 +5766,7 @@
           <a:sym typeface="Arial"/>
         </a:defRPr>
       </a:lvl5pPr>
-      <a:lvl6pPr lvl="5" marR="0" rtl="0" algn="l">
+      <a:lvl6pPr marR="0" lvl="5" algn="l" rtl="0">
         <a:lnSpc>
           <a:spcPct val="100000"/>
         </a:lnSpc>
@@ -5596,7 +5780,7 @@
           <a:srgbClr val="000000"/>
         </a:buClr>
         <a:buFont typeface="Arial"/>
-        <a:defRPr b="0" i="0" sz="1400" u="none" cap="none" strike="noStrike">
+        <a:defRPr sz="1400" b="0" i="0" u="none" strike="noStrike" cap="none">
           <a:solidFill>
             <a:srgbClr val="000000"/>
           </a:solidFill>
@@ -5606,7 +5790,7 @@
           <a:sym typeface="Arial"/>
         </a:defRPr>
       </a:lvl6pPr>
-      <a:lvl7pPr lvl="6" marR="0" rtl="0" algn="l">
+      <a:lvl7pPr marR="0" lvl="6" algn="l" rtl="0">
         <a:lnSpc>
           <a:spcPct val="100000"/>
         </a:lnSpc>
@@ -5620,7 +5804,7 @@
           <a:srgbClr val="000000"/>
         </a:buClr>
         <a:buFont typeface="Arial"/>
-        <a:defRPr b="0" i="0" sz="1400" u="none" cap="none" strike="noStrike">
+        <a:defRPr sz="1400" b="0" i="0" u="none" strike="noStrike" cap="none">
           <a:solidFill>
             <a:srgbClr val="000000"/>
           </a:solidFill>
@@ -5630,7 +5814,7 @@
           <a:sym typeface="Arial"/>
         </a:defRPr>
       </a:lvl7pPr>
-      <a:lvl8pPr lvl="7" marR="0" rtl="0" algn="l">
+      <a:lvl8pPr marR="0" lvl="7" algn="l" rtl="0">
         <a:lnSpc>
           <a:spcPct val="100000"/>
         </a:lnSpc>
@@ -5644,7 +5828,7 @@
           <a:srgbClr val="000000"/>
         </a:buClr>
         <a:buFont typeface="Arial"/>
-        <a:defRPr b="0" i="0" sz="1400" u="none" cap="none" strike="noStrike">
+        <a:defRPr sz="1400" b="0" i="0" u="none" strike="noStrike" cap="none">
           <a:solidFill>
             <a:srgbClr val="000000"/>
           </a:solidFill>
@@ -5654,7 +5838,7 @@
           <a:sym typeface="Arial"/>
         </a:defRPr>
       </a:lvl8pPr>
-      <a:lvl9pPr lvl="8" marR="0" rtl="0" algn="l">
+      <a:lvl9pPr marR="0" lvl="8" algn="l" rtl="0">
         <a:lnSpc>
           <a:spcPct val="100000"/>
         </a:lnSpc>
@@ -5668,7 +5852,7 @@
           <a:srgbClr val="000000"/>
         </a:buClr>
         <a:buFont typeface="Arial"/>
-        <a:defRPr b="0" i="0" sz="1400" u="none" cap="none" strike="noStrike">
+        <a:defRPr sz="1400" b="0" i="0" u="none" strike="noStrike" cap="none">
           <a:solidFill>
             <a:srgbClr val="000000"/>
           </a:solidFill>
@@ -5680,7 +5864,7 @@
       </a:lvl9pPr>
     </p:titleStyle>
     <p:bodyStyle>
-      <a:defPPr lvl="0" marR="0" rtl="0" algn="l">
+      <a:defPPr marR="0" lvl="0" algn="l" rtl="0">
         <a:lnSpc>
           <a:spcPct val="100000"/>
         </a:lnSpc>
@@ -5691,7 +5875,7 @@
           <a:spcPts val="0"/>
         </a:spcAft>
       </a:defPPr>
-      <a:lvl1pPr lvl="0" marR="0" rtl="0" algn="l">
+      <a:lvl1pPr marR="0" lvl="0" algn="l" rtl="0">
         <a:lnSpc>
           <a:spcPct val="100000"/>
         </a:lnSpc>
@@ -5705,7 +5889,7 @@
           <a:srgbClr val="000000"/>
         </a:buClr>
         <a:buFont typeface="Arial"/>
-        <a:defRPr b="0" i="0" sz="1400" u="none" cap="none" strike="noStrike">
+        <a:defRPr sz="1400" b="0" i="0" u="none" strike="noStrike" cap="none">
           <a:solidFill>
             <a:srgbClr val="000000"/>
           </a:solidFill>
@@ -5715,7 +5899,7 @@
           <a:sym typeface="Arial"/>
         </a:defRPr>
       </a:lvl1pPr>
-      <a:lvl2pPr lvl="1" marR="0" rtl="0" algn="l">
+      <a:lvl2pPr marR="0" lvl="1" algn="l" rtl="0">
         <a:lnSpc>
           <a:spcPct val="100000"/>
         </a:lnSpc>
@@ -5729,7 +5913,7 @@
           <a:srgbClr val="000000"/>
         </a:buClr>
         <a:buFont typeface="Arial"/>
-        <a:defRPr b="0" i="0" sz="1400" u="none" cap="none" strike="noStrike">
+        <a:defRPr sz="1400" b="0" i="0" u="none" strike="noStrike" cap="none">
           <a:solidFill>
             <a:srgbClr val="000000"/>
           </a:solidFill>
@@ -5739,7 +5923,7 @@
           <a:sym typeface="Arial"/>
         </a:defRPr>
       </a:lvl2pPr>
-      <a:lvl3pPr lvl="2" marR="0" rtl="0" algn="l">
+      <a:lvl3pPr marR="0" lvl="2" algn="l" rtl="0">
         <a:lnSpc>
           <a:spcPct val="100000"/>
         </a:lnSpc>
@@ -5753,7 +5937,7 @@
           <a:srgbClr val="000000"/>
         </a:buClr>
         <a:buFont typeface="Arial"/>
-        <a:defRPr b="0" i="0" sz="1400" u="none" cap="none" strike="noStrike">
+        <a:defRPr sz="1400" b="0" i="0" u="none" strike="noStrike" cap="none">
           <a:solidFill>
             <a:srgbClr val="000000"/>
           </a:solidFill>
@@ -5763,7 +5947,7 @@
           <a:sym typeface="Arial"/>
         </a:defRPr>
       </a:lvl3pPr>
-      <a:lvl4pPr lvl="3" marR="0" rtl="0" algn="l">
+      <a:lvl4pPr marR="0" lvl="3" algn="l" rtl="0">
         <a:lnSpc>
           <a:spcPct val="100000"/>
         </a:lnSpc>
@@ -5777,7 +5961,7 @@
           <a:srgbClr val="000000"/>
         </a:buClr>
         <a:buFont typeface="Arial"/>
-        <a:defRPr b="0" i="0" sz="1400" u="none" cap="none" strike="noStrike">
+        <a:defRPr sz="1400" b="0" i="0" u="none" strike="noStrike" cap="none">
           <a:solidFill>
             <a:srgbClr val="000000"/>
           </a:solidFill>
@@ -5787,7 +5971,7 @@
           <a:sym typeface="Arial"/>
         </a:defRPr>
       </a:lvl4pPr>
-      <a:lvl5pPr lvl="4" marR="0" rtl="0" algn="l">
+      <a:lvl5pPr marR="0" lvl="4" algn="l" rtl="0">
         <a:lnSpc>
           <a:spcPct val="100000"/>
         </a:lnSpc>
@@ -5801,7 +5985,7 @@
           <a:srgbClr val="000000"/>
         </a:buClr>
         <a:buFont typeface="Arial"/>
-        <a:defRPr b="0" i="0" sz="1400" u="none" cap="none" strike="noStrike">
+        <a:defRPr sz="1400" b="0" i="0" u="none" strike="noStrike" cap="none">
           <a:solidFill>
             <a:srgbClr val="000000"/>
           </a:solidFill>
@@ -5811,7 +5995,7 @@
           <a:sym typeface="Arial"/>
         </a:defRPr>
       </a:lvl5pPr>
-      <a:lvl6pPr lvl="5" marR="0" rtl="0" algn="l">
+      <a:lvl6pPr marR="0" lvl="5" algn="l" rtl="0">
         <a:lnSpc>
           <a:spcPct val="100000"/>
         </a:lnSpc>
@@ -5825,7 +6009,7 @@
           <a:srgbClr val="000000"/>
         </a:buClr>
         <a:buFont typeface="Arial"/>
-        <a:defRPr b="0" i="0" sz="1400" u="none" cap="none" strike="noStrike">
+        <a:defRPr sz="1400" b="0" i="0" u="none" strike="noStrike" cap="none">
           <a:solidFill>
             <a:srgbClr val="000000"/>
           </a:solidFill>
@@ -5835,7 +6019,7 @@
           <a:sym typeface="Arial"/>
         </a:defRPr>
       </a:lvl6pPr>
-      <a:lvl7pPr lvl="6" marR="0" rtl="0" algn="l">
+      <a:lvl7pPr marR="0" lvl="6" algn="l" rtl="0">
         <a:lnSpc>
           <a:spcPct val="100000"/>
         </a:lnSpc>
@@ -5849,7 +6033,7 @@
           <a:srgbClr val="000000"/>
         </a:buClr>
         <a:buFont typeface="Arial"/>
-        <a:defRPr b="0" i="0" sz="1400" u="none" cap="none" strike="noStrike">
+        <a:defRPr sz="1400" b="0" i="0" u="none" strike="noStrike" cap="none">
           <a:solidFill>
             <a:srgbClr val="000000"/>
           </a:solidFill>
@@ -5859,7 +6043,7 @@
           <a:sym typeface="Arial"/>
         </a:defRPr>
       </a:lvl7pPr>
-      <a:lvl8pPr lvl="7" marR="0" rtl="0" algn="l">
+      <a:lvl8pPr marR="0" lvl="7" algn="l" rtl="0">
         <a:lnSpc>
           <a:spcPct val="100000"/>
         </a:lnSpc>
@@ -5873,7 +6057,7 @@
           <a:srgbClr val="000000"/>
         </a:buClr>
         <a:buFont typeface="Arial"/>
-        <a:defRPr b="0" i="0" sz="1400" u="none" cap="none" strike="noStrike">
+        <a:defRPr sz="1400" b="0" i="0" u="none" strike="noStrike" cap="none">
           <a:solidFill>
             <a:srgbClr val="000000"/>
           </a:solidFill>
@@ -5883,7 +6067,7 @@
           <a:sym typeface="Arial"/>
         </a:defRPr>
       </a:lvl8pPr>
-      <a:lvl9pPr lvl="8" marR="0" rtl="0" algn="l">
+      <a:lvl9pPr marR="0" lvl="8" algn="l" rtl="0">
         <a:lnSpc>
           <a:spcPct val="100000"/>
         </a:lnSpc>
@@ -5897,7 +6081,7 @@
           <a:srgbClr val="000000"/>
         </a:buClr>
         <a:buFont typeface="Arial"/>
-        <a:defRPr b="0" i="0" sz="1400" u="none" cap="none" strike="noStrike">
+        <a:defRPr sz="1400" b="0" i="0" u="none" strike="noStrike" cap="none">
           <a:solidFill>
             <a:srgbClr val="000000"/>
           </a:solidFill>
@@ -5909,7 +6093,7 @@
       </a:lvl9pPr>
     </p:bodyStyle>
     <p:otherStyle>
-      <a:defPPr lvl="0" marR="0" rtl="0" algn="l">
+      <a:defPPr marR="0" lvl="0" algn="l" rtl="0">
         <a:lnSpc>
           <a:spcPct val="100000"/>
         </a:lnSpc>
@@ -5920,7 +6104,7 @@
           <a:spcPts val="0"/>
         </a:spcAft>
       </a:defPPr>
-      <a:lvl1pPr lvl="0" marR="0" rtl="0" algn="l">
+      <a:lvl1pPr marR="0" lvl="0" algn="l" rtl="0">
         <a:lnSpc>
           <a:spcPct val="100000"/>
         </a:lnSpc>
@@ -5934,7 +6118,7 @@
           <a:srgbClr val="000000"/>
         </a:buClr>
         <a:buFont typeface="Arial"/>
-        <a:defRPr b="0" i="0" sz="1400" u="none" cap="none" strike="noStrike">
+        <a:defRPr sz="1400" b="0" i="0" u="none" strike="noStrike" cap="none">
           <a:solidFill>
             <a:srgbClr val="000000"/>
           </a:solidFill>
@@ -5944,7 +6128,7 @@
           <a:sym typeface="Arial"/>
         </a:defRPr>
       </a:lvl1pPr>
-      <a:lvl2pPr lvl="1" marR="0" rtl="0" algn="l">
+      <a:lvl2pPr marR="0" lvl="1" algn="l" rtl="0">
         <a:lnSpc>
           <a:spcPct val="100000"/>
         </a:lnSpc>
@@ -5958,7 +6142,7 @@
           <a:srgbClr val="000000"/>
         </a:buClr>
         <a:buFont typeface="Arial"/>
-        <a:defRPr b="0" i="0" sz="1400" u="none" cap="none" strike="noStrike">
+        <a:defRPr sz="1400" b="0" i="0" u="none" strike="noStrike" cap="none">
           <a:solidFill>
             <a:srgbClr val="000000"/>
           </a:solidFill>
@@ -5968,7 +6152,7 @@
           <a:sym typeface="Arial"/>
         </a:defRPr>
       </a:lvl2pPr>
-      <a:lvl3pPr lvl="2" marR="0" rtl="0" algn="l">
+      <a:lvl3pPr marR="0" lvl="2" algn="l" rtl="0">
         <a:lnSpc>
           <a:spcPct val="100000"/>
         </a:lnSpc>
@@ -5982,7 +6166,7 @@
           <a:srgbClr val="000000"/>
         </a:buClr>
         <a:buFont typeface="Arial"/>
-        <a:defRPr b="0" i="0" sz="1400" u="none" cap="none" strike="noStrike">
+        <a:defRPr sz="1400" b="0" i="0" u="none" strike="noStrike" cap="none">
           <a:solidFill>
             <a:srgbClr val="000000"/>
           </a:solidFill>
@@ -5992,7 +6176,7 @@
           <a:sym typeface="Arial"/>
         </a:defRPr>
       </a:lvl3pPr>
-      <a:lvl4pPr lvl="3" marR="0" rtl="0" algn="l">
+      <a:lvl4pPr marR="0" lvl="3" algn="l" rtl="0">
         <a:lnSpc>
           <a:spcPct val="100000"/>
         </a:lnSpc>
@@ -6006,7 +6190,7 @@
           <a:srgbClr val="000000"/>
         </a:buClr>
         <a:buFont typeface="Arial"/>
-        <a:defRPr b="0" i="0" sz="1400" u="none" cap="none" strike="noStrike">
+        <a:defRPr sz="1400" b="0" i="0" u="none" strike="noStrike" cap="none">
           <a:solidFill>
             <a:srgbClr val="000000"/>
           </a:solidFill>
@@ -6016,7 +6200,7 @@
           <a:sym typeface="Arial"/>
         </a:defRPr>
       </a:lvl4pPr>
-      <a:lvl5pPr lvl="4" marR="0" rtl="0" algn="l">
+      <a:lvl5pPr marR="0" lvl="4" algn="l" rtl="0">
         <a:lnSpc>
           <a:spcPct val="100000"/>
         </a:lnSpc>
@@ -6030,7 +6214,7 @@
           <a:srgbClr val="000000"/>
         </a:buClr>
         <a:buFont typeface="Arial"/>
-        <a:defRPr b="0" i="0" sz="1400" u="none" cap="none" strike="noStrike">
+        <a:defRPr sz="1400" b="0" i="0" u="none" strike="noStrike" cap="none">
           <a:solidFill>
             <a:srgbClr val="000000"/>
           </a:solidFill>
@@ -6040,7 +6224,7 @@
           <a:sym typeface="Arial"/>
         </a:defRPr>
       </a:lvl5pPr>
-      <a:lvl6pPr lvl="5" marR="0" rtl="0" algn="l">
+      <a:lvl6pPr marR="0" lvl="5" algn="l" rtl="0">
         <a:lnSpc>
           <a:spcPct val="100000"/>
         </a:lnSpc>
@@ -6054,7 +6238,7 @@
           <a:srgbClr val="000000"/>
         </a:buClr>
         <a:buFont typeface="Arial"/>
-        <a:defRPr b="0" i="0" sz="1400" u="none" cap="none" strike="noStrike">
+        <a:defRPr sz="1400" b="0" i="0" u="none" strike="noStrike" cap="none">
           <a:solidFill>
             <a:srgbClr val="000000"/>
           </a:solidFill>
@@ -6064,7 +6248,7 @@
           <a:sym typeface="Arial"/>
         </a:defRPr>
       </a:lvl6pPr>
-      <a:lvl7pPr lvl="6" marR="0" rtl="0" algn="l">
+      <a:lvl7pPr marR="0" lvl="6" algn="l" rtl="0">
         <a:lnSpc>
           <a:spcPct val="100000"/>
         </a:lnSpc>
@@ -6078,7 +6262,7 @@
           <a:srgbClr val="000000"/>
         </a:buClr>
         <a:buFont typeface="Arial"/>
-        <a:defRPr b="0" i="0" sz="1400" u="none" cap="none" strike="noStrike">
+        <a:defRPr sz="1400" b="0" i="0" u="none" strike="noStrike" cap="none">
           <a:solidFill>
             <a:srgbClr val="000000"/>
           </a:solidFill>
@@ -6088,7 +6272,7 @@
           <a:sym typeface="Arial"/>
         </a:defRPr>
       </a:lvl7pPr>
-      <a:lvl8pPr lvl="7" marR="0" rtl="0" algn="l">
+      <a:lvl8pPr marR="0" lvl="7" algn="l" rtl="0">
         <a:lnSpc>
           <a:spcPct val="100000"/>
         </a:lnSpc>
@@ -6102,7 +6286,7 @@
           <a:srgbClr val="000000"/>
         </a:buClr>
         <a:buFont typeface="Arial"/>
-        <a:defRPr b="0" i="0" sz="1400" u="none" cap="none" strike="noStrike">
+        <a:defRPr sz="1400" b="0" i="0" u="none" strike="noStrike" cap="none">
           <a:solidFill>
             <a:srgbClr val="000000"/>
           </a:solidFill>
@@ -6112,7 +6296,7 @@
           <a:sym typeface="Arial"/>
         </a:defRPr>
       </a:lvl8pPr>
-      <a:lvl9pPr lvl="8" marR="0" rtl="0" algn="l">
+      <a:lvl9pPr marR="0" lvl="8" algn="l" rtl="0">
         <a:lnSpc>
           <a:spcPct val="100000"/>
         </a:lnSpc>
@@ -6126,7 +6310,7 @@
           <a:srgbClr val="000000"/>
         </a:buClr>
         <a:buFont typeface="Arial"/>
-        <a:defRPr b="0" i="0" sz="1400" u="none" cap="none" strike="noStrike">
+        <a:defRPr sz="1400" b="0" i="0" u="none" strike="noStrike" cap="none">
           <a:solidFill>
             <a:srgbClr val="000000"/>
           </a:solidFill>
@@ -6142,11 +6326,11 @@
 </file>
 
 <file path=ppt/slides/slide1.xml><?xml version="1.0" encoding="utf-8"?>
-<p:sld xmlns:a="http://schemas.openxmlformats.org/drawingml/2006/main" xmlns:r="http://schemas.openxmlformats.org/officeDocument/2006/relationships" xmlns:mc="http://schemas.openxmlformats.org/markup-compatibility/2006" xmlns:mv="urn:schemas-microsoft-com:mac:vml" xmlns:p="http://schemas.openxmlformats.org/presentationml/2006/main" xmlns:c="http://schemas.openxmlformats.org/drawingml/2006/chart" xmlns:dgm="http://schemas.openxmlformats.org/drawingml/2006/diagram" xmlns:o="urn:schemas-microsoft-com:office:office" xmlns:v="urn:schemas-microsoft-com:vml" xmlns:pvml="urn:schemas-microsoft-com:office:powerpoint" xmlns:com="http://schemas.openxmlformats.org/drawingml/2006/compatibility" xmlns:p14="http://schemas.microsoft.com/office/powerpoint/2010/main" xmlns:p15="http://schemas.microsoft.com/office/powerpoint/2012/main" xmlns:ahyp="http://schemas.microsoft.com/office/drawing/2018/hyperlinkcolor">
+<p:sld xmlns:a="http://schemas.openxmlformats.org/drawingml/2006/main" xmlns:r="http://schemas.openxmlformats.org/officeDocument/2006/relationships" xmlns:p="http://schemas.openxmlformats.org/presentationml/2006/main">
   <p:cSld>
     <p:spTree>
       <p:nvGrpSpPr>
-        <p:cNvPr id="53" name="Shape 53"/>
+        <p:cNvPr id="1" name="Shape 53"/>
         <p:cNvGrpSpPr/>
         <p:nvPr/>
       </p:nvGrpSpPr>
@@ -6206,12 +6390,12 @@
           </a:ln>
         </p:spPr>
         <p:txBody>
-          <a:bodyPr anchorCtr="0" anchor="t" bIns="91425" lIns="91425" spcFirstLastPara="1" rIns="91425" wrap="square" tIns="91425">
+          <a:bodyPr spcFirstLastPara="1" wrap="square" lIns="91425" tIns="91425" rIns="91425" bIns="91425" anchor="t" anchorCtr="0">
             <a:spAutoFit/>
           </a:bodyPr>
           <a:lstStyle/>
           <a:p>
-            <a:pPr indent="0" lvl="0" marL="0" rtl="0" algn="ctr">
+            <a:pPr marL="0" lvl="0" indent="0" algn="ctr" rtl="0">
               <a:lnSpc>
                 <a:spcPct val="115000"/>
               </a:lnSpc>
@@ -6246,7 +6430,7 @@
             </a:endParaRPr>
           </a:p>
           <a:p>
-            <a:pPr indent="0" lvl="0" marL="0" rtl="0" algn="ctr">
+            <a:pPr marL="0" lvl="0" indent="0" algn="ctr" rtl="0">
               <a:lnSpc>
                 <a:spcPct val="115000"/>
               </a:lnSpc>
@@ -6286,18 +6470,15 @@
             </a:endParaRPr>
           </a:p>
           <a:p>
-            <a:pPr indent="0" lvl="0" marL="0" rtl="0" algn="l">
-              <a:spcBef>
-                <a:spcPts val="0"/>
-              </a:spcBef>
-              <a:spcAft>
-                <a:spcPts val="0"/>
-              </a:spcAft>
-              <a:buNone/>
-            </a:pPr>
-            <a:r>
-              <a:t/>
-            </a:r>
+            <a:pPr marL="0" lvl="0" indent="0" algn="l" rtl="0">
+              <a:spcBef>
+                <a:spcPts val="0"/>
+              </a:spcBef>
+              <a:spcAft>
+                <a:spcPts val="0"/>
+              </a:spcAft>
+              <a:buNone/>
+            </a:pPr>
             <a:endParaRPr sz="1800">
               <a:solidFill>
                 <a:schemeClr val="dk2"/>
@@ -6315,11 +6496,11 @@
 </file>
 
 <file path=ppt/slides/slide2.xml><?xml version="1.0" encoding="utf-8"?>
-<p:sld xmlns:a="http://schemas.openxmlformats.org/drawingml/2006/main" xmlns:r="http://schemas.openxmlformats.org/officeDocument/2006/relationships" xmlns:mc="http://schemas.openxmlformats.org/markup-compatibility/2006" xmlns:mv="urn:schemas-microsoft-com:mac:vml" xmlns:p="http://schemas.openxmlformats.org/presentationml/2006/main" xmlns:c="http://schemas.openxmlformats.org/drawingml/2006/chart" xmlns:dgm="http://schemas.openxmlformats.org/drawingml/2006/diagram" xmlns:o="urn:schemas-microsoft-com:office:office" xmlns:v="urn:schemas-microsoft-com:vml" xmlns:pvml="urn:schemas-microsoft-com:office:powerpoint" xmlns:com="http://schemas.openxmlformats.org/drawingml/2006/compatibility" xmlns:p14="http://schemas.microsoft.com/office/powerpoint/2010/main" xmlns:p15="http://schemas.microsoft.com/office/powerpoint/2012/main" xmlns:ahyp="http://schemas.microsoft.com/office/drawing/2018/hyperlinkcolor">
+<p:sld xmlns:a="http://schemas.openxmlformats.org/drawingml/2006/main" xmlns:r="http://schemas.openxmlformats.org/officeDocument/2006/relationships" xmlns:p="http://schemas.openxmlformats.org/presentationml/2006/main">
   <p:cSld>
     <p:spTree>
       <p:nvGrpSpPr>
-        <p:cNvPr id="59" name="Shape 59"/>
+        <p:cNvPr id="1" name="Shape 59"/>
         <p:cNvGrpSpPr/>
         <p:nvPr/>
       </p:nvGrpSpPr>
@@ -6379,12 +6560,12 @@
           </a:ln>
         </p:spPr>
         <p:txBody>
-          <a:bodyPr anchorCtr="0" anchor="t" bIns="91425" lIns="91425" spcFirstLastPara="1" rIns="91425" wrap="square" tIns="91425">
+          <a:bodyPr spcFirstLastPara="1" wrap="square" lIns="91425" tIns="91425" rIns="91425" bIns="91425" anchor="t" anchorCtr="0">
             <a:spAutoFit/>
           </a:bodyPr>
           <a:lstStyle/>
           <a:p>
-            <a:pPr indent="0" lvl="0" marL="0" rtl="0" algn="l">
+            <a:pPr marL="0" lvl="0" indent="0" algn="l" rtl="0">
               <a:lnSpc>
                 <a:spcPct val="115000"/>
               </a:lnSpc>
@@ -6433,34 +6614,31 @@
           <a:solidFill>
             <a:srgbClr val="0B5394"/>
           </a:solidFill>
-          <a:ln cap="flat" cmpd="sng" w="9525">
+          <a:ln w="9525" cap="flat" cmpd="sng">
             <a:solidFill>
               <a:srgbClr val="0B5394"/>
             </a:solidFill>
             <a:prstDash val="solid"/>
             <a:round/>
-            <a:headEnd len="sm" w="sm" type="none"/>
-            <a:tailEnd len="sm" w="sm" type="none"/>
+            <a:headEnd type="none" w="sm" len="sm"/>
+            <a:tailEnd type="none" w="sm" len="sm"/>
           </a:ln>
         </p:spPr>
         <p:txBody>
-          <a:bodyPr anchorCtr="0" anchor="ctr" bIns="91425" lIns="91425" spcFirstLastPara="1" rIns="91425" wrap="square" tIns="91425">
+          <a:bodyPr spcFirstLastPara="1" wrap="square" lIns="91425" tIns="91425" rIns="91425" bIns="91425" anchor="ctr" anchorCtr="0">
             <a:noAutofit/>
           </a:bodyPr>
           <a:lstStyle/>
           <a:p>
-            <a:pPr indent="0" lvl="0" marL="0" rtl="0" algn="ctr">
-              <a:spcBef>
-                <a:spcPts val="0"/>
-              </a:spcBef>
-              <a:spcAft>
-                <a:spcPts val="0"/>
-              </a:spcAft>
-              <a:buNone/>
-            </a:pPr>
-            <a:r>
-              <a:t/>
-            </a:r>
+            <a:pPr marL="0" lvl="0" indent="0" algn="ctr" rtl="0">
+              <a:spcBef>
+                <a:spcPts val="0"/>
+              </a:spcBef>
+              <a:spcAft>
+                <a:spcPts val="0"/>
+              </a:spcAft>
+              <a:buNone/>
+            </a:pPr>
             <a:endParaRPr/>
           </a:p>
         </p:txBody>
@@ -6492,7 +6670,7 @@
             <a:noFill/>
           </a:ln>
           <a:effectLst>
-            <a:outerShdw blurRad="57150" rotWithShape="0" algn="bl" dir="5400000" dist="19050">
+            <a:outerShdw blurRad="57150" dist="19050" dir="5400000" algn="bl" rotWithShape="0">
               <a:srgbClr val="000000">
                 <a:alpha val="50000"/>
               </a:srgbClr>
@@ -6520,12 +6698,12 @@
           </a:ln>
         </p:spPr>
         <p:txBody>
-          <a:bodyPr anchorCtr="0" anchor="t" bIns="91425" lIns="91425" spcFirstLastPara="1" rIns="91425" wrap="square" tIns="91425">
+          <a:bodyPr spcFirstLastPara="1" wrap="square" lIns="91425" tIns="91425" rIns="91425" bIns="91425" anchor="t" anchorCtr="0">
             <a:spAutoFit/>
           </a:bodyPr>
           <a:lstStyle/>
           <a:p>
-            <a:pPr indent="0" lvl="0" marL="0" rtl="0" algn="l">
+            <a:pPr marL="0" lvl="0" indent="0" algn="l" rtl="0">
               <a:lnSpc>
                 <a:spcPct val="115000"/>
               </a:lnSpc>
@@ -6538,7 +6716,7 @@
               <a:buNone/>
             </a:pPr>
             <a:r>
-              <a:rPr b="1" lang="es" sz="1200">
+              <a:rPr lang="es" sz="1200" b="1">
                 <a:solidFill>
                   <a:srgbClr val="1C4587"/>
                 </a:solidFill>
@@ -6581,12 +6759,12 @@
           </a:ln>
         </p:spPr>
         <p:txBody>
-          <a:bodyPr anchorCtr="0" anchor="t" bIns="91425" lIns="91425" spcFirstLastPara="1" rIns="91425" wrap="square" tIns="91425">
+          <a:bodyPr spcFirstLastPara="1" wrap="square" lIns="91425" tIns="91425" rIns="91425" bIns="91425" anchor="t" anchorCtr="0">
             <a:spAutoFit/>
           </a:bodyPr>
           <a:lstStyle/>
           <a:p>
-            <a:pPr indent="-292100" lvl="0" marL="457200" rtl="0" algn="l">
+            <a:pPr marL="457200" lvl="0" indent="-292100" algn="l" rtl="0">
               <a:spcBef>
                 <a:spcPts val="0"/>
               </a:spcBef>
@@ -6613,7 +6791,7 @@
               <a:t>Basado en </a:t>
             </a:r>
             <a:r>
-              <a:rPr b="1" lang="es" sz="1000">
+              <a:rPr lang="es" sz="1000" b="1">
                 <a:solidFill>
                   <a:srgbClr val="1C4587"/>
                 </a:solidFill>
@@ -6624,7 +6802,7 @@
               </a:rPr>
               <a:t>Caracteres</a:t>
             </a:r>
-            <a:endParaRPr b="1" sz="1000">
+            <a:endParaRPr sz="1000" b="1">
               <a:solidFill>
                 <a:srgbClr val="1C4587"/>
               </a:solidFill>
@@ -6635,7 +6813,7 @@
             </a:endParaRPr>
           </a:p>
           <a:p>
-            <a:pPr indent="-292100" lvl="1" marL="914400" rtl="0" algn="l">
+            <a:pPr marL="914400" lvl="1" indent="-292100" algn="l" rtl="0">
               <a:spcBef>
                 <a:spcPts val="0"/>
               </a:spcBef>
@@ -6672,7 +6850,7 @@
             </a:endParaRPr>
           </a:p>
           <a:p>
-            <a:pPr indent="-292100" lvl="1" marL="914400" rtl="0" algn="l">
+            <a:pPr marL="914400" lvl="1" indent="-292100" algn="l" rtl="0">
               <a:spcBef>
                 <a:spcPts val="0"/>
               </a:spcBef>
@@ -6709,7 +6887,7 @@
             </a:endParaRPr>
           </a:p>
           <a:p>
-            <a:pPr indent="-292100" lvl="1" marL="914400" rtl="0" algn="l">
+            <a:pPr marL="914400" lvl="1" indent="-292100" algn="l" rtl="0">
               <a:spcBef>
                 <a:spcPts val="0"/>
               </a:spcBef>
@@ -6757,7 +6935,7 @@
             </a:endParaRPr>
           </a:p>
           <a:p>
-            <a:pPr indent="-292100" lvl="0" marL="457200" rtl="0" algn="l">
+            <a:pPr marL="457200" lvl="0" indent="-292100" algn="l" rtl="0">
               <a:spcBef>
                 <a:spcPts val="0"/>
               </a:spcBef>
@@ -6784,7 +6962,7 @@
               <a:t>Basado en </a:t>
             </a:r>
             <a:r>
-              <a:rPr b="1" lang="es" sz="1000">
+              <a:rPr lang="es" sz="1000" b="1">
                 <a:solidFill>
                   <a:srgbClr val="1C4587"/>
                 </a:solidFill>
@@ -6795,7 +6973,7 @@
               </a:rPr>
               <a:t>Palabras</a:t>
             </a:r>
-            <a:endParaRPr b="1" sz="1000">
+            <a:endParaRPr sz="1000" b="1">
               <a:solidFill>
                 <a:srgbClr val="1C4587"/>
               </a:solidFill>
@@ -6806,7 +6984,7 @@
             </a:endParaRPr>
           </a:p>
           <a:p>
-            <a:pPr indent="-292100" lvl="1" marL="914400" rtl="0" algn="l">
+            <a:pPr marL="914400" lvl="1" indent="-292100" algn="l" rtl="0">
               <a:spcBef>
                 <a:spcPts val="0"/>
               </a:spcBef>
@@ -6843,7 +7021,7 @@
             </a:endParaRPr>
           </a:p>
           <a:p>
-            <a:pPr indent="-292100" lvl="1" marL="914400" rtl="0" algn="l">
+            <a:pPr marL="914400" lvl="1" indent="-292100" algn="l" rtl="0">
               <a:spcBef>
                 <a:spcPts val="0"/>
               </a:spcBef>
@@ -6880,7 +7058,7 @@
             </a:endParaRPr>
           </a:p>
           <a:p>
-            <a:pPr indent="-292100" lvl="1" marL="914400" rtl="0" algn="l">
+            <a:pPr marL="914400" lvl="1" indent="-292100" algn="l" rtl="0">
               <a:spcBef>
                 <a:spcPts val="0"/>
               </a:spcBef>
@@ -6928,7 +7106,7 @@
             </a:endParaRPr>
           </a:p>
           <a:p>
-            <a:pPr indent="-292100" lvl="0" marL="457200" rtl="0" algn="l">
+            <a:pPr marL="457200" lvl="0" indent="-292100" algn="l" rtl="0">
               <a:spcBef>
                 <a:spcPts val="0"/>
               </a:spcBef>
@@ -6955,7 +7133,7 @@
               <a:t>Basado en </a:t>
             </a:r>
             <a:r>
-              <a:rPr b="1" lang="es" sz="1000">
+              <a:rPr lang="es" sz="1000" b="1">
                 <a:solidFill>
                   <a:srgbClr val="1C4587"/>
                 </a:solidFill>
@@ -6966,7 +7144,7 @@
               </a:rPr>
               <a:t>Sub-Palabras</a:t>
             </a:r>
-            <a:endParaRPr b="1" sz="1000">
+            <a:endParaRPr sz="1000" b="1">
               <a:solidFill>
                 <a:srgbClr val="1C4587"/>
               </a:solidFill>
@@ -6977,7 +7155,7 @@
             </a:endParaRPr>
           </a:p>
           <a:p>
-            <a:pPr indent="-292100" lvl="1" marL="914400" rtl="0" algn="l">
+            <a:pPr marL="914400" lvl="1" indent="-292100" algn="l" rtl="0">
               <a:spcBef>
                 <a:spcPts val="0"/>
               </a:spcBef>
@@ -7014,7 +7192,7 @@
             </a:endParaRPr>
           </a:p>
           <a:p>
-            <a:pPr indent="-292100" lvl="1" marL="914400" rtl="0" algn="l">
+            <a:pPr marL="914400" lvl="1" indent="-292100" algn="l" rtl="0">
               <a:spcBef>
                 <a:spcPts val="0"/>
               </a:spcBef>
@@ -7051,7 +7229,7 @@
             </a:endParaRPr>
           </a:p>
           <a:p>
-            <a:pPr indent="-292100" lvl="1" marL="914400" rtl="0" algn="l">
+            <a:pPr marL="914400" lvl="1" indent="-292100" algn="l" rtl="0">
               <a:spcBef>
                 <a:spcPts val="0"/>
               </a:spcBef>
@@ -7099,18 +7277,15 @@
             </a:endParaRPr>
           </a:p>
           <a:p>
-            <a:pPr indent="0" lvl="0" marL="0" rtl="0" algn="l">
-              <a:spcBef>
-                <a:spcPts val="0"/>
-              </a:spcBef>
-              <a:spcAft>
-                <a:spcPts val="0"/>
-              </a:spcAft>
-              <a:buNone/>
-            </a:pPr>
-            <a:r>
-              <a:t/>
-            </a:r>
+            <a:pPr marL="0" lvl="0" indent="0" algn="l" rtl="0">
+              <a:spcBef>
+                <a:spcPts val="0"/>
+              </a:spcBef>
+              <a:spcAft>
+                <a:spcPts val="0"/>
+              </a:spcAft>
+              <a:buNone/>
+            </a:pPr>
             <a:endParaRPr sz="1000">
               <a:solidFill>
                 <a:srgbClr val="1C4587"/>
@@ -7143,12 +7318,12 @@
           </a:ln>
         </p:spPr>
         <p:txBody>
-          <a:bodyPr anchorCtr="0" anchor="t" bIns="91425" lIns="91425" spcFirstLastPara="1" rIns="91425" wrap="square" tIns="91425">
+          <a:bodyPr spcFirstLastPara="1" wrap="square" lIns="91425" tIns="91425" rIns="91425" bIns="91425" anchor="t" anchorCtr="0">
             <a:spAutoFit/>
           </a:bodyPr>
           <a:lstStyle/>
           <a:p>
-            <a:pPr indent="0" lvl="0" marL="0" rtl="0" algn="l">
+            <a:pPr marL="0" lvl="0" indent="0" algn="l" rtl="0">
               <a:lnSpc>
                 <a:spcPct val="115000"/>
               </a:lnSpc>
@@ -7161,7 +7336,7 @@
               <a:buNone/>
             </a:pPr>
             <a:r>
-              <a:rPr b="1" lang="es" sz="1200">
+              <a:rPr lang="es" sz="1200" b="1">
                 <a:solidFill>
                   <a:srgbClr val="1C4587"/>
                 </a:solidFill>
@@ -7204,12 +7379,12 @@
           </a:ln>
         </p:spPr>
         <p:txBody>
-          <a:bodyPr anchorCtr="0" anchor="t" bIns="91425" lIns="91425" spcFirstLastPara="1" rIns="91425" wrap="square" tIns="91425">
+          <a:bodyPr spcFirstLastPara="1" wrap="square" lIns="91425" tIns="91425" rIns="91425" bIns="91425" anchor="t" anchorCtr="0">
             <a:spAutoFit/>
           </a:bodyPr>
           <a:lstStyle/>
           <a:p>
-            <a:pPr indent="0" lvl="0" marL="0" rtl="0" algn="l">
+            <a:pPr marL="0" lvl="0" indent="0" algn="l" rtl="0">
               <a:spcBef>
                 <a:spcPts val="0"/>
               </a:spcBef>
@@ -7257,34 +7432,31 @@
             <a:avLst/>
           </a:prstGeom>
           <a:noFill/>
-          <a:ln cap="flat" cmpd="sng" w="19050">
+          <a:ln w="19050" cap="flat" cmpd="sng">
             <a:solidFill>
               <a:srgbClr val="38761D"/>
             </a:solidFill>
             <a:prstDash val="lgDash"/>
             <a:round/>
-            <a:headEnd len="sm" w="sm" type="none"/>
-            <a:tailEnd len="sm" w="sm" type="none"/>
+            <a:headEnd type="none" w="sm" len="sm"/>
+            <a:tailEnd type="none" w="sm" len="sm"/>
           </a:ln>
         </p:spPr>
         <p:txBody>
-          <a:bodyPr anchorCtr="0" anchor="ctr" bIns="91425" lIns="91425" spcFirstLastPara="1" rIns="91425" wrap="square" tIns="91425">
+          <a:bodyPr spcFirstLastPara="1" wrap="square" lIns="91425" tIns="91425" rIns="91425" bIns="91425" anchor="ctr" anchorCtr="0">
             <a:noAutofit/>
           </a:bodyPr>
           <a:lstStyle/>
           <a:p>
-            <a:pPr indent="0" lvl="0" marL="0" rtl="0" algn="ctr">
-              <a:spcBef>
-                <a:spcPts val="0"/>
-              </a:spcBef>
-              <a:spcAft>
-                <a:spcPts val="0"/>
-              </a:spcAft>
-              <a:buNone/>
-            </a:pPr>
-            <a:r>
-              <a:t/>
-            </a:r>
+            <a:pPr marL="0" lvl="0" indent="0" algn="ctr" rtl="0">
+              <a:spcBef>
+                <a:spcPts val="0"/>
+              </a:spcBef>
+              <a:spcAft>
+                <a:spcPts val="0"/>
+              </a:spcAft>
+              <a:buNone/>
+            </a:pPr>
             <a:endParaRPr/>
           </a:p>
         </p:txBody>
@@ -7309,12 +7481,12 @@
           </a:ln>
         </p:spPr>
         <p:txBody>
-          <a:bodyPr anchorCtr="0" anchor="t" bIns="91425" lIns="91425" spcFirstLastPara="1" rIns="91425" wrap="square" tIns="91425">
+          <a:bodyPr spcFirstLastPara="1" wrap="square" lIns="91425" tIns="91425" rIns="91425" bIns="91425" anchor="t" anchorCtr="0">
             <a:spAutoFit/>
           </a:bodyPr>
           <a:lstStyle/>
           <a:p>
-            <a:pPr indent="0" lvl="0" marL="0" rtl="0" algn="l">
+            <a:pPr marL="0" lvl="0" indent="0" algn="l" rtl="0">
               <a:lnSpc>
                 <a:spcPct val="115000"/>
               </a:lnSpc>
@@ -7327,7 +7499,7 @@
               <a:buNone/>
             </a:pPr>
             <a:r>
-              <a:rPr b="1" lang="es" sz="900">
+              <a:rPr lang="es" sz="900" b="1">
                 <a:solidFill>
                   <a:srgbClr val="1C4587"/>
                 </a:solidFill>
@@ -7338,7 +7510,7 @@
               </a:rPr>
               <a:t>Tokenización sub-palabras: BPE (Byte Pair Encoding)</a:t>
             </a:r>
-            <a:endParaRPr b="1" sz="900">
+            <a:endParaRPr sz="900" b="1">
               <a:solidFill>
                 <a:srgbClr val="1C4587"/>
               </a:solidFill>
@@ -7349,7 +7521,7 @@
             </a:endParaRPr>
           </a:p>
           <a:p>
-            <a:pPr indent="0" lvl="0" marL="0" rtl="0" algn="l">
+            <a:pPr marL="0" lvl="0" indent="0" algn="l" rtl="0">
               <a:lnSpc>
                 <a:spcPct val="115000"/>
               </a:lnSpc>
@@ -7398,41 +7570,38 @@
           </a:xfrm>
           <a:prstGeom prst="rightArrow">
             <a:avLst>
-              <a:gd fmla="val 50000" name="adj1"/>
-              <a:gd fmla="val 50000" name="adj2"/>
+              <a:gd name="adj1" fmla="val 50000"/>
+              <a:gd name="adj2" fmla="val 50000"/>
             </a:avLst>
           </a:prstGeom>
           <a:solidFill>
             <a:srgbClr val="0B5394"/>
           </a:solidFill>
-          <a:ln cap="flat" cmpd="sng" w="9525">
+          <a:ln w="9525" cap="flat" cmpd="sng">
             <a:solidFill>
               <a:srgbClr val="0B5394"/>
             </a:solidFill>
             <a:prstDash val="solid"/>
             <a:round/>
-            <a:headEnd len="sm" w="sm" type="none"/>
-            <a:tailEnd len="sm" w="sm" type="none"/>
+            <a:headEnd type="none" w="sm" len="sm"/>
+            <a:tailEnd type="none" w="sm" len="sm"/>
           </a:ln>
         </p:spPr>
         <p:txBody>
-          <a:bodyPr anchorCtr="0" anchor="ctr" bIns="91425" lIns="91425" spcFirstLastPara="1" rIns="91425" wrap="square" tIns="91425">
+          <a:bodyPr spcFirstLastPara="1" wrap="square" lIns="91425" tIns="91425" rIns="91425" bIns="91425" anchor="ctr" anchorCtr="0">
             <a:noAutofit/>
           </a:bodyPr>
           <a:lstStyle/>
           <a:p>
-            <a:pPr indent="0" lvl="0" marL="0" rtl="0" algn="ctr">
-              <a:spcBef>
-                <a:spcPts val="0"/>
-              </a:spcBef>
-              <a:spcAft>
-                <a:spcPts val="0"/>
-              </a:spcAft>
-              <a:buNone/>
-            </a:pPr>
-            <a:r>
-              <a:t/>
-            </a:r>
+            <a:pPr marL="0" lvl="0" indent="0" algn="ctr" rtl="0">
+              <a:spcBef>
+                <a:spcPts val="0"/>
+              </a:spcBef>
+              <a:spcAft>
+                <a:spcPts val="0"/>
+              </a:spcAft>
+              <a:buNone/>
+            </a:pPr>
             <a:endParaRPr/>
           </a:p>
         </p:txBody>
@@ -7446,11 +7615,11 @@
 </file>
 
 <file path=ppt/slides/slide3.xml><?xml version="1.0" encoding="utf-8"?>
-<p:sld xmlns:a="http://schemas.openxmlformats.org/drawingml/2006/main" xmlns:r="http://schemas.openxmlformats.org/officeDocument/2006/relationships" xmlns:mc="http://schemas.openxmlformats.org/markup-compatibility/2006" xmlns:mv="urn:schemas-microsoft-com:mac:vml" xmlns:p="http://schemas.openxmlformats.org/presentationml/2006/main" xmlns:c="http://schemas.openxmlformats.org/drawingml/2006/chart" xmlns:dgm="http://schemas.openxmlformats.org/drawingml/2006/diagram" xmlns:o="urn:schemas-microsoft-com:office:office" xmlns:v="urn:schemas-microsoft-com:vml" xmlns:pvml="urn:schemas-microsoft-com:office:powerpoint" xmlns:com="http://schemas.openxmlformats.org/drawingml/2006/compatibility" xmlns:p14="http://schemas.microsoft.com/office/powerpoint/2010/main" xmlns:p15="http://schemas.microsoft.com/office/powerpoint/2012/main" xmlns:ahyp="http://schemas.microsoft.com/office/drawing/2018/hyperlinkcolor">
+<p:sld xmlns:a="http://schemas.openxmlformats.org/drawingml/2006/main" xmlns:r="http://schemas.openxmlformats.org/officeDocument/2006/relationships" xmlns:p="http://schemas.openxmlformats.org/presentationml/2006/main">
   <p:cSld>
     <p:spTree>
       <p:nvGrpSpPr>
-        <p:cNvPr id="74" name="Shape 74"/>
+        <p:cNvPr id="1" name="Shape 74"/>
         <p:cNvGrpSpPr/>
         <p:nvPr/>
       </p:nvGrpSpPr>
@@ -7510,12 +7679,12 @@
           </a:ln>
         </p:spPr>
         <p:txBody>
-          <a:bodyPr anchorCtr="0" anchor="t" bIns="91425" lIns="91425" spcFirstLastPara="1" rIns="91425" wrap="square" tIns="91425">
+          <a:bodyPr spcFirstLastPara="1" wrap="square" lIns="91425" tIns="91425" rIns="91425" bIns="91425" anchor="t" anchorCtr="0">
             <a:spAutoFit/>
           </a:bodyPr>
           <a:lstStyle/>
           <a:p>
-            <a:pPr indent="0" lvl="0" marL="0" rtl="0" algn="l">
+            <a:pPr marL="0" lvl="0" indent="0" algn="l" rtl="0">
               <a:lnSpc>
                 <a:spcPct val="115000"/>
               </a:lnSpc>
@@ -7564,34 +7733,31 @@
           <a:solidFill>
             <a:srgbClr val="0B5394"/>
           </a:solidFill>
-          <a:ln cap="flat" cmpd="sng" w="9525">
+          <a:ln w="9525" cap="flat" cmpd="sng">
             <a:solidFill>
               <a:srgbClr val="0B5394"/>
             </a:solidFill>
             <a:prstDash val="solid"/>
             <a:round/>
-            <a:headEnd len="sm" w="sm" type="none"/>
-            <a:tailEnd len="sm" w="sm" type="none"/>
+            <a:headEnd type="none" w="sm" len="sm"/>
+            <a:tailEnd type="none" w="sm" len="sm"/>
           </a:ln>
         </p:spPr>
         <p:txBody>
-          <a:bodyPr anchorCtr="0" anchor="ctr" bIns="91425" lIns="91425" spcFirstLastPara="1" rIns="91425" wrap="square" tIns="91425">
+          <a:bodyPr spcFirstLastPara="1" wrap="square" lIns="91425" tIns="91425" rIns="91425" bIns="91425" anchor="ctr" anchorCtr="0">
             <a:noAutofit/>
           </a:bodyPr>
           <a:lstStyle/>
           <a:p>
-            <a:pPr indent="0" lvl="0" marL="0" rtl="0" algn="ctr">
-              <a:spcBef>
-                <a:spcPts val="0"/>
-              </a:spcBef>
-              <a:spcAft>
-                <a:spcPts val="0"/>
-              </a:spcAft>
-              <a:buNone/>
-            </a:pPr>
-            <a:r>
-              <a:t/>
-            </a:r>
+            <a:pPr marL="0" lvl="0" indent="0" algn="ctr" rtl="0">
+              <a:spcBef>
+                <a:spcPts val="0"/>
+              </a:spcBef>
+              <a:spcAft>
+                <a:spcPts val="0"/>
+              </a:spcAft>
+              <a:buNone/>
+            </a:pPr>
             <a:endParaRPr/>
           </a:p>
         </p:txBody>
@@ -7616,12 +7782,12 @@
           </a:ln>
         </p:spPr>
         <p:txBody>
-          <a:bodyPr anchorCtr="0" anchor="t" bIns="91425" lIns="91425" spcFirstLastPara="1" rIns="91425" wrap="square" tIns="91425">
+          <a:bodyPr spcFirstLastPara="1" wrap="square" lIns="91425" tIns="91425" rIns="91425" bIns="91425" anchor="t" anchorCtr="0">
             <a:spAutoFit/>
           </a:bodyPr>
           <a:lstStyle/>
           <a:p>
-            <a:pPr indent="-292100" lvl="0" marL="457200" rtl="0" algn="l">
+            <a:pPr marL="457200" lvl="0" indent="-292100" algn="l" rtl="0">
               <a:lnSpc>
                 <a:spcPct val="115000"/>
               </a:lnSpc>
@@ -7639,7 +7805,7 @@
               <a:buChar char="+"/>
             </a:pPr>
             <a:r>
-              <a:rPr b="1" lang="es" sz="1000">
+              <a:rPr lang="es" sz="1000" b="1">
                 <a:solidFill>
                   <a:srgbClr val="1C4587"/>
                 </a:solidFill>
@@ -7708,7 +7874,7 @@
               </a:rPr>
             </a:br>
             <a:r>
-              <a:rPr b="1" lang="es" sz="1000">
+              <a:rPr lang="es" sz="1000" b="1">
                 <a:solidFill>
                   <a:srgbClr val="1C4587"/>
                 </a:solidFill>
@@ -7752,7 +7918,7 @@
             </a:endParaRPr>
           </a:p>
           <a:p>
-            <a:pPr indent="-292100" lvl="0" marL="457200" rtl="0" algn="l">
+            <a:pPr marL="457200" lvl="0" indent="-292100" algn="l" rtl="0">
               <a:lnSpc>
                 <a:spcPct val="115000"/>
               </a:lnSpc>
@@ -7770,7 +7936,7 @@
               <a:buChar char="+"/>
             </a:pPr>
             <a:r>
-              <a:rPr b="1" lang="es" sz="1000">
+              <a:rPr lang="es" sz="1000" b="1">
                 <a:solidFill>
                   <a:srgbClr val="1C4587"/>
                 </a:solidFill>
@@ -7839,7 +8005,7 @@
               </a:rPr>
             </a:br>
             <a:r>
-              <a:rPr b="1" lang="es" sz="1000">
+              <a:rPr lang="es" sz="1000" b="1">
                 <a:solidFill>
                   <a:srgbClr val="1C4587"/>
                 </a:solidFill>
@@ -7894,12 +8060,12 @@
           </a:ln>
         </p:spPr>
         <p:txBody>
-          <a:bodyPr anchorCtr="0" anchor="t" bIns="91425" lIns="91425" spcFirstLastPara="1" rIns="91425" wrap="square" tIns="91425">
+          <a:bodyPr spcFirstLastPara="1" wrap="square" lIns="91425" tIns="91425" rIns="91425" bIns="91425" anchor="t" anchorCtr="0">
             <a:spAutoFit/>
           </a:bodyPr>
           <a:lstStyle/>
           <a:p>
-            <a:pPr indent="0" lvl="0" marL="0" rtl="0" algn="l">
+            <a:pPr marL="0" lvl="0" indent="0" algn="l" rtl="0">
               <a:lnSpc>
                 <a:spcPct val="115000"/>
               </a:lnSpc>
@@ -7950,39 +8116,36 @@
           </a:xfrm>
           <a:prstGeom prst="rightBrace">
             <a:avLst>
-              <a:gd fmla="val 50000" name="adj1"/>
-              <a:gd fmla="val 50000" name="adj2"/>
+              <a:gd name="adj1" fmla="val 50000"/>
+              <a:gd name="adj2" fmla="val 50000"/>
             </a:avLst>
           </a:prstGeom>
           <a:noFill/>
-          <a:ln cap="flat" cmpd="sng" w="28575">
+          <a:ln w="28575" cap="flat" cmpd="sng">
             <a:solidFill>
               <a:schemeClr val="dk2"/>
             </a:solidFill>
             <a:prstDash val="solid"/>
             <a:round/>
-            <a:headEnd len="sm" w="sm" type="none"/>
-            <a:tailEnd len="sm" w="sm" type="none"/>
+            <a:headEnd type="none" w="sm" len="sm"/>
+            <a:tailEnd type="none" w="sm" len="sm"/>
           </a:ln>
         </p:spPr>
         <p:txBody>
-          <a:bodyPr anchorCtr="0" anchor="ctr" bIns="91425" lIns="91425" spcFirstLastPara="1" rIns="91425" wrap="square" tIns="91425">
+          <a:bodyPr spcFirstLastPara="1" wrap="square" lIns="91425" tIns="91425" rIns="91425" bIns="91425" anchor="ctr" anchorCtr="0">
             <a:noAutofit/>
           </a:bodyPr>
           <a:lstStyle/>
           <a:p>
-            <a:pPr indent="0" lvl="0" marL="0" rtl="0" algn="ctr">
-              <a:spcBef>
-                <a:spcPts val="0"/>
-              </a:spcBef>
-              <a:spcAft>
-                <a:spcPts val="0"/>
-              </a:spcAft>
-              <a:buNone/>
-            </a:pPr>
-            <a:r>
-              <a:t/>
-            </a:r>
+            <a:pPr marL="0" lvl="0" indent="0" algn="ctr" rtl="0">
+              <a:spcBef>
+                <a:spcPts val="0"/>
+              </a:spcBef>
+              <a:spcAft>
+                <a:spcPts val="0"/>
+              </a:spcAft>
+              <a:buNone/>
+            </a:pPr>
             <a:endParaRPr/>
           </a:p>
         </p:txBody>
@@ -8007,12 +8170,12 @@
           </a:ln>
         </p:spPr>
         <p:txBody>
-          <a:bodyPr anchorCtr="0" anchor="t" bIns="91425" lIns="91425" spcFirstLastPara="1" rIns="91425" wrap="square" tIns="91425">
+          <a:bodyPr spcFirstLastPara="1" wrap="square" lIns="91425" tIns="91425" rIns="91425" bIns="91425" anchor="t" anchorCtr="0">
             <a:spAutoFit/>
           </a:bodyPr>
           <a:lstStyle/>
           <a:p>
-            <a:pPr indent="0" lvl="0" marL="0" rtl="0" algn="ctr">
+            <a:pPr marL="0" lvl="0" indent="0" algn="ctr" rtl="0">
               <a:lnSpc>
                 <a:spcPct val="115000"/>
               </a:lnSpc>
@@ -8037,7 +8200,7 @@
               <a:t>Se enfoca en </a:t>
             </a:r>
             <a:r>
-              <a:rPr b="1" lang="es" sz="1200">
+              <a:rPr lang="es" sz="1200" b="1">
                 <a:solidFill>
                   <a:srgbClr val="1C4587"/>
                 </a:solidFill>
@@ -8080,12 +8243,12 @@
           </a:ln>
         </p:spPr>
         <p:txBody>
-          <a:bodyPr anchorCtr="0" anchor="t" bIns="91425" lIns="91425" spcFirstLastPara="1" rIns="91425" wrap="square" tIns="91425">
+          <a:bodyPr spcFirstLastPara="1" wrap="square" lIns="91425" tIns="91425" rIns="91425" bIns="91425" anchor="t" anchorCtr="0">
             <a:spAutoFit/>
           </a:bodyPr>
           <a:lstStyle/>
           <a:p>
-            <a:pPr indent="0" lvl="0" marL="0" rtl="0" algn="l">
+            <a:pPr marL="0" lvl="0" indent="0" algn="l" rtl="0">
               <a:lnSpc>
                 <a:spcPct val="115000"/>
               </a:lnSpc>
@@ -8120,7 +8283,7 @@
           <p:nvPr/>
         </p:nvCxnSpPr>
         <p:spPr>
-          <a:xfrm flipH="1" rot="10800000">
+          <a:xfrm rot="10800000" flipH="1">
             <a:off x="1533450" y="2062450"/>
             <a:ext cx="3086100" cy="12300"/>
           </a:xfrm>
@@ -8128,14 +8291,14 @@
             <a:avLst/>
           </a:prstGeom>
           <a:noFill/>
-          <a:ln cap="flat" cmpd="sng" w="9525">
+          <a:ln w="9525" cap="flat" cmpd="sng">
             <a:solidFill>
               <a:schemeClr val="dk2"/>
             </a:solidFill>
             <a:prstDash val="solid"/>
             <a:round/>
-            <a:headEnd len="med" w="med" type="none"/>
-            <a:tailEnd len="med" w="med" type="none"/>
+            <a:headEnd type="none" w="med" len="med"/>
+            <a:tailEnd type="none" w="med" len="med"/>
           </a:ln>
         </p:spPr>
       </p:cxnSp>
@@ -8159,12 +8322,12 @@
           </a:ln>
         </p:spPr>
         <p:txBody>
-          <a:bodyPr anchorCtr="0" anchor="t" bIns="91425" lIns="91425" spcFirstLastPara="1" rIns="91425" wrap="square" tIns="91425">
+          <a:bodyPr spcFirstLastPara="1" wrap="square" lIns="91425" tIns="91425" rIns="91425" bIns="91425" anchor="t" anchorCtr="0">
             <a:spAutoFit/>
           </a:bodyPr>
           <a:lstStyle/>
           <a:p>
-            <a:pPr indent="0" lvl="0" marL="0" rtl="0" algn="l">
+            <a:pPr marL="0" lvl="0" indent="0" algn="l" rtl="0">
               <a:lnSpc>
                 <a:spcPct val="115000"/>
               </a:lnSpc>
@@ -8212,12 +8375,12 @@
           </a:ln>
         </p:spPr>
         <p:txBody>
-          <a:bodyPr anchorCtr="0" anchor="t" bIns="91425" lIns="91425" spcFirstLastPara="1" rIns="91425" wrap="square" tIns="91425">
+          <a:bodyPr spcFirstLastPara="1" wrap="square" lIns="91425" tIns="91425" rIns="91425" bIns="91425" anchor="t" anchorCtr="0">
             <a:spAutoFit/>
           </a:bodyPr>
           <a:lstStyle/>
           <a:p>
-            <a:pPr indent="0" lvl="0" marL="0" rtl="0" algn="l">
+            <a:pPr marL="0" lvl="0" indent="0" algn="l" rtl="0">
               <a:lnSpc>
                 <a:spcPct val="115000"/>
               </a:lnSpc>
@@ -8252,7 +8415,7 @@
           <p:nvPr/>
         </p:nvCxnSpPr>
         <p:spPr>
-          <a:xfrm flipH="1" rot="10800000">
+          <a:xfrm rot="10800000" flipH="1">
             <a:off x="1838250" y="3281050"/>
             <a:ext cx="2634300" cy="12900"/>
           </a:xfrm>
@@ -8260,14 +8423,14 @@
             <a:avLst/>
           </a:prstGeom>
           <a:noFill/>
-          <a:ln cap="flat" cmpd="sng" w="9525">
+          <a:ln w="9525" cap="flat" cmpd="sng">
             <a:solidFill>
               <a:schemeClr val="dk2"/>
             </a:solidFill>
             <a:prstDash val="solid"/>
             <a:round/>
-            <a:headEnd len="med" w="med" type="none"/>
-            <a:tailEnd len="med" w="med" type="none"/>
+            <a:headEnd type="none" w="med" len="med"/>
+            <a:tailEnd type="none" w="med" len="med"/>
           </a:ln>
         </p:spPr>
       </p:cxnSp>
@@ -8291,12 +8454,12 @@
           </a:ln>
         </p:spPr>
         <p:txBody>
-          <a:bodyPr anchorCtr="0" anchor="t" bIns="91425" lIns="91425" spcFirstLastPara="1" rIns="91425" wrap="square" tIns="91425">
+          <a:bodyPr spcFirstLastPara="1" wrap="square" lIns="91425" tIns="91425" rIns="91425" bIns="91425" anchor="t" anchorCtr="0">
             <a:spAutoFit/>
           </a:bodyPr>
           <a:lstStyle/>
           <a:p>
-            <a:pPr indent="0" lvl="0" marL="0" rtl="0" algn="l">
+            <a:pPr marL="0" lvl="0" indent="0" algn="l" rtl="0">
               <a:lnSpc>
                 <a:spcPct val="115000"/>
               </a:lnSpc>
@@ -8344,12 +8507,12 @@
           </a:ln>
         </p:spPr>
         <p:txBody>
-          <a:bodyPr anchorCtr="0" anchor="t" bIns="91425" lIns="91425" spcFirstLastPara="1" rIns="91425" wrap="square" tIns="91425">
+          <a:bodyPr spcFirstLastPara="1" wrap="square" lIns="91425" tIns="91425" rIns="91425" bIns="91425" anchor="t" anchorCtr="0">
             <a:spAutoFit/>
           </a:bodyPr>
           <a:lstStyle/>
           <a:p>
-            <a:pPr indent="0" lvl="0" marL="0" rtl="0" algn="l">
+            <a:pPr marL="0" lvl="0" indent="0" algn="l" rtl="0">
               <a:lnSpc>
                 <a:spcPct val="115000"/>
               </a:lnSpc>
@@ -8397,12 +8560,12 @@
           </a:ln>
         </p:spPr>
         <p:txBody>
-          <a:bodyPr anchorCtr="0" anchor="t" bIns="91425" lIns="91425" spcFirstLastPara="1" rIns="91425" wrap="square" tIns="91425">
+          <a:bodyPr spcFirstLastPara="1" wrap="square" lIns="91425" tIns="91425" rIns="91425" bIns="91425" anchor="t" anchorCtr="0">
             <a:spAutoFit/>
           </a:bodyPr>
           <a:lstStyle/>
           <a:p>
-            <a:pPr indent="0" lvl="0" marL="0" rtl="0" algn="l">
+            <a:pPr marL="0" lvl="0" indent="0" algn="l" rtl="0">
               <a:lnSpc>
                 <a:spcPct val="115000"/>
               </a:lnSpc>
@@ -8450,12 +8613,12 @@
           </a:ln>
         </p:spPr>
         <p:txBody>
-          <a:bodyPr anchorCtr="0" anchor="t" bIns="91425" lIns="91425" spcFirstLastPara="1" rIns="91425" wrap="square" tIns="91425">
+          <a:bodyPr spcFirstLastPara="1" wrap="square" lIns="91425" tIns="91425" rIns="91425" bIns="91425" anchor="t" anchorCtr="0">
             <a:spAutoFit/>
           </a:bodyPr>
           <a:lstStyle/>
           <a:p>
-            <a:pPr indent="0" lvl="0" marL="0" rtl="0" algn="l">
+            <a:pPr marL="0" lvl="0" indent="0" algn="l" rtl="0">
               <a:lnSpc>
                 <a:spcPct val="115000"/>
               </a:lnSpc>
@@ -8468,7 +8631,7 @@
               <a:buNone/>
             </a:pPr>
             <a:r>
-              <a:rPr b="1" lang="es" sz="1000">
+              <a:rPr lang="es" sz="1000" b="1">
                 <a:solidFill>
                   <a:srgbClr val="1C4587"/>
                 </a:solidFill>
@@ -8496,41 +8659,38 @@
           </a:xfrm>
           <a:prstGeom prst="rightArrow">
             <a:avLst>
-              <a:gd fmla="val 50000" name="adj1"/>
-              <a:gd fmla="val 50000" name="adj2"/>
+              <a:gd name="adj1" fmla="val 50000"/>
+              <a:gd name="adj2" fmla="val 50000"/>
             </a:avLst>
           </a:prstGeom>
           <a:solidFill>
             <a:srgbClr val="0B5394"/>
           </a:solidFill>
-          <a:ln cap="flat" cmpd="sng" w="9525">
+          <a:ln w="9525" cap="flat" cmpd="sng">
             <a:solidFill>
               <a:srgbClr val="0B5394"/>
             </a:solidFill>
             <a:prstDash val="solid"/>
             <a:round/>
-            <a:headEnd len="sm" w="sm" type="none"/>
-            <a:tailEnd len="sm" w="sm" type="none"/>
+            <a:headEnd type="none" w="sm" len="sm"/>
+            <a:tailEnd type="none" w="sm" len="sm"/>
           </a:ln>
         </p:spPr>
         <p:txBody>
-          <a:bodyPr anchorCtr="0" anchor="ctr" bIns="91425" lIns="91425" spcFirstLastPara="1" rIns="91425" wrap="square" tIns="91425">
+          <a:bodyPr spcFirstLastPara="1" wrap="square" lIns="91425" tIns="91425" rIns="91425" bIns="91425" anchor="ctr" anchorCtr="0">
             <a:noAutofit/>
           </a:bodyPr>
           <a:lstStyle/>
           <a:p>
-            <a:pPr indent="0" lvl="0" marL="0" rtl="0" algn="ctr">
-              <a:spcBef>
-                <a:spcPts val="0"/>
-              </a:spcBef>
-              <a:spcAft>
-                <a:spcPts val="0"/>
-              </a:spcAft>
-              <a:buNone/>
-            </a:pPr>
-            <a:r>
-              <a:t/>
-            </a:r>
+            <a:pPr marL="0" lvl="0" indent="0" algn="ctr" rtl="0">
+              <a:spcBef>
+                <a:spcPts val="0"/>
+              </a:spcBef>
+              <a:spcAft>
+                <a:spcPts val="0"/>
+              </a:spcAft>
+              <a:buNone/>
+            </a:pPr>
             <a:endParaRPr/>
           </a:p>
         </p:txBody>
@@ -8555,12 +8715,12 @@
           </a:ln>
         </p:spPr>
         <p:txBody>
-          <a:bodyPr anchorCtr="0" anchor="t" bIns="91425" lIns="91425" spcFirstLastPara="1" rIns="91425" wrap="square" tIns="91425">
+          <a:bodyPr spcFirstLastPara="1" wrap="square" lIns="91425" tIns="91425" rIns="91425" bIns="91425" anchor="t" anchorCtr="0">
             <a:spAutoFit/>
           </a:bodyPr>
           <a:lstStyle/>
           <a:p>
-            <a:pPr indent="0" lvl="0" marL="0" rtl="0" algn="ctr">
+            <a:pPr marL="0" lvl="0" indent="0" algn="ctr" rtl="0">
               <a:lnSpc>
                 <a:spcPct val="115000"/>
               </a:lnSpc>
@@ -8605,41 +8765,38 @@
           </a:xfrm>
           <a:prstGeom prst="rightArrow">
             <a:avLst>
-              <a:gd fmla="val 50000" name="adj1"/>
-              <a:gd fmla="val 50000" name="adj2"/>
+              <a:gd name="adj1" fmla="val 50000"/>
+              <a:gd name="adj2" fmla="val 50000"/>
             </a:avLst>
           </a:prstGeom>
           <a:solidFill>
             <a:srgbClr val="0B5394"/>
           </a:solidFill>
-          <a:ln cap="flat" cmpd="sng" w="9525">
+          <a:ln w="9525" cap="flat" cmpd="sng">
             <a:solidFill>
               <a:srgbClr val="0B5394"/>
             </a:solidFill>
             <a:prstDash val="solid"/>
             <a:round/>
-            <a:headEnd len="sm" w="sm" type="none"/>
-            <a:tailEnd len="sm" w="sm" type="none"/>
+            <a:headEnd type="none" w="sm" len="sm"/>
+            <a:tailEnd type="none" w="sm" len="sm"/>
           </a:ln>
         </p:spPr>
         <p:txBody>
-          <a:bodyPr anchorCtr="0" anchor="ctr" bIns="91425" lIns="91425" spcFirstLastPara="1" rIns="91425" wrap="square" tIns="91425">
+          <a:bodyPr spcFirstLastPara="1" wrap="square" lIns="91425" tIns="91425" rIns="91425" bIns="91425" anchor="ctr" anchorCtr="0">
             <a:noAutofit/>
           </a:bodyPr>
           <a:lstStyle/>
           <a:p>
-            <a:pPr indent="0" lvl="0" marL="0" rtl="0" algn="ctr">
-              <a:spcBef>
-                <a:spcPts val="0"/>
-              </a:spcBef>
-              <a:spcAft>
-                <a:spcPts val="0"/>
-              </a:spcAft>
-              <a:buNone/>
-            </a:pPr>
-            <a:r>
-              <a:t/>
-            </a:r>
+            <a:pPr marL="0" lvl="0" indent="0" algn="ctr" rtl="0">
+              <a:spcBef>
+                <a:spcPts val="0"/>
+              </a:spcBef>
+              <a:spcAft>
+                <a:spcPts val="0"/>
+              </a:spcAft>
+              <a:buNone/>
+            </a:pPr>
             <a:endParaRPr/>
           </a:p>
         </p:txBody>
@@ -8664,12 +8821,12 @@
           </a:ln>
         </p:spPr>
         <p:txBody>
-          <a:bodyPr anchorCtr="0" anchor="t" bIns="91425" lIns="91425" spcFirstLastPara="1" rIns="91425" wrap="square" tIns="91425">
+          <a:bodyPr spcFirstLastPara="1" wrap="square" lIns="91425" tIns="91425" rIns="91425" bIns="91425" anchor="t" anchorCtr="0">
             <a:spAutoFit/>
           </a:bodyPr>
           <a:lstStyle/>
           <a:p>
-            <a:pPr indent="0" lvl="0" marL="0" rtl="0" algn="ctr">
+            <a:pPr marL="0" lvl="0" indent="0" algn="ctr" rtl="0">
               <a:lnSpc>
                 <a:spcPct val="115000"/>
               </a:lnSpc>
@@ -8714,41 +8871,38 @@
           </a:xfrm>
           <a:prstGeom prst="rightArrow">
             <a:avLst>
-              <a:gd fmla="val 50000" name="adj1"/>
-              <a:gd fmla="val 50000" name="adj2"/>
+              <a:gd name="adj1" fmla="val 50000"/>
+              <a:gd name="adj2" fmla="val 50000"/>
             </a:avLst>
           </a:prstGeom>
           <a:solidFill>
             <a:srgbClr val="0B5394"/>
           </a:solidFill>
-          <a:ln cap="flat" cmpd="sng" w="9525">
+          <a:ln w="9525" cap="flat" cmpd="sng">
             <a:solidFill>
               <a:srgbClr val="0B5394"/>
             </a:solidFill>
             <a:prstDash val="solid"/>
             <a:round/>
-            <a:headEnd len="sm" w="sm" type="none"/>
-            <a:tailEnd len="sm" w="sm" type="none"/>
+            <a:headEnd type="none" w="sm" len="sm"/>
+            <a:tailEnd type="none" w="sm" len="sm"/>
           </a:ln>
         </p:spPr>
         <p:txBody>
-          <a:bodyPr anchorCtr="0" anchor="ctr" bIns="91425" lIns="91425" spcFirstLastPara="1" rIns="91425" wrap="square" tIns="91425">
+          <a:bodyPr spcFirstLastPara="1" wrap="square" lIns="91425" tIns="91425" rIns="91425" bIns="91425" anchor="ctr" anchorCtr="0">
             <a:noAutofit/>
           </a:bodyPr>
           <a:lstStyle/>
           <a:p>
-            <a:pPr indent="0" lvl="0" marL="0" rtl="0" algn="ctr">
-              <a:spcBef>
-                <a:spcPts val="0"/>
-              </a:spcBef>
-              <a:spcAft>
-                <a:spcPts val="0"/>
-              </a:spcAft>
-              <a:buNone/>
-            </a:pPr>
-            <a:r>
-              <a:t/>
-            </a:r>
+            <a:pPr marL="0" lvl="0" indent="0" algn="ctr" rtl="0">
+              <a:spcBef>
+                <a:spcPts val="0"/>
+              </a:spcBef>
+              <a:spcAft>
+                <a:spcPts val="0"/>
+              </a:spcAft>
+              <a:buNone/>
+            </a:pPr>
             <a:endParaRPr/>
           </a:p>
         </p:txBody>
@@ -8773,12 +8927,12 @@
           </a:ln>
         </p:spPr>
         <p:txBody>
-          <a:bodyPr anchorCtr="0" anchor="t" bIns="91425" lIns="91425" spcFirstLastPara="1" rIns="91425" wrap="square" tIns="91425">
+          <a:bodyPr spcFirstLastPara="1" wrap="square" lIns="91425" tIns="91425" rIns="91425" bIns="91425" anchor="t" anchorCtr="0">
             <a:spAutoFit/>
           </a:bodyPr>
           <a:lstStyle/>
           <a:p>
-            <a:pPr indent="0" lvl="0" marL="0" rtl="0" algn="ctr">
+            <a:pPr marL="0" lvl="0" indent="0" algn="ctr" rtl="0">
               <a:lnSpc>
                 <a:spcPct val="115000"/>
               </a:lnSpc>
@@ -8800,31 +8954,7 @@
                 <a:cs typeface="Sora"/>
                 <a:sym typeface="Sora"/>
               </a:rPr>
-              <a:t>Clasificar documentos </a:t>
-            </a:r>
-            <a:r>
-              <a:rPr lang="es" sz="1000">
-                <a:solidFill>
-                  <a:srgbClr val="1C4587"/>
-                </a:solidFill>
-                <a:latin typeface="Sora"/>
-                <a:ea typeface="Sora"/>
-                <a:cs typeface="Sora"/>
-                <a:sym typeface="Sora"/>
-              </a:rPr>
-              <a:t>comparando</a:t>
-            </a:r>
-            <a:r>
-              <a:rPr lang="es" sz="1000">
-                <a:solidFill>
-                  <a:srgbClr val="1C4587"/>
-                </a:solidFill>
-                <a:latin typeface="Sora"/>
-                <a:ea typeface="Sora"/>
-                <a:cs typeface="Sora"/>
-                <a:sym typeface="Sora"/>
-              </a:rPr>
-              <a:t> los vectores con los vectores promedio de cada categoría</a:t>
+              <a:t>Clasificar documentos comparando los vectores con los vectores promedio de cada categoría</a:t>
             </a:r>
             <a:endParaRPr sz="1000">
               <a:solidFill>
@@ -8843,11 +8973,11 @@
 </file>
 
 <file path=ppt/slides/slide4.xml><?xml version="1.0" encoding="utf-8"?>
-<p:sld xmlns:a="http://schemas.openxmlformats.org/drawingml/2006/main" xmlns:r="http://schemas.openxmlformats.org/officeDocument/2006/relationships" xmlns:mc="http://schemas.openxmlformats.org/markup-compatibility/2006" xmlns:mv="urn:schemas-microsoft-com:mac:vml" xmlns:p="http://schemas.openxmlformats.org/presentationml/2006/main" xmlns:c="http://schemas.openxmlformats.org/drawingml/2006/chart" xmlns:dgm="http://schemas.openxmlformats.org/drawingml/2006/diagram" xmlns:o="urn:schemas-microsoft-com:office:office" xmlns:v="urn:schemas-microsoft-com:vml" xmlns:pvml="urn:schemas-microsoft-com:office:powerpoint" xmlns:com="http://schemas.openxmlformats.org/drawingml/2006/compatibility" xmlns:p14="http://schemas.microsoft.com/office/powerpoint/2010/main" xmlns:p15="http://schemas.microsoft.com/office/powerpoint/2012/main" xmlns:ahyp="http://schemas.microsoft.com/office/drawing/2018/hyperlinkcolor">
+<p:sld xmlns:a="http://schemas.openxmlformats.org/drawingml/2006/main" xmlns:r="http://schemas.openxmlformats.org/officeDocument/2006/relationships" xmlns:p="http://schemas.openxmlformats.org/presentationml/2006/main">
   <p:cSld>
     <p:spTree>
       <p:nvGrpSpPr>
-        <p:cNvPr id="100" name="Shape 100"/>
+        <p:cNvPr id="1" name="Shape 100"/>
         <p:cNvGrpSpPr/>
         <p:nvPr/>
       </p:nvGrpSpPr>
@@ -8907,12 +9037,12 @@
           </a:ln>
         </p:spPr>
         <p:txBody>
-          <a:bodyPr anchorCtr="0" anchor="t" bIns="91425" lIns="91425" spcFirstLastPara="1" rIns="91425" wrap="square" tIns="91425">
+          <a:bodyPr spcFirstLastPara="1" wrap="square" lIns="91425" tIns="91425" rIns="91425" bIns="91425" anchor="t" anchorCtr="0">
             <a:spAutoFit/>
           </a:bodyPr>
           <a:lstStyle/>
           <a:p>
-            <a:pPr indent="0" lvl="0" marL="0" rtl="0" algn="l">
+            <a:pPr marL="0" lvl="0" indent="0" algn="l" rtl="0">
               <a:lnSpc>
                 <a:spcPct val="115000"/>
               </a:lnSpc>
@@ -8961,34 +9091,31 @@
           <a:solidFill>
             <a:srgbClr val="0B5394"/>
           </a:solidFill>
-          <a:ln cap="flat" cmpd="sng" w="9525">
+          <a:ln w="9525" cap="flat" cmpd="sng">
             <a:solidFill>
               <a:srgbClr val="0B5394"/>
             </a:solidFill>
             <a:prstDash val="solid"/>
             <a:round/>
-            <a:headEnd len="sm" w="sm" type="none"/>
-            <a:tailEnd len="sm" w="sm" type="none"/>
+            <a:headEnd type="none" w="sm" len="sm"/>
+            <a:tailEnd type="none" w="sm" len="sm"/>
           </a:ln>
         </p:spPr>
         <p:txBody>
-          <a:bodyPr anchorCtr="0" anchor="ctr" bIns="91425" lIns="91425" spcFirstLastPara="1" rIns="91425" wrap="square" tIns="91425">
+          <a:bodyPr spcFirstLastPara="1" wrap="square" lIns="91425" tIns="91425" rIns="91425" bIns="91425" anchor="ctr" anchorCtr="0">
             <a:noAutofit/>
           </a:bodyPr>
           <a:lstStyle/>
           <a:p>
-            <a:pPr indent="0" lvl="0" marL="0" rtl="0" algn="ctr">
-              <a:spcBef>
-                <a:spcPts val="0"/>
-              </a:spcBef>
-              <a:spcAft>
-                <a:spcPts val="0"/>
-              </a:spcAft>
-              <a:buNone/>
-            </a:pPr>
-            <a:r>
-              <a:t/>
-            </a:r>
+            <a:pPr marL="0" lvl="0" indent="0" algn="ctr" rtl="0">
+              <a:spcBef>
+                <a:spcPts val="0"/>
+              </a:spcBef>
+              <a:spcAft>
+                <a:spcPts val="0"/>
+              </a:spcAft>
+              <a:buNone/>
+            </a:pPr>
             <a:endParaRPr/>
           </a:p>
         </p:txBody>
@@ -9013,12 +9140,12 @@
           </a:ln>
         </p:spPr>
         <p:txBody>
-          <a:bodyPr anchorCtr="0" anchor="t" bIns="91425" lIns="91425" spcFirstLastPara="1" rIns="91425" wrap="square" tIns="91425">
+          <a:bodyPr spcFirstLastPara="1" wrap="square" lIns="91425" tIns="91425" rIns="91425" bIns="91425" anchor="t" anchorCtr="0">
             <a:spAutoFit/>
           </a:bodyPr>
           <a:lstStyle/>
           <a:p>
-            <a:pPr indent="0" lvl="0" marL="0" rtl="0" algn="l">
+            <a:pPr marL="0" lvl="0" indent="0" algn="l" rtl="0">
               <a:lnSpc>
                 <a:spcPct val="115000"/>
               </a:lnSpc>
@@ -9076,12 +9203,12 @@
           </a:ln>
         </p:spPr>
         <p:txBody>
-          <a:bodyPr anchorCtr="0" anchor="t" bIns="91425" lIns="91425" spcFirstLastPara="1" rIns="91425" wrap="square" tIns="91425">
+          <a:bodyPr spcFirstLastPara="1" wrap="square" lIns="91425" tIns="91425" rIns="91425" bIns="91425" anchor="t" anchorCtr="0">
             <a:spAutoFit/>
           </a:bodyPr>
           <a:lstStyle/>
           <a:p>
-            <a:pPr indent="-304800" lvl="0" marL="457200" rtl="0" algn="l">
+            <a:pPr marL="457200" lvl="0" indent="-304800" algn="l" rtl="0">
               <a:lnSpc>
                 <a:spcPct val="115000"/>
               </a:lnSpc>
@@ -9099,7 +9226,7 @@
               <a:buAutoNum type="arabicPeriod"/>
             </a:pPr>
             <a:r>
-              <a:rPr b="1" lang="es" sz="1200">
+              <a:rPr lang="es" sz="1200" b="1">
                 <a:solidFill>
                   <a:srgbClr val="1C4587"/>
                 </a:solidFill>
@@ -9111,7 +9238,7 @@
               <a:t>Tokenización</a:t>
             </a:r>
             <a:br>
-              <a:rPr b="1" lang="es" sz="1200">
+              <a:rPr lang="es" sz="1200" b="1">
                 <a:solidFill>
                   <a:srgbClr val="1C4587"/>
                 </a:solidFill>
@@ -9121,7 +9248,7 @@
                 <a:sym typeface="Sora"/>
               </a:rPr>
             </a:br>
-            <a:endParaRPr b="1" sz="1200">
+            <a:endParaRPr sz="1200" b="1">
               <a:solidFill>
                 <a:srgbClr val="1C4587"/>
               </a:solidFill>
@@ -9132,7 +9259,7 @@
             </a:endParaRPr>
           </a:p>
           <a:p>
-            <a:pPr indent="-304800" lvl="0" marL="457200" rtl="0" algn="l">
+            <a:pPr marL="457200" lvl="0" indent="-304800" algn="l" rtl="0">
               <a:lnSpc>
                 <a:spcPct val="115000"/>
               </a:lnSpc>
@@ -9150,7 +9277,7 @@
               <a:buAutoNum type="arabicPeriod"/>
             </a:pPr>
             <a:r>
-              <a:rPr b="1" lang="es" sz="1200">
+              <a:rPr lang="es" sz="1200" b="1">
                 <a:solidFill>
                   <a:srgbClr val="1C4587"/>
                 </a:solidFill>
@@ -9162,7 +9289,7 @@
               <a:t>Eliminar Stopwords</a:t>
             </a:r>
             <a:br>
-              <a:rPr b="1" lang="es" sz="1200">
+              <a:rPr lang="es" sz="1200" b="1">
                 <a:solidFill>
                   <a:srgbClr val="1C4587"/>
                 </a:solidFill>
@@ -9185,7 +9312,7 @@
               <a:t>Eliminar palabras comunes (ej: “el”, “la”, “y”, “que”) </a:t>
             </a:r>
             <a:br>
-              <a:rPr b="1" lang="es" sz="1200">
+              <a:rPr lang="es" sz="1200" b="1">
                 <a:solidFill>
                   <a:srgbClr val="1C4587"/>
                 </a:solidFill>
@@ -9195,7 +9322,7 @@
                 <a:sym typeface="Sora"/>
               </a:rPr>
             </a:br>
-            <a:endParaRPr b="1" sz="1200">
+            <a:endParaRPr sz="1200" b="1">
               <a:solidFill>
                 <a:srgbClr val="1C4587"/>
               </a:solidFill>
@@ -9206,7 +9333,7 @@
             </a:endParaRPr>
           </a:p>
           <a:p>
-            <a:pPr indent="-304800" lvl="0" marL="457200" rtl="0" algn="l">
+            <a:pPr marL="457200" lvl="0" indent="-304800" algn="l" rtl="0">
               <a:lnSpc>
                 <a:spcPct val="115000"/>
               </a:lnSpc>
@@ -9224,7 +9351,7 @@
               <a:buAutoNum type="arabicPeriod"/>
             </a:pPr>
             <a:r>
-              <a:rPr b="1" lang="es" sz="1200">
+              <a:rPr lang="es" sz="1200" b="1">
                 <a:solidFill>
                   <a:srgbClr val="1C4587"/>
                 </a:solidFill>
@@ -9236,7 +9363,7 @@
               <a:t>Lematización</a:t>
             </a:r>
             <a:br>
-              <a:rPr b="1" lang="es" sz="1200">
+              <a:rPr lang="es" sz="1200" b="1">
                 <a:solidFill>
                   <a:srgbClr val="1C4587"/>
                 </a:solidFill>
@@ -9282,7 +9409,7 @@
               <a:t>(ej: mejor —&gt; bueno, corriendo —&gt; correr)</a:t>
             </a:r>
             <a:br>
-              <a:rPr b="1" lang="es" sz="1200">
+              <a:rPr lang="es" sz="1200" b="1">
                 <a:solidFill>
                   <a:srgbClr val="1C4587"/>
                 </a:solidFill>
@@ -9292,7 +9419,7 @@
                 <a:sym typeface="Sora"/>
               </a:rPr>
             </a:br>
-            <a:endParaRPr b="1" sz="1200">
+            <a:endParaRPr sz="1200" b="1">
               <a:solidFill>
                 <a:srgbClr val="1C4587"/>
               </a:solidFill>
@@ -9303,7 +9430,7 @@
             </a:endParaRPr>
           </a:p>
           <a:p>
-            <a:pPr indent="-304800" lvl="0" marL="457200" rtl="0" algn="l">
+            <a:pPr marL="457200" lvl="0" indent="-304800" algn="l" rtl="0">
               <a:lnSpc>
                 <a:spcPct val="115000"/>
               </a:lnSpc>
@@ -9321,7 +9448,7 @@
               <a:buAutoNum type="arabicPeriod"/>
             </a:pPr>
             <a:r>
-              <a:rPr b="1" lang="es" sz="1200">
+              <a:rPr lang="es" sz="1200" b="1">
                 <a:solidFill>
                   <a:srgbClr val="1C4587"/>
                 </a:solidFill>
@@ -9330,22 +9457,10 @@
                 <a:cs typeface="Sora"/>
                 <a:sym typeface="Sora"/>
               </a:rPr>
-              <a:t>Cálculo</a:t>
-            </a:r>
-            <a:r>
-              <a:rPr b="1" lang="es" sz="1200">
-                <a:solidFill>
-                  <a:srgbClr val="1C4587"/>
-                </a:solidFill>
-                <a:latin typeface="Sora"/>
-                <a:ea typeface="Sora"/>
-                <a:cs typeface="Sora"/>
-                <a:sym typeface="Sora"/>
-              </a:rPr>
-              <a:t> TF-IDF</a:t>
+              <a:t>Cálculo TF-IDF</a:t>
             </a:r>
             <a:br>
-              <a:rPr b="1" lang="es" sz="1200">
+              <a:rPr lang="es" sz="1200" b="1">
                 <a:solidFill>
                   <a:srgbClr val="1C4587"/>
                 </a:solidFill>
@@ -9368,7 +9483,7 @@
               <a:t>Se calcula el valor para cada palabra del documento para crear un vector. Luego se utiliza en forma de feature.</a:t>
             </a:r>
             <a:br>
-              <a:rPr b="1" lang="es" sz="1200">
+              <a:rPr lang="es" sz="1200" b="1">
                 <a:solidFill>
                   <a:srgbClr val="1C4587"/>
                 </a:solidFill>
@@ -9378,7 +9493,7 @@
                 <a:sym typeface="Sora"/>
               </a:rPr>
             </a:br>
-            <a:endParaRPr b="1" sz="1200">
+            <a:endParaRPr sz="1200" b="1">
               <a:solidFill>
                 <a:srgbClr val="1C4587"/>
               </a:solidFill>
@@ -9389,7 +9504,7 @@
             </a:endParaRPr>
           </a:p>
           <a:p>
-            <a:pPr indent="-304800" lvl="0" marL="457200" rtl="0" algn="l">
+            <a:pPr marL="457200" lvl="0" indent="-304800" algn="l" rtl="0">
               <a:lnSpc>
                 <a:spcPct val="115000"/>
               </a:lnSpc>
@@ -9407,7 +9522,7 @@
               <a:buAutoNum type="arabicPeriod"/>
             </a:pPr>
             <a:r>
-              <a:rPr b="1" lang="es" sz="1200">
+              <a:rPr lang="es" sz="1200" b="1">
                 <a:solidFill>
                   <a:srgbClr val="1C4587"/>
                 </a:solidFill>
@@ -9452,7 +9567,7 @@
             </a:endParaRPr>
           </a:p>
           <a:p>
-            <a:pPr indent="0" lvl="0" marL="0" rtl="0" algn="l">
+            <a:pPr marL="0" lvl="0" indent="0" algn="l" rtl="0">
               <a:lnSpc>
                 <a:spcPct val="115000"/>
               </a:lnSpc>
@@ -9464,10 +9579,7 @@
               </a:spcAft>
               <a:buNone/>
             </a:pPr>
-            <a:r>
-              <a:t/>
-            </a:r>
-            <a:endParaRPr b="1" sz="1200">
+            <a:endParaRPr sz="1200" b="1">
               <a:solidFill>
                 <a:srgbClr val="1C4587"/>
               </a:solidFill>
@@ -9496,34 +9608,31 @@
           <a:solidFill>
             <a:srgbClr val="EFEFEF"/>
           </a:solidFill>
-          <a:ln cap="flat" cmpd="sng" w="9525">
+          <a:ln w="9525" cap="flat" cmpd="sng">
             <a:solidFill>
               <a:srgbClr val="B7B7B7"/>
             </a:solidFill>
             <a:prstDash val="solid"/>
             <a:round/>
-            <a:headEnd len="sm" w="sm" type="none"/>
-            <a:tailEnd len="sm" w="sm" type="none"/>
+            <a:headEnd type="none" w="sm" len="sm"/>
+            <a:tailEnd type="none" w="sm" len="sm"/>
           </a:ln>
         </p:spPr>
         <p:txBody>
-          <a:bodyPr anchorCtr="0" anchor="ctr" bIns="91425" lIns="91425" spcFirstLastPara="1" rIns="91425" wrap="square" tIns="91425">
+          <a:bodyPr spcFirstLastPara="1" wrap="square" lIns="91425" tIns="91425" rIns="91425" bIns="91425" anchor="ctr" anchorCtr="0">
             <a:noAutofit/>
           </a:bodyPr>
           <a:lstStyle/>
           <a:p>
-            <a:pPr indent="0" lvl="0" marL="0" rtl="0" algn="ctr">
-              <a:spcBef>
-                <a:spcPts val="0"/>
-              </a:spcBef>
-              <a:spcAft>
-                <a:spcPts val="0"/>
-              </a:spcAft>
-              <a:buNone/>
-            </a:pPr>
-            <a:r>
-              <a:t/>
-            </a:r>
+            <a:pPr marL="0" lvl="0" indent="0" algn="ctr" rtl="0">
+              <a:spcBef>
+                <a:spcPts val="0"/>
+              </a:spcBef>
+              <a:spcAft>
+                <a:spcPts val="0"/>
+              </a:spcAft>
+              <a:buNone/>
+            </a:pPr>
             <a:endParaRPr/>
           </a:p>
         </p:txBody>
@@ -9548,12 +9657,12 @@
           </a:ln>
         </p:spPr>
         <p:txBody>
-          <a:bodyPr anchorCtr="0" anchor="t" bIns="91425" lIns="91425" spcFirstLastPara="1" rIns="91425" wrap="square" tIns="91425">
+          <a:bodyPr spcFirstLastPara="1" wrap="square" lIns="91425" tIns="91425" rIns="91425" bIns="91425" anchor="t" anchorCtr="0">
             <a:spAutoFit/>
           </a:bodyPr>
           <a:lstStyle/>
           <a:p>
-            <a:pPr indent="-285750" lvl="0" marL="269999" rtl="0" algn="l">
+            <a:pPr marL="269999" lvl="0" indent="-285750" algn="l" rtl="0">
               <a:lnSpc>
                 <a:spcPct val="115000"/>
               </a:lnSpc>
@@ -9604,7 +9713,7 @@
             </a:endParaRPr>
           </a:p>
           <a:p>
-            <a:pPr indent="-285750" lvl="0" marL="269999" rtl="0" algn="l">
+            <a:pPr marL="269999" lvl="0" indent="-285750" algn="l" rtl="0">
               <a:lnSpc>
                 <a:spcPct val="115000"/>
               </a:lnSpc>
@@ -9655,7 +9764,7 @@
             </a:endParaRPr>
           </a:p>
           <a:p>
-            <a:pPr indent="-285750" lvl="0" marL="269999" rtl="0" algn="l">
+            <a:pPr marL="269999" lvl="0" indent="-285750" algn="l" rtl="0">
               <a:lnSpc>
                 <a:spcPct val="115000"/>
               </a:lnSpc>
@@ -9695,7 +9804,7 @@
             </a:endParaRPr>
           </a:p>
           <a:p>
-            <a:pPr indent="0" lvl="0" marL="457200" rtl="0" algn="l">
+            <a:pPr marL="457200" lvl="0" indent="0" algn="l" rtl="0">
               <a:lnSpc>
                 <a:spcPct val="115000"/>
               </a:lnSpc>
@@ -9707,9 +9816,6 @@
               </a:spcAft>
               <a:buNone/>
             </a:pPr>
-            <a:r>
-              <a:t/>
-            </a:r>
             <a:endParaRPr sz="900">
               <a:solidFill>
                 <a:srgbClr val="666666"/>
@@ -9742,12 +9848,12 @@
           </a:ln>
         </p:spPr>
         <p:txBody>
-          <a:bodyPr anchorCtr="0" anchor="t" bIns="91425" lIns="91425" spcFirstLastPara="1" rIns="91425" wrap="square" tIns="91425">
+          <a:bodyPr spcFirstLastPara="1" wrap="square" lIns="91425" tIns="91425" rIns="91425" bIns="91425" anchor="t" anchorCtr="0">
             <a:spAutoFit/>
           </a:bodyPr>
           <a:lstStyle/>
           <a:p>
-            <a:pPr indent="0" lvl="0" marL="0" rtl="0" algn="l">
+            <a:pPr marL="0" lvl="0" indent="0" algn="l" rtl="0">
               <a:lnSpc>
                 <a:spcPct val="115000"/>
               </a:lnSpc>
@@ -9760,7 +9866,7 @@
               <a:buNone/>
             </a:pPr>
             <a:r>
-              <a:rPr b="1" lang="es" sz="1200">
+              <a:rPr lang="es" sz="1200" b="1">
                 <a:solidFill>
                   <a:srgbClr val="666666"/>
                 </a:solidFill>
@@ -9788,11 +9894,11 @@
 </file>
 
 <file path=ppt/slides/slide5.xml><?xml version="1.0" encoding="utf-8"?>
-<p:sld xmlns:a="http://schemas.openxmlformats.org/drawingml/2006/main" xmlns:r="http://schemas.openxmlformats.org/officeDocument/2006/relationships" xmlns:mc="http://schemas.openxmlformats.org/markup-compatibility/2006" xmlns:mv="urn:schemas-microsoft-com:mac:vml" xmlns:p="http://schemas.openxmlformats.org/presentationml/2006/main" xmlns:c="http://schemas.openxmlformats.org/drawingml/2006/chart" xmlns:dgm="http://schemas.openxmlformats.org/drawingml/2006/diagram" xmlns:o="urn:schemas-microsoft-com:office:office" xmlns:v="urn:schemas-microsoft-com:vml" xmlns:pvml="urn:schemas-microsoft-com:office:powerpoint" xmlns:com="http://schemas.openxmlformats.org/drawingml/2006/compatibility" xmlns:p14="http://schemas.microsoft.com/office/powerpoint/2010/main" xmlns:p15="http://schemas.microsoft.com/office/powerpoint/2012/main" xmlns:ahyp="http://schemas.microsoft.com/office/drawing/2018/hyperlinkcolor">
+<p:sld xmlns:a="http://schemas.openxmlformats.org/drawingml/2006/main" xmlns:r="http://schemas.openxmlformats.org/officeDocument/2006/relationships" xmlns:p="http://schemas.openxmlformats.org/presentationml/2006/main">
   <p:cSld>
     <p:spTree>
       <p:nvGrpSpPr>
-        <p:cNvPr id="112" name="Shape 112"/>
+        <p:cNvPr id="1" name="Shape 112"/>
         <p:cNvGrpSpPr/>
         <p:nvPr/>
       </p:nvGrpSpPr>
@@ -9852,12 +9958,12 @@
           </a:ln>
         </p:spPr>
         <p:txBody>
-          <a:bodyPr anchorCtr="0" anchor="t" bIns="91425" lIns="91425" spcFirstLastPara="1" rIns="91425" wrap="square" tIns="91425">
+          <a:bodyPr spcFirstLastPara="1" wrap="square" lIns="91425" tIns="91425" rIns="91425" bIns="91425" anchor="t" anchorCtr="0">
             <a:spAutoFit/>
           </a:bodyPr>
           <a:lstStyle/>
           <a:p>
-            <a:pPr indent="0" lvl="0" marL="0" rtl="0" algn="l">
+            <a:pPr marL="0" lvl="0" indent="0" algn="l" rtl="0">
               <a:lnSpc>
                 <a:spcPct val="115000"/>
               </a:lnSpc>
@@ -9879,19 +9985,7 @@
                 <a:cs typeface="Sora"/>
                 <a:sym typeface="Sora"/>
               </a:rPr>
-              <a:t>Redes Neuronales Recurrentes</a:t>
-            </a:r>
-            <a:r>
-              <a:rPr lang="es" sz="2400">
-                <a:solidFill>
-                  <a:srgbClr val="1C4587"/>
-                </a:solidFill>
-                <a:latin typeface="Sora"/>
-                <a:ea typeface="Sora"/>
-                <a:cs typeface="Sora"/>
-                <a:sym typeface="Sora"/>
-              </a:rPr>
-              <a:t>(+2010)</a:t>
+              <a:t>Redes Neuronales Recurrentes(+2010)</a:t>
             </a:r>
             <a:endParaRPr sz="1800">
               <a:solidFill>
@@ -9918,34 +10012,31 @@
           <a:solidFill>
             <a:srgbClr val="0B5394"/>
           </a:solidFill>
-          <a:ln cap="flat" cmpd="sng" w="9525">
+          <a:ln w="9525" cap="flat" cmpd="sng">
             <a:solidFill>
               <a:srgbClr val="0B5394"/>
             </a:solidFill>
             <a:prstDash val="solid"/>
             <a:round/>
-            <a:headEnd len="sm" w="sm" type="none"/>
-            <a:tailEnd len="sm" w="sm" type="none"/>
+            <a:headEnd type="none" w="sm" len="sm"/>
+            <a:tailEnd type="none" w="sm" len="sm"/>
           </a:ln>
         </p:spPr>
         <p:txBody>
-          <a:bodyPr anchorCtr="0" anchor="ctr" bIns="91425" lIns="91425" spcFirstLastPara="1" rIns="91425" wrap="square" tIns="91425">
+          <a:bodyPr spcFirstLastPara="1" wrap="square" lIns="91425" tIns="91425" rIns="91425" bIns="91425" anchor="ctr" anchorCtr="0">
             <a:noAutofit/>
           </a:bodyPr>
           <a:lstStyle/>
           <a:p>
-            <a:pPr indent="0" lvl="0" marL="0" rtl="0" algn="ctr">
-              <a:spcBef>
-                <a:spcPts val="0"/>
-              </a:spcBef>
-              <a:spcAft>
-                <a:spcPts val="0"/>
-              </a:spcAft>
-              <a:buNone/>
-            </a:pPr>
-            <a:r>
-              <a:t/>
-            </a:r>
+            <a:pPr marL="0" lvl="0" indent="0" algn="ctr" rtl="0">
+              <a:spcBef>
+                <a:spcPts val="0"/>
+              </a:spcBef>
+              <a:spcAft>
+                <a:spcPts val="0"/>
+              </a:spcAft>
+              <a:buNone/>
+            </a:pPr>
             <a:endParaRPr/>
           </a:p>
         </p:txBody>
@@ -9970,12 +10061,12 @@
           </a:ln>
         </p:spPr>
         <p:txBody>
-          <a:bodyPr anchorCtr="0" anchor="t" bIns="91425" lIns="91425" spcFirstLastPara="1" rIns="91425" wrap="square" tIns="91425">
+          <a:bodyPr spcFirstLastPara="1" wrap="square" lIns="91425" tIns="91425" rIns="91425" bIns="91425" anchor="t" anchorCtr="0">
             <a:spAutoFit/>
           </a:bodyPr>
           <a:lstStyle/>
           <a:p>
-            <a:pPr indent="0" lvl="0" marL="0" rtl="0" algn="l">
+            <a:pPr marL="0" lvl="0" indent="0" algn="l" rtl="0">
               <a:lnSpc>
                 <a:spcPct val="115000"/>
               </a:lnSpc>
@@ -10030,34 +10121,31 @@
           <a:solidFill>
             <a:srgbClr val="EFEFEF"/>
           </a:solidFill>
-          <a:ln cap="flat" cmpd="sng" w="9525">
+          <a:ln w="9525" cap="flat" cmpd="sng">
             <a:solidFill>
               <a:srgbClr val="B7B7B7"/>
             </a:solidFill>
             <a:prstDash val="solid"/>
             <a:round/>
-            <a:headEnd len="sm" w="sm" type="none"/>
-            <a:tailEnd len="sm" w="sm" type="none"/>
+            <a:headEnd type="none" w="sm" len="sm"/>
+            <a:tailEnd type="none" w="sm" len="sm"/>
           </a:ln>
         </p:spPr>
         <p:txBody>
-          <a:bodyPr anchorCtr="0" anchor="ctr" bIns="91425" lIns="91425" spcFirstLastPara="1" rIns="91425" wrap="square" tIns="91425">
+          <a:bodyPr spcFirstLastPara="1" wrap="square" lIns="91425" tIns="91425" rIns="91425" bIns="91425" anchor="ctr" anchorCtr="0">
             <a:noAutofit/>
           </a:bodyPr>
           <a:lstStyle/>
           <a:p>
-            <a:pPr indent="0" lvl="0" marL="0" rtl="0" algn="ctr">
-              <a:spcBef>
-                <a:spcPts val="0"/>
-              </a:spcBef>
-              <a:spcAft>
-                <a:spcPts val="0"/>
-              </a:spcAft>
-              <a:buNone/>
-            </a:pPr>
-            <a:r>
-              <a:t/>
-            </a:r>
+            <a:pPr marL="0" lvl="0" indent="0" algn="ctr" rtl="0">
+              <a:spcBef>
+                <a:spcPts val="0"/>
+              </a:spcBef>
+              <a:spcAft>
+                <a:spcPts val="0"/>
+              </a:spcAft>
+              <a:buNone/>
+            </a:pPr>
             <a:endParaRPr/>
           </a:p>
         </p:txBody>
@@ -10082,12 +10170,12 @@
           </a:ln>
         </p:spPr>
         <p:txBody>
-          <a:bodyPr anchorCtr="0" anchor="t" bIns="91425" lIns="91425" spcFirstLastPara="1" rIns="91425" wrap="square" tIns="91425">
+          <a:bodyPr spcFirstLastPara="1" wrap="square" lIns="91425" tIns="91425" rIns="91425" bIns="91425" anchor="t" anchorCtr="0">
             <a:spAutoFit/>
           </a:bodyPr>
           <a:lstStyle/>
           <a:p>
-            <a:pPr indent="-285750" lvl="0" marL="269999" rtl="0" algn="l">
+            <a:pPr marL="269999" lvl="0" indent="-285750" algn="l" rtl="0">
               <a:lnSpc>
                 <a:spcPct val="115000"/>
               </a:lnSpc>
@@ -10138,7 +10226,7 @@
             </a:endParaRPr>
           </a:p>
           <a:p>
-            <a:pPr indent="-285750" lvl="0" marL="269999" rtl="0" algn="l">
+            <a:pPr marL="269999" lvl="0" indent="-285750" algn="l" rtl="0">
               <a:lnSpc>
                 <a:spcPct val="115000"/>
               </a:lnSpc>
@@ -10189,7 +10277,7 @@
             </a:endParaRPr>
           </a:p>
           <a:p>
-            <a:pPr indent="-285750" lvl="0" marL="269999" rtl="0" algn="l">
+            <a:pPr marL="269999" lvl="0" indent="-285750" algn="l" rtl="0">
               <a:lnSpc>
                 <a:spcPct val="115000"/>
               </a:lnSpc>
@@ -10240,7 +10328,7 @@
             </a:endParaRPr>
           </a:p>
           <a:p>
-            <a:pPr indent="-285750" lvl="0" marL="269999" rtl="0" algn="l">
+            <a:pPr marL="269999" lvl="0" indent="-285750" algn="l" rtl="0">
               <a:lnSpc>
                 <a:spcPct val="115000"/>
               </a:lnSpc>
@@ -10280,7 +10368,7 @@
             </a:endParaRPr>
           </a:p>
           <a:p>
-            <a:pPr indent="0" lvl="0" marL="457200" rtl="0" algn="l">
+            <a:pPr marL="457200" lvl="0" indent="0" algn="l" rtl="0">
               <a:lnSpc>
                 <a:spcPct val="115000"/>
               </a:lnSpc>
@@ -10292,9 +10380,6 @@
               </a:spcAft>
               <a:buNone/>
             </a:pPr>
-            <a:r>
-              <a:t/>
-            </a:r>
             <a:endParaRPr sz="900">
               <a:solidFill>
                 <a:srgbClr val="666666"/>
@@ -10327,12 +10412,12 @@
           </a:ln>
         </p:spPr>
         <p:txBody>
-          <a:bodyPr anchorCtr="0" anchor="t" bIns="91425" lIns="91425" spcFirstLastPara="1" rIns="91425" wrap="square" tIns="91425">
+          <a:bodyPr spcFirstLastPara="1" wrap="square" lIns="91425" tIns="91425" rIns="91425" bIns="91425" anchor="t" anchorCtr="0">
             <a:spAutoFit/>
           </a:bodyPr>
           <a:lstStyle/>
           <a:p>
-            <a:pPr indent="0" lvl="0" marL="0" rtl="0" algn="l">
+            <a:pPr marL="0" lvl="0" indent="0" algn="l" rtl="0">
               <a:lnSpc>
                 <a:spcPct val="115000"/>
               </a:lnSpc>
@@ -10345,7 +10430,7 @@
               <a:buNone/>
             </a:pPr>
             <a:r>
-              <a:rPr b="1" lang="es" sz="1200">
+              <a:rPr lang="es" sz="1200" b="1">
                 <a:solidFill>
                   <a:srgbClr val="666666"/>
                 </a:solidFill>
@@ -10384,12 +10469,12 @@
           </a:ln>
         </p:spPr>
         <p:txBody>
-          <a:bodyPr anchorCtr="0" anchor="t" bIns="91425" lIns="91425" spcFirstLastPara="1" rIns="91425" wrap="square" tIns="91425">
+          <a:bodyPr spcFirstLastPara="1" wrap="square" lIns="91425" tIns="91425" rIns="91425" bIns="91425" anchor="t" anchorCtr="0">
             <a:spAutoFit/>
           </a:bodyPr>
           <a:lstStyle/>
           <a:p>
-            <a:pPr indent="0" lvl="0" marL="0" rtl="0" algn="l">
+            <a:pPr marL="0" lvl="0" indent="0" algn="l" rtl="0">
               <a:lnSpc>
                 <a:spcPct val="115000"/>
               </a:lnSpc>
@@ -10402,7 +10487,7 @@
               <a:buNone/>
             </a:pPr>
             <a:r>
-              <a:rPr b="1" lang="es" sz="1200">
+              <a:rPr lang="es" sz="1200" b="1">
                 <a:solidFill>
                   <a:srgbClr val="1C4587"/>
                 </a:solidFill>
@@ -10445,12 +10530,12 @@
           </a:ln>
         </p:spPr>
         <p:txBody>
-          <a:bodyPr anchorCtr="0" anchor="t" bIns="91425" lIns="91425" spcFirstLastPara="1" rIns="91425" wrap="square" tIns="91425">
+          <a:bodyPr spcFirstLastPara="1" wrap="square" lIns="91425" tIns="91425" rIns="91425" bIns="91425" anchor="t" anchorCtr="0">
             <a:spAutoFit/>
           </a:bodyPr>
           <a:lstStyle/>
           <a:p>
-            <a:pPr indent="0" lvl="0" marL="0" rtl="0" algn="l">
+            <a:pPr marL="0" lvl="0" indent="0" algn="l" rtl="0">
               <a:spcBef>
                 <a:spcPts val="0"/>
               </a:spcBef>
@@ -10472,7 +10557,7 @@
               <a:t>Las LSTM son un tipo especial de red neuronal recurrente (RNN) diseñada para procesar </a:t>
             </a:r>
             <a:r>
-              <a:rPr b="1" lang="es" sz="1000">
+              <a:rPr lang="es" sz="1000" b="1">
                 <a:solidFill>
                   <a:srgbClr val="1C4587"/>
                 </a:solidFill>
@@ -10496,7 +10581,7 @@
               <a:t>. Recuerdan </a:t>
             </a:r>
             <a:r>
-              <a:rPr b="1" lang="es" sz="1000">
+              <a:rPr lang="es" sz="1000" b="1">
                 <a:solidFill>
                   <a:srgbClr val="1C4587"/>
                 </a:solidFill>
@@ -10520,7 +10605,7 @@
               <a:t>, teniendo en cuenta </a:t>
             </a:r>
             <a:r>
-              <a:rPr b="1" lang="es" sz="1000">
+              <a:rPr lang="es" sz="1000" b="1">
                 <a:solidFill>
                   <a:srgbClr val="1C4587"/>
                 </a:solidFill>
@@ -10554,7 +10639,7 @@
             </a:endParaRPr>
           </a:p>
           <a:p>
-            <a:pPr indent="-292100" lvl="0" marL="457200" rtl="0" algn="l">
+            <a:pPr marL="457200" lvl="0" indent="-292100" algn="l" rtl="0">
               <a:spcBef>
                 <a:spcPts val="0"/>
               </a:spcBef>
@@ -10581,7 +10666,7 @@
               <a:t> Concepto de </a:t>
             </a:r>
             <a:r>
-              <a:rPr b="1" lang="es" sz="1000">
+              <a:rPr lang="es" sz="1000" b="1">
                 <a:solidFill>
                   <a:srgbClr val="1C4587"/>
                 </a:solidFill>
@@ -10643,7 +10728,7 @@
             <a:noFill/>
           </a:ln>
           <a:effectLst>
-            <a:outerShdw blurRad="57150" rotWithShape="0" algn="bl" dir="5400000" dist="19050">
+            <a:outerShdw blurRad="57150" dist="19050" dir="5400000" algn="bl" rotWithShape="0">
               <a:srgbClr val="000000">
                 <a:alpha val="50000"/>
               </a:srgbClr>
@@ -10671,12 +10756,12 @@
           </a:ln>
         </p:spPr>
         <p:txBody>
-          <a:bodyPr anchorCtr="0" anchor="t" bIns="91425" lIns="91425" spcFirstLastPara="1" rIns="91425" wrap="square" tIns="91425">
+          <a:bodyPr spcFirstLastPara="1" wrap="square" lIns="91425" tIns="91425" rIns="91425" bIns="91425" anchor="t" anchorCtr="0">
             <a:spAutoFit/>
           </a:bodyPr>
           <a:lstStyle/>
           <a:p>
-            <a:pPr indent="0" lvl="0" marL="0" rtl="0" algn="l">
+            <a:pPr marL="0" lvl="0" indent="0" algn="l" rtl="0">
               <a:lnSpc>
                 <a:spcPct val="115000"/>
               </a:lnSpc>
@@ -10714,11 +10799,11 @@
 </file>
 
 <file path=ppt/slides/slide6.xml><?xml version="1.0" encoding="utf-8"?>
-<p:sld xmlns:a="http://schemas.openxmlformats.org/drawingml/2006/main" xmlns:r="http://schemas.openxmlformats.org/officeDocument/2006/relationships" xmlns:mc="http://schemas.openxmlformats.org/markup-compatibility/2006" xmlns:mv="urn:schemas-microsoft-com:mac:vml" xmlns:p="http://schemas.openxmlformats.org/presentationml/2006/main" xmlns:c="http://schemas.openxmlformats.org/drawingml/2006/chart" xmlns:dgm="http://schemas.openxmlformats.org/drawingml/2006/diagram" xmlns:o="urn:schemas-microsoft-com:office:office" xmlns:v="urn:schemas-microsoft-com:vml" xmlns:pvml="urn:schemas-microsoft-com:office:powerpoint" xmlns:com="http://schemas.openxmlformats.org/drawingml/2006/compatibility" xmlns:p14="http://schemas.microsoft.com/office/powerpoint/2010/main" xmlns:p15="http://schemas.microsoft.com/office/powerpoint/2012/main" xmlns:ahyp="http://schemas.microsoft.com/office/drawing/2018/hyperlinkcolor">
+<p:sld xmlns:a="http://schemas.openxmlformats.org/drawingml/2006/main" xmlns:r="http://schemas.openxmlformats.org/officeDocument/2006/relationships" xmlns:p="http://schemas.openxmlformats.org/presentationml/2006/main">
   <p:cSld>
     <p:spTree>
       <p:nvGrpSpPr>
-        <p:cNvPr id="127" name="Shape 127"/>
+        <p:cNvPr id="1" name="Shape 127"/>
         <p:cNvGrpSpPr/>
         <p:nvPr/>
       </p:nvGrpSpPr>
@@ -10778,12 +10863,12 @@
           </a:ln>
         </p:spPr>
         <p:txBody>
-          <a:bodyPr anchorCtr="0" anchor="t" bIns="91425" lIns="91425" spcFirstLastPara="1" rIns="91425" wrap="square" tIns="91425">
+          <a:bodyPr spcFirstLastPara="1" wrap="square" lIns="91425" tIns="91425" rIns="91425" bIns="91425" anchor="t" anchorCtr="0">
             <a:spAutoFit/>
           </a:bodyPr>
           <a:lstStyle/>
           <a:p>
-            <a:pPr indent="0" lvl="0" marL="0" rtl="0" algn="l">
+            <a:pPr marL="0" lvl="0" indent="0" algn="l" rtl="0">
               <a:lnSpc>
                 <a:spcPct val="115000"/>
               </a:lnSpc>
@@ -10805,19 +10890,7 @@
                 <a:cs typeface="Sora"/>
                 <a:sym typeface="Sora"/>
               </a:rPr>
-              <a:t>Transformers </a:t>
-            </a:r>
-            <a:r>
-              <a:rPr lang="es" sz="2400">
-                <a:solidFill>
-                  <a:srgbClr val="1C4587"/>
-                </a:solidFill>
-                <a:latin typeface="Sora"/>
-                <a:ea typeface="Sora"/>
-                <a:cs typeface="Sora"/>
-                <a:sym typeface="Sora"/>
-              </a:rPr>
-              <a:t>(+2017)</a:t>
+              <a:t>Transformers (+2017)</a:t>
             </a:r>
             <a:endParaRPr sz="1800">
               <a:solidFill>
@@ -10844,34 +10917,31 @@
           <a:solidFill>
             <a:srgbClr val="0B5394"/>
           </a:solidFill>
-          <a:ln cap="flat" cmpd="sng" w="9525">
+          <a:ln w="9525" cap="flat" cmpd="sng">
             <a:solidFill>
               <a:srgbClr val="0B5394"/>
             </a:solidFill>
             <a:prstDash val="solid"/>
             <a:round/>
-            <a:headEnd len="sm" w="sm" type="none"/>
-            <a:tailEnd len="sm" w="sm" type="none"/>
+            <a:headEnd type="none" w="sm" len="sm"/>
+            <a:tailEnd type="none" w="sm" len="sm"/>
           </a:ln>
         </p:spPr>
         <p:txBody>
-          <a:bodyPr anchorCtr="0" anchor="ctr" bIns="91425" lIns="91425" spcFirstLastPara="1" rIns="91425" wrap="square" tIns="91425">
+          <a:bodyPr spcFirstLastPara="1" wrap="square" lIns="91425" tIns="91425" rIns="91425" bIns="91425" anchor="ctr" anchorCtr="0">
             <a:noAutofit/>
           </a:bodyPr>
           <a:lstStyle/>
           <a:p>
-            <a:pPr indent="0" lvl="0" marL="0" rtl="0" algn="ctr">
-              <a:spcBef>
-                <a:spcPts val="0"/>
-              </a:spcBef>
-              <a:spcAft>
-                <a:spcPts val="0"/>
-              </a:spcAft>
-              <a:buNone/>
-            </a:pPr>
-            <a:r>
-              <a:t/>
-            </a:r>
+            <a:pPr marL="0" lvl="0" indent="0" algn="ctr" rtl="0">
+              <a:spcBef>
+                <a:spcPts val="0"/>
+              </a:spcBef>
+              <a:spcAft>
+                <a:spcPts val="0"/>
+              </a:spcAft>
+              <a:buNone/>
+            </a:pPr>
             <a:endParaRPr/>
           </a:p>
         </p:txBody>
@@ -10896,12 +10966,12 @@
           </a:ln>
         </p:spPr>
         <p:txBody>
-          <a:bodyPr anchorCtr="0" anchor="t" bIns="91425" lIns="91425" spcFirstLastPara="1" rIns="91425" wrap="square" tIns="91425">
+          <a:bodyPr spcFirstLastPara="1" wrap="square" lIns="91425" tIns="91425" rIns="91425" bIns="91425" anchor="t" anchorCtr="0">
             <a:spAutoFit/>
           </a:bodyPr>
           <a:lstStyle/>
           <a:p>
-            <a:pPr indent="0" lvl="0" marL="0" rtl="0" algn="l">
+            <a:pPr marL="0" lvl="0" indent="0" algn="l" rtl="0">
               <a:lnSpc>
                 <a:spcPct val="115000"/>
               </a:lnSpc>
@@ -10956,34 +11026,31 @@
           <a:solidFill>
             <a:srgbClr val="EFEFEF"/>
           </a:solidFill>
-          <a:ln cap="flat" cmpd="sng" w="9525">
+          <a:ln w="9525" cap="flat" cmpd="sng">
             <a:solidFill>
               <a:srgbClr val="B7B7B7"/>
             </a:solidFill>
             <a:prstDash val="solid"/>
             <a:round/>
-            <a:headEnd len="sm" w="sm" type="none"/>
-            <a:tailEnd len="sm" w="sm" type="none"/>
+            <a:headEnd type="none" w="sm" len="sm"/>
+            <a:tailEnd type="none" w="sm" len="sm"/>
           </a:ln>
         </p:spPr>
         <p:txBody>
-          <a:bodyPr anchorCtr="0" anchor="ctr" bIns="91425" lIns="91425" spcFirstLastPara="1" rIns="91425" wrap="square" tIns="91425">
+          <a:bodyPr spcFirstLastPara="1" wrap="square" lIns="91425" tIns="91425" rIns="91425" bIns="91425" anchor="ctr" anchorCtr="0">
             <a:noAutofit/>
           </a:bodyPr>
           <a:lstStyle/>
           <a:p>
-            <a:pPr indent="0" lvl="0" marL="0" rtl="0" algn="ctr">
-              <a:spcBef>
-                <a:spcPts val="0"/>
-              </a:spcBef>
-              <a:spcAft>
-                <a:spcPts val="0"/>
-              </a:spcAft>
-              <a:buNone/>
-            </a:pPr>
-            <a:r>
-              <a:t/>
-            </a:r>
+            <a:pPr marL="0" lvl="0" indent="0" algn="ctr" rtl="0">
+              <a:spcBef>
+                <a:spcPts val="0"/>
+              </a:spcBef>
+              <a:spcAft>
+                <a:spcPts val="0"/>
+              </a:spcAft>
+              <a:buNone/>
+            </a:pPr>
             <a:endParaRPr/>
           </a:p>
         </p:txBody>
@@ -11008,12 +11075,12 @@
           </a:ln>
         </p:spPr>
         <p:txBody>
-          <a:bodyPr anchorCtr="0" anchor="t" bIns="91425" lIns="91425" spcFirstLastPara="1" rIns="91425" wrap="square" tIns="91425">
+          <a:bodyPr spcFirstLastPara="1" wrap="square" lIns="91425" tIns="91425" rIns="91425" bIns="91425" anchor="t" anchorCtr="0">
             <a:spAutoFit/>
           </a:bodyPr>
           <a:lstStyle/>
           <a:p>
-            <a:pPr indent="-285750" lvl="0" marL="269999" rtl="0" algn="l">
+            <a:pPr marL="269999" lvl="0" indent="-285750" algn="l" rtl="0">
               <a:lnSpc>
                 <a:spcPct val="115000"/>
               </a:lnSpc>
@@ -11087,7 +11154,7 @@
             </a:endParaRPr>
           </a:p>
           <a:p>
-            <a:pPr indent="-285750" lvl="0" marL="269999" rtl="0" algn="l">
+            <a:pPr marL="269999" lvl="0" indent="-285750" algn="l" rtl="0">
               <a:lnSpc>
                 <a:spcPct val="115000"/>
               </a:lnSpc>
@@ -11138,7 +11205,7 @@
             </a:endParaRPr>
           </a:p>
           <a:p>
-            <a:pPr indent="-285750" lvl="0" marL="269999" rtl="0" algn="l">
+            <a:pPr marL="269999" lvl="0" indent="-285750" algn="l" rtl="0">
               <a:lnSpc>
                 <a:spcPct val="115000"/>
               </a:lnSpc>
@@ -11233,12 +11300,12 @@
           </a:ln>
         </p:spPr>
         <p:txBody>
-          <a:bodyPr anchorCtr="0" anchor="t" bIns="91425" lIns="91425" spcFirstLastPara="1" rIns="91425" wrap="square" tIns="91425">
+          <a:bodyPr spcFirstLastPara="1" wrap="square" lIns="91425" tIns="91425" rIns="91425" bIns="91425" anchor="t" anchorCtr="0">
             <a:spAutoFit/>
           </a:bodyPr>
           <a:lstStyle/>
           <a:p>
-            <a:pPr indent="0" lvl="0" marL="0" rtl="0" algn="l">
+            <a:pPr marL="0" lvl="0" indent="0" algn="l" rtl="0">
               <a:lnSpc>
                 <a:spcPct val="115000"/>
               </a:lnSpc>
@@ -11251,7 +11318,7 @@
               <a:buNone/>
             </a:pPr>
             <a:r>
-              <a:rPr b="1" lang="es" sz="1200">
+              <a:rPr lang="es" sz="1200" b="1">
                 <a:solidFill>
                   <a:srgbClr val="666666"/>
                 </a:solidFill>
@@ -11290,12 +11357,12 @@
           </a:ln>
         </p:spPr>
         <p:txBody>
-          <a:bodyPr anchorCtr="0" anchor="t" bIns="91425" lIns="91425" spcFirstLastPara="1" rIns="91425" wrap="square" tIns="91425">
+          <a:bodyPr spcFirstLastPara="1" wrap="square" lIns="91425" tIns="91425" rIns="91425" bIns="91425" anchor="t" anchorCtr="0">
             <a:spAutoFit/>
           </a:bodyPr>
           <a:lstStyle/>
           <a:p>
-            <a:pPr indent="-304800" lvl="0" marL="457200" rtl="0" algn="l">
+            <a:pPr marL="457200" lvl="0" indent="-304800" algn="l" rtl="0">
               <a:lnSpc>
                 <a:spcPct val="115000"/>
               </a:lnSpc>
@@ -11313,7 +11380,7 @@
               <a:buAutoNum type="arabicPeriod"/>
             </a:pPr>
             <a:r>
-              <a:rPr b="1" lang="es" sz="1200">
+              <a:rPr lang="es" sz="1200" b="1">
                 <a:solidFill>
                   <a:srgbClr val="1C4587"/>
                 </a:solidFill>
@@ -11325,7 +11392,7 @@
               <a:t>Tokenización con BPE</a:t>
             </a:r>
             <a:br>
-              <a:rPr b="1" lang="es" sz="1200">
+              <a:rPr lang="es" sz="1200" b="1">
                 <a:solidFill>
                   <a:srgbClr val="1C4587"/>
                 </a:solidFill>
@@ -11335,7 +11402,7 @@
                 <a:sym typeface="Sora"/>
               </a:rPr>
             </a:br>
-            <a:endParaRPr b="1" sz="1200">
+            <a:endParaRPr sz="1200" b="1">
               <a:solidFill>
                 <a:srgbClr val="1C4587"/>
               </a:solidFill>
@@ -11346,7 +11413,7 @@
             </a:endParaRPr>
           </a:p>
           <a:p>
-            <a:pPr indent="-304800" lvl="0" marL="457200" rtl="0" algn="l">
+            <a:pPr marL="457200" lvl="0" indent="-304800" algn="l" rtl="0">
               <a:lnSpc>
                 <a:spcPct val="115000"/>
               </a:lnSpc>
@@ -11364,7 +11431,7 @@
               <a:buAutoNum type="arabicPeriod"/>
             </a:pPr>
             <a:r>
-              <a:rPr b="1" lang="es" sz="1200">
+              <a:rPr lang="es" sz="1200" b="1">
                 <a:solidFill>
                   <a:srgbClr val="1C4587"/>
                 </a:solidFill>
@@ -11376,7 +11443,7 @@
               <a:t>Creación de Embeddings (Encoder Only)</a:t>
             </a:r>
             <a:br>
-              <a:rPr b="1" lang="es" sz="1200">
+              <a:rPr lang="es" sz="1200" b="1">
                 <a:solidFill>
                   <a:srgbClr val="1C4587"/>
                 </a:solidFill>
@@ -11399,7 +11466,7 @@
               <a:t>Los embeddings de los transformers </a:t>
             </a:r>
             <a:r>
-              <a:rPr b="1" lang="es" sz="1000">
+              <a:rPr lang="es" sz="1000" b="1">
                 <a:solidFill>
                   <a:srgbClr val="1C4587"/>
                 </a:solidFill>
@@ -11423,7 +11490,7 @@
               <a:t>. Por ejemplo la palabra “banco”  tendrá distintos embeddings si se usa en “Voy al banco a sacar plata” que “Me senté en el banco de la plaza”</a:t>
             </a:r>
             <a:br>
-              <a:rPr b="1" lang="es" sz="1200">
+              <a:rPr lang="es" sz="1200" b="1">
                 <a:solidFill>
                   <a:srgbClr val="1C4587"/>
                 </a:solidFill>
@@ -11433,7 +11500,7 @@
                 <a:sym typeface="Sora"/>
               </a:rPr>
             </a:br>
-            <a:endParaRPr b="1" sz="1200">
+            <a:endParaRPr sz="1200" b="1">
               <a:solidFill>
                 <a:srgbClr val="1C4587"/>
               </a:solidFill>
@@ -11444,7 +11511,7 @@
             </a:endParaRPr>
           </a:p>
           <a:p>
-            <a:pPr indent="-304800" lvl="0" marL="457200" rtl="0" algn="l">
+            <a:pPr marL="457200" lvl="0" indent="-304800" algn="l" rtl="0">
               <a:lnSpc>
                 <a:spcPct val="115000"/>
               </a:lnSpc>
@@ -11462,7 +11529,7 @@
               <a:buAutoNum type="arabicPeriod"/>
             </a:pPr>
             <a:r>
-              <a:rPr b="1" lang="es" sz="1200">
+              <a:rPr lang="es" sz="1200" b="1">
                 <a:solidFill>
                   <a:srgbClr val="1C4587"/>
                 </a:solidFill>
@@ -11474,7 +11541,7 @@
               <a:t>Positional Encoding</a:t>
             </a:r>
             <a:br>
-              <a:rPr b="1" lang="es" sz="1200">
+              <a:rPr lang="es" sz="1200" b="1">
                 <a:solidFill>
                   <a:srgbClr val="1C4587"/>
                 </a:solidFill>
@@ -11497,7 +11564,7 @@
               <a:t>No tienen una estructura secuencial inherente, se requiere una manera de inyectar información sobre l</a:t>
             </a:r>
             <a:r>
-              <a:rPr b="1" lang="es" sz="1000">
+              <a:rPr lang="es" sz="1000" b="1">
                 <a:solidFill>
                   <a:srgbClr val="1C4587"/>
                 </a:solidFill>
@@ -11521,7 +11588,7 @@
               <a:t> en la secuencia.</a:t>
             </a:r>
             <a:br>
-              <a:rPr b="1" lang="es" sz="1200">
+              <a:rPr lang="es" sz="1200" b="1">
                 <a:solidFill>
                   <a:srgbClr val="1C4587"/>
                 </a:solidFill>
@@ -11531,7 +11598,7 @@
                 <a:sym typeface="Sora"/>
               </a:rPr>
             </a:br>
-            <a:endParaRPr b="1" sz="1200">
+            <a:endParaRPr sz="1200" b="1">
               <a:solidFill>
                 <a:srgbClr val="1C4587"/>
               </a:solidFill>
@@ -11542,7 +11609,7 @@
             </a:endParaRPr>
           </a:p>
           <a:p>
-            <a:pPr indent="-304800" lvl="0" marL="457200" rtl="0" algn="l">
+            <a:pPr marL="457200" lvl="0" indent="-304800" algn="l" rtl="0">
               <a:lnSpc>
                 <a:spcPct val="115000"/>
               </a:lnSpc>
@@ -11560,7 +11627,7 @@
               <a:buAutoNum type="arabicPeriod"/>
             </a:pPr>
             <a:r>
-              <a:rPr b="1" lang="es" sz="1200">
+              <a:rPr lang="es" sz="1200" b="1">
                 <a:solidFill>
                   <a:srgbClr val="1C4587"/>
                 </a:solidFill>
@@ -11572,7 +11639,7 @@
               <a:t>Mecanismo de atención</a:t>
             </a:r>
             <a:br>
-              <a:rPr b="1" lang="es" sz="1200">
+              <a:rPr lang="es" sz="1200" b="1">
                 <a:solidFill>
                   <a:srgbClr val="1C4587"/>
                 </a:solidFill>
@@ -11605,7 +11672,7 @@
             </a:endParaRPr>
           </a:p>
           <a:p>
-            <a:pPr indent="-292100" lvl="1" marL="914400" rtl="0" algn="l">
+            <a:pPr marL="914400" lvl="1" indent="-292100" algn="l" rtl="0">
               <a:lnSpc>
                 <a:spcPct val="115000"/>
               </a:lnSpc>
@@ -11645,7 +11712,7 @@
             </a:endParaRPr>
           </a:p>
           <a:p>
-            <a:pPr indent="-292100" lvl="1" marL="914400" rtl="0" algn="l">
+            <a:pPr marL="914400" lvl="1" indent="-292100" algn="l" rtl="0">
               <a:lnSpc>
                 <a:spcPct val="115000"/>
               </a:lnSpc>
@@ -11685,7 +11752,7 @@
             </a:endParaRPr>
           </a:p>
           <a:p>
-            <a:pPr indent="-292100" lvl="1" marL="914400" rtl="0" algn="l">
+            <a:pPr marL="914400" lvl="1" indent="-292100" algn="l" rtl="0">
               <a:lnSpc>
                 <a:spcPct val="115000"/>
               </a:lnSpc>
@@ -11725,7 +11792,7 @@
             </a:endParaRPr>
           </a:p>
           <a:p>
-            <a:pPr indent="0" lvl="0" marL="0" rtl="0" algn="l">
+            <a:pPr marL="0" lvl="0" indent="0" algn="l" rtl="0">
               <a:lnSpc>
                 <a:spcPct val="115000"/>
               </a:lnSpc>
@@ -11737,10 +11804,7 @@
               </a:spcAft>
               <a:buNone/>
             </a:pPr>
-            <a:r>
-              <a:t/>
-            </a:r>
-            <a:endParaRPr b="1" sz="1200">
+            <a:endParaRPr sz="1200" b="1">
               <a:solidFill>
                 <a:srgbClr val="1C4587"/>
               </a:solidFill>
@@ -11765,39 +11829,36 @@
           </a:xfrm>
           <a:prstGeom prst="rightBrace">
             <a:avLst>
-              <a:gd fmla="val 50000" name="adj1"/>
-              <a:gd fmla="val 50000" name="adj2"/>
+              <a:gd name="adj1" fmla="val 50000"/>
+              <a:gd name="adj2" fmla="val 50000"/>
             </a:avLst>
           </a:prstGeom>
           <a:noFill/>
-          <a:ln cap="flat" cmpd="sng" w="28575">
+          <a:ln w="28575" cap="flat" cmpd="sng">
             <a:solidFill>
               <a:schemeClr val="dk2"/>
             </a:solidFill>
             <a:prstDash val="solid"/>
             <a:round/>
-            <a:headEnd len="sm" w="sm" type="none"/>
-            <a:tailEnd len="sm" w="sm" type="none"/>
+            <a:headEnd type="none" w="sm" len="sm"/>
+            <a:tailEnd type="none" w="sm" len="sm"/>
           </a:ln>
         </p:spPr>
         <p:txBody>
-          <a:bodyPr anchorCtr="0" anchor="ctr" bIns="91425" lIns="91425" spcFirstLastPara="1" rIns="91425" wrap="square" tIns="91425">
+          <a:bodyPr spcFirstLastPara="1" wrap="square" lIns="91425" tIns="91425" rIns="91425" bIns="91425" anchor="ctr" anchorCtr="0">
             <a:noAutofit/>
           </a:bodyPr>
           <a:lstStyle/>
           <a:p>
-            <a:pPr indent="0" lvl="0" marL="0" rtl="0" algn="ctr">
-              <a:spcBef>
-                <a:spcPts val="0"/>
-              </a:spcBef>
-              <a:spcAft>
-                <a:spcPts val="0"/>
-              </a:spcAft>
-              <a:buNone/>
-            </a:pPr>
-            <a:r>
-              <a:t/>
-            </a:r>
+            <a:pPr marL="0" lvl="0" indent="0" algn="ctr" rtl="0">
+              <a:spcBef>
+                <a:spcPts val="0"/>
+              </a:spcBef>
+              <a:spcAft>
+                <a:spcPts val="0"/>
+              </a:spcAft>
+              <a:buNone/>
+            </a:pPr>
             <a:endParaRPr/>
           </a:p>
         </p:txBody>
@@ -11822,12 +11883,12 @@
           </a:ln>
         </p:spPr>
         <p:txBody>
-          <a:bodyPr anchorCtr="0" anchor="t" bIns="91425" lIns="91425" spcFirstLastPara="1" rIns="91425" wrap="square" tIns="91425">
+          <a:bodyPr spcFirstLastPara="1" wrap="square" lIns="91425" tIns="91425" rIns="91425" bIns="91425" anchor="t" anchorCtr="0">
             <a:spAutoFit/>
           </a:bodyPr>
           <a:lstStyle/>
           <a:p>
-            <a:pPr indent="0" lvl="0" marL="0" rtl="0" algn="l">
+            <a:pPr marL="0" lvl="0" indent="0" algn="l" rtl="0">
               <a:lnSpc>
                 <a:spcPct val="115000"/>
               </a:lnSpc>
@@ -11840,7 +11901,7 @@
               <a:buNone/>
             </a:pPr>
             <a:r>
-              <a:rPr b="1" lang="es" sz="1000">
+              <a:rPr lang="es" sz="1000" b="1">
                 <a:solidFill>
                   <a:srgbClr val="1C4587"/>
                 </a:solidFill>
@@ -11915,12 +11976,12 @@
           </a:ln>
         </p:spPr>
         <p:txBody>
-          <a:bodyPr anchorCtr="0" anchor="t" bIns="91425" lIns="91425" spcFirstLastPara="1" rIns="91425" wrap="square" tIns="91425">
+          <a:bodyPr spcFirstLastPara="1" wrap="square" lIns="91425" tIns="91425" rIns="91425" bIns="91425" anchor="t" anchorCtr="0">
             <a:spAutoFit/>
           </a:bodyPr>
           <a:lstStyle/>
           <a:p>
-            <a:pPr indent="0" lvl="0" marL="0" rtl="0" algn="l">
+            <a:pPr marL="0" lvl="0" indent="0" algn="l" rtl="0">
               <a:lnSpc>
                 <a:spcPct val="115000"/>
               </a:lnSpc>
@@ -11933,7 +11994,7 @@
               <a:buNone/>
             </a:pPr>
             <a:r>
-              <a:rPr b="1" lang="es" sz="900" u="sng">
+              <a:rPr lang="es" sz="900" b="1" u="sng">
                 <a:solidFill>
                   <a:schemeClr val="hlink"/>
                 </a:solidFill>
@@ -11994,11 +12055,11 @@
 </file>
 
 <file path=ppt/slides/slide7.xml><?xml version="1.0" encoding="utf-8"?>
-<p:sld xmlns:a="http://schemas.openxmlformats.org/drawingml/2006/main" xmlns:r="http://schemas.openxmlformats.org/officeDocument/2006/relationships" xmlns:mc="http://schemas.openxmlformats.org/markup-compatibility/2006" xmlns:mv="urn:schemas-microsoft-com:mac:vml" xmlns:p="http://schemas.openxmlformats.org/presentationml/2006/main" xmlns:c="http://schemas.openxmlformats.org/drawingml/2006/chart" xmlns:dgm="http://schemas.openxmlformats.org/drawingml/2006/diagram" xmlns:o="urn:schemas-microsoft-com:office:office" xmlns:v="urn:schemas-microsoft-com:vml" xmlns:pvml="urn:schemas-microsoft-com:office:powerpoint" xmlns:com="http://schemas.openxmlformats.org/drawingml/2006/compatibility" xmlns:p14="http://schemas.microsoft.com/office/powerpoint/2010/main" xmlns:p15="http://schemas.microsoft.com/office/powerpoint/2012/main" xmlns:ahyp="http://schemas.microsoft.com/office/drawing/2018/hyperlinkcolor">
+<p:sld xmlns:a="http://schemas.openxmlformats.org/drawingml/2006/main" xmlns:r="http://schemas.openxmlformats.org/officeDocument/2006/relationships" xmlns:p="http://schemas.openxmlformats.org/presentationml/2006/main">
   <p:cSld>
     <p:spTree>
       <p:nvGrpSpPr>
-        <p:cNvPr id="143" name="Shape 143"/>
+        <p:cNvPr id="1" name="Shape 143"/>
         <p:cNvGrpSpPr/>
         <p:nvPr/>
       </p:nvGrpSpPr>
@@ -12058,12 +12119,12 @@
           </a:ln>
         </p:spPr>
         <p:txBody>
-          <a:bodyPr anchorCtr="0" anchor="t" bIns="91425" lIns="91425" spcFirstLastPara="1" rIns="91425" wrap="square" tIns="91425">
+          <a:bodyPr spcFirstLastPara="1" wrap="square" lIns="91425" tIns="91425" rIns="91425" bIns="91425" anchor="t" anchorCtr="0">
             <a:spAutoFit/>
           </a:bodyPr>
           <a:lstStyle/>
           <a:p>
-            <a:pPr indent="0" lvl="0" marL="0" rtl="0" algn="l">
+            <a:pPr marL="0" lvl="0" indent="0" algn="l" rtl="0">
               <a:lnSpc>
                 <a:spcPct val="115000"/>
               </a:lnSpc>
@@ -12085,19 +12146,7 @@
                 <a:cs typeface="Sora"/>
                 <a:sym typeface="Sora"/>
               </a:rPr>
-              <a:t>LLMs</a:t>
-            </a:r>
-            <a:r>
-              <a:rPr lang="es" sz="2400">
-                <a:solidFill>
-                  <a:srgbClr val="1C4587"/>
-                </a:solidFill>
-                <a:latin typeface="Sora"/>
-                <a:ea typeface="Sora"/>
-                <a:cs typeface="Sora"/>
-                <a:sym typeface="Sora"/>
-              </a:rPr>
-              <a:t> (+2020)</a:t>
+              <a:t>LLMs (+2020)</a:t>
             </a:r>
             <a:endParaRPr sz="1800">
               <a:solidFill>
@@ -12124,34 +12173,31 @@
           <a:solidFill>
             <a:srgbClr val="0B5394"/>
           </a:solidFill>
-          <a:ln cap="flat" cmpd="sng" w="9525">
+          <a:ln w="9525" cap="flat" cmpd="sng">
             <a:solidFill>
               <a:srgbClr val="0B5394"/>
             </a:solidFill>
             <a:prstDash val="solid"/>
             <a:round/>
-            <a:headEnd len="sm" w="sm" type="none"/>
-            <a:tailEnd len="sm" w="sm" type="none"/>
+            <a:headEnd type="none" w="sm" len="sm"/>
+            <a:tailEnd type="none" w="sm" len="sm"/>
           </a:ln>
         </p:spPr>
         <p:txBody>
-          <a:bodyPr anchorCtr="0" anchor="ctr" bIns="91425" lIns="91425" spcFirstLastPara="1" rIns="91425" wrap="square" tIns="91425">
+          <a:bodyPr spcFirstLastPara="1" wrap="square" lIns="91425" tIns="91425" rIns="91425" bIns="91425" anchor="ctr" anchorCtr="0">
             <a:noAutofit/>
           </a:bodyPr>
           <a:lstStyle/>
           <a:p>
-            <a:pPr indent="0" lvl="0" marL="0" rtl="0" algn="ctr">
-              <a:spcBef>
-                <a:spcPts val="0"/>
-              </a:spcBef>
-              <a:spcAft>
-                <a:spcPts val="0"/>
-              </a:spcAft>
-              <a:buNone/>
-            </a:pPr>
-            <a:r>
-              <a:t/>
-            </a:r>
+            <a:pPr marL="0" lvl="0" indent="0" algn="ctr" rtl="0">
+              <a:spcBef>
+                <a:spcPts val="0"/>
+              </a:spcBef>
+              <a:spcAft>
+                <a:spcPts val="0"/>
+              </a:spcAft>
+              <a:buNone/>
+            </a:pPr>
             <a:endParaRPr/>
           </a:p>
         </p:txBody>
@@ -12176,12 +12222,12 @@
           </a:ln>
         </p:spPr>
         <p:txBody>
-          <a:bodyPr anchorCtr="0" anchor="t" bIns="91425" lIns="91425" spcFirstLastPara="1" rIns="91425" wrap="square" tIns="91425">
+          <a:bodyPr spcFirstLastPara="1" wrap="square" lIns="91425" tIns="91425" rIns="91425" bIns="91425" anchor="t" anchorCtr="0">
             <a:spAutoFit/>
           </a:bodyPr>
           <a:lstStyle/>
           <a:p>
-            <a:pPr indent="0" lvl="0" marL="0" rtl="0" algn="l">
+            <a:pPr marL="0" lvl="0" indent="0" algn="l" rtl="0">
               <a:lnSpc>
                 <a:spcPct val="115000"/>
               </a:lnSpc>
@@ -12236,34 +12282,31 @@
           <a:solidFill>
             <a:srgbClr val="EFEFEF"/>
           </a:solidFill>
-          <a:ln cap="flat" cmpd="sng" w="9525">
+          <a:ln w="9525" cap="flat" cmpd="sng">
             <a:solidFill>
               <a:srgbClr val="B7B7B7"/>
             </a:solidFill>
             <a:prstDash val="solid"/>
             <a:round/>
-            <a:headEnd len="sm" w="sm" type="none"/>
-            <a:tailEnd len="sm" w="sm" type="none"/>
+            <a:headEnd type="none" w="sm" len="sm"/>
+            <a:tailEnd type="none" w="sm" len="sm"/>
           </a:ln>
         </p:spPr>
         <p:txBody>
-          <a:bodyPr anchorCtr="0" anchor="ctr" bIns="91425" lIns="91425" spcFirstLastPara="1" rIns="91425" wrap="square" tIns="91425">
+          <a:bodyPr spcFirstLastPara="1" wrap="square" lIns="91425" tIns="91425" rIns="91425" bIns="91425" anchor="ctr" anchorCtr="0">
             <a:noAutofit/>
           </a:bodyPr>
           <a:lstStyle/>
           <a:p>
-            <a:pPr indent="0" lvl="0" marL="0" rtl="0" algn="ctr">
-              <a:spcBef>
-                <a:spcPts val="0"/>
-              </a:spcBef>
-              <a:spcAft>
-                <a:spcPts val="0"/>
-              </a:spcAft>
-              <a:buNone/>
-            </a:pPr>
-            <a:r>
-              <a:t/>
-            </a:r>
+            <a:pPr marL="0" lvl="0" indent="0" algn="ctr" rtl="0">
+              <a:spcBef>
+                <a:spcPts val="0"/>
+              </a:spcBef>
+              <a:spcAft>
+                <a:spcPts val="0"/>
+              </a:spcAft>
+              <a:buNone/>
+            </a:pPr>
             <a:endParaRPr/>
           </a:p>
         </p:txBody>
@@ -12288,12 +12331,12 @@
           </a:ln>
         </p:spPr>
         <p:txBody>
-          <a:bodyPr anchorCtr="0" anchor="t" bIns="91425" lIns="91425" spcFirstLastPara="1" rIns="91425" wrap="square" tIns="91425">
+          <a:bodyPr spcFirstLastPara="1" wrap="square" lIns="91425" tIns="91425" rIns="91425" bIns="91425" anchor="t" anchorCtr="0">
             <a:spAutoFit/>
           </a:bodyPr>
           <a:lstStyle/>
           <a:p>
-            <a:pPr indent="-285750" lvl="0" marL="269999" rtl="0" algn="l">
+            <a:pPr marL="269999" lvl="0" indent="-285750" algn="l" rtl="0">
               <a:lnSpc>
                 <a:spcPct val="115000"/>
               </a:lnSpc>
@@ -12344,7 +12387,7 @@
             </a:endParaRPr>
           </a:p>
           <a:p>
-            <a:pPr indent="-285750" lvl="0" marL="269999" rtl="0" algn="l">
+            <a:pPr marL="269999" lvl="0" indent="-285750" algn="l" rtl="0">
               <a:lnSpc>
                 <a:spcPct val="115000"/>
               </a:lnSpc>
@@ -12395,7 +12438,7 @@
             </a:endParaRPr>
           </a:p>
           <a:p>
-            <a:pPr indent="-285750" lvl="0" marL="269999" rtl="0" algn="l">
+            <a:pPr marL="269999" lvl="0" indent="-285750" algn="l" rtl="0">
               <a:lnSpc>
                 <a:spcPct val="115000"/>
               </a:lnSpc>
@@ -12467,12 +12510,12 @@
           </a:ln>
         </p:spPr>
         <p:txBody>
-          <a:bodyPr anchorCtr="0" anchor="t" bIns="91425" lIns="91425" spcFirstLastPara="1" rIns="91425" wrap="square" tIns="91425">
+          <a:bodyPr spcFirstLastPara="1" wrap="square" lIns="91425" tIns="91425" rIns="91425" bIns="91425" anchor="t" anchorCtr="0">
             <a:spAutoFit/>
           </a:bodyPr>
           <a:lstStyle/>
           <a:p>
-            <a:pPr indent="0" lvl="0" marL="0" rtl="0" algn="l">
+            <a:pPr marL="0" lvl="0" indent="0" algn="l" rtl="0">
               <a:lnSpc>
                 <a:spcPct val="115000"/>
               </a:lnSpc>
@@ -12485,7 +12528,7 @@
               <a:buNone/>
             </a:pPr>
             <a:r>
-              <a:rPr b="1" lang="es" sz="1200">
+              <a:rPr lang="es" sz="1200" b="1">
                 <a:solidFill>
                   <a:srgbClr val="666666"/>
                 </a:solidFill>
@@ -12524,12 +12567,12 @@
           </a:ln>
         </p:spPr>
         <p:txBody>
-          <a:bodyPr anchorCtr="0" anchor="t" bIns="91425" lIns="91425" spcFirstLastPara="1" rIns="91425" wrap="square" tIns="91425">
+          <a:bodyPr spcFirstLastPara="1" wrap="square" lIns="91425" tIns="91425" rIns="91425" bIns="91425" anchor="t" anchorCtr="0">
             <a:spAutoFit/>
           </a:bodyPr>
           <a:lstStyle/>
           <a:p>
-            <a:pPr indent="-304800" lvl="0" marL="457200" rtl="0" algn="l">
+            <a:pPr marL="457200" lvl="0" indent="-304800" algn="l" rtl="0">
               <a:lnSpc>
                 <a:spcPct val="115000"/>
               </a:lnSpc>
@@ -12547,7 +12590,7 @@
               <a:buAutoNum type="arabicPeriod"/>
             </a:pPr>
             <a:r>
-              <a:rPr b="1" lang="es" sz="1200">
+              <a:rPr lang="es" sz="1200" b="1">
                 <a:solidFill>
                   <a:srgbClr val="1C4587"/>
                 </a:solidFill>
@@ -12559,7 +12602,7 @@
               <a:t>Proceso Generativo (Decoder Only)</a:t>
             </a:r>
             <a:br>
-              <a:rPr b="1" lang="es" sz="1200">
+              <a:rPr lang="es" sz="1200" b="1">
                 <a:solidFill>
                   <a:srgbClr val="1C4587"/>
                 </a:solidFill>
@@ -12582,7 +12625,7 @@
               <a:t>En vez de masking</a:t>
             </a:r>
             <a:r>
-              <a:rPr b="1" lang="es" sz="1200">
+              <a:rPr lang="es" sz="1200" b="1">
                 <a:solidFill>
                   <a:srgbClr val="1C4587"/>
                 </a:solidFill>
@@ -12616,7 +12659,7 @@
                 <a:sym typeface="Sora"/>
               </a:rPr>
             </a:br>
-            <a:endParaRPr b="1" sz="1200">
+            <a:endParaRPr sz="1200" b="1">
               <a:solidFill>
                 <a:srgbClr val="1C4587"/>
               </a:solidFill>
@@ -12627,7 +12670,7 @@
             </a:endParaRPr>
           </a:p>
           <a:p>
-            <a:pPr indent="-304800" lvl="0" marL="457200" rtl="0" algn="l">
+            <a:pPr marL="457200" lvl="0" indent="-304800" algn="l" rtl="0">
               <a:lnSpc>
                 <a:spcPct val="115000"/>
               </a:lnSpc>
@@ -12645,7 +12688,7 @@
               <a:buAutoNum type="arabicPeriod"/>
             </a:pPr>
             <a:r>
-              <a:rPr b="1" lang="es" sz="1200">
+              <a:rPr lang="es" sz="1200" b="1">
                 <a:solidFill>
                   <a:srgbClr val="1C4587"/>
                 </a:solidFill>
@@ -12657,7 +12700,7 @@
               <a:t>RLHF (Reinforcement Learning from Human Feedback)</a:t>
             </a:r>
             <a:br>
-              <a:rPr b="1" lang="es" sz="1200">
+              <a:rPr lang="es" sz="1200" b="1">
                 <a:solidFill>
                   <a:srgbClr val="1C4587"/>
                 </a:solidFill>
@@ -12680,7 +12723,7 @@
               <a:t>Alinea los modelos de lenguaje con las preferencias y valores humanos. Se entrena un modelo de recompensa para predecir qué respuestas preferirían los usuarios. Ojo!!: Aumenta sesgo y baja la crítica al usuario</a:t>
             </a:r>
             <a:br>
-              <a:rPr b="1" lang="es" sz="1200">
+              <a:rPr lang="es" sz="1200" b="1">
                 <a:solidFill>
                   <a:srgbClr val="1C4587"/>
                 </a:solidFill>
@@ -12690,7 +12733,7 @@
                 <a:sym typeface="Sora"/>
               </a:rPr>
             </a:br>
-            <a:endParaRPr b="1" sz="1200">
+            <a:endParaRPr sz="1200" b="1">
               <a:solidFill>
                 <a:srgbClr val="1C4587"/>
               </a:solidFill>
@@ -12701,7 +12744,7 @@
             </a:endParaRPr>
           </a:p>
           <a:p>
-            <a:pPr indent="-304800" lvl="0" marL="457200" rtl="0" algn="l">
+            <a:pPr marL="457200" lvl="0" indent="-304800" algn="l" rtl="0">
               <a:lnSpc>
                 <a:spcPct val="115000"/>
               </a:lnSpc>
@@ -12719,7 +12762,7 @@
               <a:buAutoNum type="arabicPeriod"/>
             </a:pPr>
             <a:r>
-              <a:rPr b="1" lang="es" sz="1200">
+              <a:rPr lang="es" sz="1200" b="1">
                 <a:solidFill>
                   <a:srgbClr val="1C4587"/>
                 </a:solidFill>
@@ -12731,7 +12774,7 @@
               <a:t>Escalamiento de Parámetros</a:t>
             </a:r>
             <a:br>
-              <a:rPr b="1" lang="es" sz="1200">
+              <a:rPr lang="es" sz="1200" b="1">
                 <a:solidFill>
                   <a:srgbClr val="1C4587"/>
                 </a:solidFill>
@@ -12741,7 +12784,7 @@
                 <a:sym typeface="Sora"/>
               </a:rPr>
             </a:br>
-            <a:endParaRPr b="1" sz="1200">
+            <a:endParaRPr sz="1200" b="1">
               <a:solidFill>
                 <a:srgbClr val="1C4587"/>
               </a:solidFill>
@@ -12752,7 +12795,7 @@
             </a:endParaRPr>
           </a:p>
           <a:p>
-            <a:pPr indent="-304800" lvl="0" marL="457200" rtl="0" algn="l">
+            <a:pPr marL="457200" lvl="0" indent="-304800" algn="l" rtl="0">
               <a:lnSpc>
                 <a:spcPct val="115000"/>
               </a:lnSpc>
@@ -12770,7 +12813,7 @@
               <a:buAutoNum type="arabicPeriod"/>
             </a:pPr>
             <a:r>
-              <a:rPr b="1" lang="es" sz="1200">
+              <a:rPr lang="es" sz="1200" b="1">
                 <a:solidFill>
                   <a:srgbClr val="1C4587"/>
                 </a:solidFill>
@@ -12782,7 +12825,7 @@
               <a:t>MoE (Mixture of Experts)</a:t>
             </a:r>
             <a:br>
-              <a:rPr b="1" lang="es" sz="1200">
+              <a:rPr lang="es" sz="1200" b="1">
                 <a:solidFill>
                   <a:srgbClr val="1C4587"/>
                 </a:solidFill>
@@ -12826,7 +12869,7 @@
             </a:endParaRPr>
           </a:p>
           <a:p>
-            <a:pPr indent="-292100" lvl="0" marL="457200" rtl="0" algn="l">
+            <a:pPr marL="457200" lvl="0" indent="-292100" algn="l" rtl="0">
               <a:lnSpc>
                 <a:spcPct val="115000"/>
               </a:lnSpc>
@@ -12844,7 +12887,7 @@
               <a:buAutoNum type="arabicPeriod"/>
             </a:pPr>
             <a:r>
-              <a:rPr b="1" lang="es" sz="1200">
+              <a:rPr lang="es" sz="1200" b="1">
                 <a:solidFill>
                   <a:srgbClr val="1C4587"/>
                 </a:solidFill>
@@ -12856,7 +12899,7 @@
               <a:t>QLoRa (Quantized Low-Rank Adaptation) </a:t>
             </a:r>
             <a:br>
-              <a:rPr b="1" lang="es" sz="1200">
+              <a:rPr lang="es" sz="1200" b="1">
                 <a:solidFill>
                   <a:srgbClr val="1C4587"/>
                 </a:solidFill>
@@ -12900,7 +12943,7 @@
             </a:endParaRPr>
           </a:p>
           <a:p>
-            <a:pPr indent="-292100" lvl="0" marL="457200" rtl="0" algn="l">
+            <a:pPr marL="457200" lvl="0" indent="-292100" algn="l" rtl="0">
               <a:lnSpc>
                 <a:spcPct val="115000"/>
               </a:lnSpc>
@@ -12918,7 +12961,7 @@
               <a:buAutoNum type="arabicPeriod"/>
             </a:pPr>
             <a:r>
-              <a:rPr b="1" lang="es" sz="1200">
+              <a:rPr lang="es" sz="1200" b="1">
                 <a:solidFill>
                   <a:srgbClr val="1C4587"/>
                 </a:solidFill>
@@ -12930,7 +12973,7 @@
               <a:t>Modelo Evaluador</a:t>
             </a:r>
             <a:br>
-              <a:rPr b="1" lang="es" sz="1200">
+              <a:rPr lang="es" sz="1200" b="1">
                 <a:solidFill>
                   <a:srgbClr val="1C4587"/>
                 </a:solidFill>
@@ -12952,7 +12995,7 @@
               </a:rPr>
               <a:t>El modelo genera múltiples soluciones a un problema. Luego evalúa sus propias soluciones con otro modelo para aprender las mejores soluciones </a:t>
             </a:r>
-            <a:endParaRPr b="1" sz="1200">
+            <a:endParaRPr sz="1200" b="1">
               <a:solidFill>
                 <a:srgbClr val="1C4587"/>
               </a:solidFill>
@@ -12984,12 +13027,12 @@
           </a:ln>
         </p:spPr>
         <p:txBody>
-          <a:bodyPr anchorCtr="0" anchor="t" bIns="91425" lIns="91425" spcFirstLastPara="1" rIns="91425" wrap="square" tIns="91425">
+          <a:bodyPr spcFirstLastPara="1" wrap="square" lIns="91425" tIns="91425" rIns="91425" bIns="91425" anchor="t" anchorCtr="0">
             <a:spAutoFit/>
           </a:bodyPr>
           <a:lstStyle/>
           <a:p>
-            <a:pPr indent="0" lvl="0" marL="0" rtl="0" algn="l">
+            <a:pPr marL="0" lvl="0" indent="0" algn="l" rtl="0">
               <a:lnSpc>
                 <a:spcPct val="115000"/>
               </a:lnSpc>
@@ -13002,7 +13045,7 @@
               <a:buNone/>
             </a:pPr>
             <a:r>
-              <a:rPr b="1" lang="es" sz="900" u="sng">
+              <a:rPr lang="es" sz="900" b="1" u="sng">
                 <a:solidFill>
                   <a:schemeClr val="hlink"/>
                 </a:solidFill>
@@ -13067,41 +13110,38 @@
           </a:xfrm>
           <a:prstGeom prst="rightArrow">
             <a:avLst>
-              <a:gd fmla="val 50000" name="adj1"/>
-              <a:gd fmla="val 50000" name="adj2"/>
+              <a:gd name="adj1" fmla="val 50000"/>
+              <a:gd name="adj2" fmla="val 50000"/>
             </a:avLst>
           </a:prstGeom>
           <a:solidFill>
             <a:srgbClr val="0B5394"/>
           </a:solidFill>
-          <a:ln cap="flat" cmpd="sng" w="9525">
+          <a:ln w="9525" cap="flat" cmpd="sng">
             <a:solidFill>
               <a:srgbClr val="0B5394"/>
             </a:solidFill>
             <a:prstDash val="solid"/>
             <a:round/>
-            <a:headEnd len="sm" w="sm" type="none"/>
-            <a:tailEnd len="sm" w="sm" type="none"/>
+            <a:headEnd type="none" w="sm" len="sm"/>
+            <a:tailEnd type="none" w="sm" len="sm"/>
           </a:ln>
         </p:spPr>
         <p:txBody>
-          <a:bodyPr anchorCtr="0" anchor="ctr" bIns="91425" lIns="91425" spcFirstLastPara="1" rIns="91425" wrap="square" tIns="91425">
+          <a:bodyPr spcFirstLastPara="1" wrap="square" lIns="91425" tIns="91425" rIns="91425" bIns="91425" anchor="ctr" anchorCtr="0">
             <a:noAutofit/>
           </a:bodyPr>
           <a:lstStyle/>
           <a:p>
-            <a:pPr indent="0" lvl="0" marL="0" rtl="0" algn="ctr">
-              <a:spcBef>
-                <a:spcPts val="0"/>
-              </a:spcBef>
-              <a:spcAft>
-                <a:spcPts val="0"/>
-              </a:spcAft>
-              <a:buNone/>
-            </a:pPr>
-            <a:r>
-              <a:t/>
-            </a:r>
+            <a:pPr marL="0" lvl="0" indent="0" algn="ctr" rtl="0">
+              <a:spcBef>
+                <a:spcPts val="0"/>
+              </a:spcBef>
+              <a:spcAft>
+                <a:spcPts val="0"/>
+              </a:spcAft>
+              <a:buNone/>
+            </a:pPr>
             <a:endParaRPr/>
           </a:p>
         </p:txBody>
@@ -13126,12 +13166,12 @@
           </a:ln>
         </p:spPr>
         <p:txBody>
-          <a:bodyPr anchorCtr="0" anchor="t" bIns="91425" lIns="91425" spcFirstLastPara="1" rIns="91425" wrap="square" tIns="91425">
+          <a:bodyPr spcFirstLastPara="1" wrap="square" lIns="91425" tIns="91425" rIns="91425" bIns="91425" anchor="t" anchorCtr="0">
             <a:spAutoFit/>
           </a:bodyPr>
           <a:lstStyle/>
           <a:p>
-            <a:pPr indent="0" lvl="0" marL="0" rtl="0" algn="l">
+            <a:pPr marL="0" lvl="0" indent="0" algn="l" rtl="0">
               <a:lnSpc>
                 <a:spcPct val="115000"/>
               </a:lnSpc>
@@ -13144,7 +13184,7 @@
               <a:buNone/>
             </a:pPr>
             <a:r>
-              <a:rPr b="1" lang="es" sz="1000">
+              <a:rPr lang="es" sz="1000" b="1">
                 <a:solidFill>
                   <a:srgbClr val="1C4587"/>
                 </a:solidFill>
@@ -13172,41 +13212,38 @@
           </a:xfrm>
           <a:prstGeom prst="rightArrow">
             <a:avLst>
-              <a:gd fmla="val 50000" name="adj1"/>
-              <a:gd fmla="val 50000" name="adj2"/>
+              <a:gd name="adj1" fmla="val 50000"/>
+              <a:gd name="adj2" fmla="val 50000"/>
             </a:avLst>
           </a:prstGeom>
           <a:solidFill>
             <a:srgbClr val="0B5394"/>
           </a:solidFill>
-          <a:ln cap="flat" cmpd="sng" w="9525">
+          <a:ln w="9525" cap="flat" cmpd="sng">
             <a:solidFill>
               <a:srgbClr val="0B5394"/>
             </a:solidFill>
             <a:prstDash val="solid"/>
             <a:round/>
-            <a:headEnd len="sm" w="sm" type="none"/>
-            <a:tailEnd len="sm" w="sm" type="none"/>
+            <a:headEnd type="none" w="sm" len="sm"/>
+            <a:tailEnd type="none" w="sm" len="sm"/>
           </a:ln>
         </p:spPr>
         <p:txBody>
-          <a:bodyPr anchorCtr="0" anchor="ctr" bIns="91425" lIns="91425" spcFirstLastPara="1" rIns="91425" wrap="square" tIns="91425">
+          <a:bodyPr spcFirstLastPara="1" wrap="square" lIns="91425" tIns="91425" rIns="91425" bIns="91425" anchor="ctr" anchorCtr="0">
             <a:noAutofit/>
           </a:bodyPr>
           <a:lstStyle/>
           <a:p>
-            <a:pPr indent="0" lvl="0" marL="0" rtl="0" algn="ctr">
-              <a:spcBef>
-                <a:spcPts val="0"/>
-              </a:spcBef>
-              <a:spcAft>
-                <a:spcPts val="0"/>
-              </a:spcAft>
-              <a:buNone/>
-            </a:pPr>
-            <a:r>
-              <a:t/>
-            </a:r>
+            <a:pPr marL="0" lvl="0" indent="0" algn="ctr" rtl="0">
+              <a:spcBef>
+                <a:spcPts val="0"/>
+              </a:spcBef>
+              <a:spcAft>
+                <a:spcPts val="0"/>
+              </a:spcAft>
+              <a:buNone/>
+            </a:pPr>
             <a:endParaRPr/>
           </a:p>
         </p:txBody>
@@ -13231,12 +13268,12 @@
           </a:ln>
         </p:spPr>
         <p:txBody>
-          <a:bodyPr anchorCtr="0" anchor="t" bIns="91425" lIns="91425" spcFirstLastPara="1" rIns="91425" wrap="square" tIns="91425">
+          <a:bodyPr spcFirstLastPara="1" wrap="square" lIns="91425" tIns="91425" rIns="91425" bIns="91425" anchor="t" anchorCtr="0">
             <a:spAutoFit/>
           </a:bodyPr>
           <a:lstStyle/>
           <a:p>
-            <a:pPr indent="0" lvl="0" marL="0" rtl="0" algn="l">
+            <a:pPr marL="0" lvl="0" indent="0" algn="l" rtl="0">
               <a:lnSpc>
                 <a:spcPct val="115000"/>
               </a:lnSpc>
@@ -13249,7 +13286,7 @@
               <a:buNone/>
             </a:pPr>
             <a:r>
-              <a:rPr b="1" lang="es" sz="1000">
+              <a:rPr lang="es" sz="1000" b="1">
                 <a:solidFill>
                   <a:srgbClr val="1C4587"/>
                 </a:solidFill>
@@ -13277,41 +13314,38 @@
           </a:xfrm>
           <a:prstGeom prst="rightArrow">
             <a:avLst>
-              <a:gd fmla="val 50000" name="adj1"/>
-              <a:gd fmla="val 50000" name="adj2"/>
+              <a:gd name="adj1" fmla="val 50000"/>
+              <a:gd name="adj2" fmla="val 50000"/>
             </a:avLst>
           </a:prstGeom>
           <a:solidFill>
             <a:srgbClr val="0B5394"/>
           </a:solidFill>
-          <a:ln cap="flat" cmpd="sng" w="9525">
+          <a:ln w="9525" cap="flat" cmpd="sng">
             <a:solidFill>
               <a:srgbClr val="0B5394"/>
             </a:solidFill>
             <a:prstDash val="solid"/>
             <a:round/>
-            <a:headEnd len="sm" w="sm" type="none"/>
-            <a:tailEnd len="sm" w="sm" type="none"/>
+            <a:headEnd type="none" w="sm" len="sm"/>
+            <a:tailEnd type="none" w="sm" len="sm"/>
           </a:ln>
         </p:spPr>
         <p:txBody>
-          <a:bodyPr anchorCtr="0" anchor="ctr" bIns="91425" lIns="91425" spcFirstLastPara="1" rIns="91425" wrap="square" tIns="91425">
+          <a:bodyPr spcFirstLastPara="1" wrap="square" lIns="91425" tIns="91425" rIns="91425" bIns="91425" anchor="ctr" anchorCtr="0">
             <a:noAutofit/>
           </a:bodyPr>
           <a:lstStyle/>
           <a:p>
-            <a:pPr indent="0" lvl="0" marL="0" rtl="0" algn="ctr">
-              <a:spcBef>
-                <a:spcPts val="0"/>
-              </a:spcBef>
-              <a:spcAft>
-                <a:spcPts val="0"/>
-              </a:spcAft>
-              <a:buNone/>
-            </a:pPr>
-            <a:r>
-              <a:t/>
-            </a:r>
+            <a:pPr marL="0" lvl="0" indent="0" algn="ctr" rtl="0">
+              <a:spcBef>
+                <a:spcPts val="0"/>
+              </a:spcBef>
+              <a:spcAft>
+                <a:spcPts val="0"/>
+              </a:spcAft>
+              <a:buNone/>
+            </a:pPr>
             <a:endParaRPr/>
           </a:p>
         </p:txBody>
@@ -13336,12 +13370,12 @@
           </a:ln>
         </p:spPr>
         <p:txBody>
-          <a:bodyPr anchorCtr="0" anchor="t" bIns="91425" lIns="91425" spcFirstLastPara="1" rIns="91425" wrap="square" tIns="91425">
+          <a:bodyPr spcFirstLastPara="1" wrap="square" lIns="91425" tIns="91425" rIns="91425" bIns="91425" anchor="t" anchorCtr="0">
             <a:spAutoFit/>
           </a:bodyPr>
           <a:lstStyle/>
           <a:p>
-            <a:pPr indent="0" lvl="0" marL="0" rtl="0" algn="l">
+            <a:pPr marL="0" lvl="0" indent="0" algn="l" rtl="0">
               <a:lnSpc>
                 <a:spcPct val="115000"/>
               </a:lnSpc>
@@ -13354,7 +13388,7 @@
               <a:buNone/>
             </a:pPr>
             <a:r>
-              <a:rPr b="1" lang="es" sz="1000">
+              <a:rPr lang="es" sz="1000" b="1">
                 <a:solidFill>
                   <a:srgbClr val="1C4587"/>
                 </a:solidFill>
@@ -13382,41 +13416,38 @@
           </a:xfrm>
           <a:prstGeom prst="rightArrow">
             <a:avLst>
-              <a:gd fmla="val 50000" name="adj1"/>
-              <a:gd fmla="val 50000" name="adj2"/>
+              <a:gd name="adj1" fmla="val 50000"/>
+              <a:gd name="adj2" fmla="val 50000"/>
             </a:avLst>
           </a:prstGeom>
           <a:solidFill>
             <a:srgbClr val="0B5394"/>
           </a:solidFill>
-          <a:ln cap="flat" cmpd="sng" w="9525">
+          <a:ln w="9525" cap="flat" cmpd="sng">
             <a:solidFill>
               <a:srgbClr val="0B5394"/>
             </a:solidFill>
             <a:prstDash val="solid"/>
             <a:round/>
-            <a:headEnd len="sm" w="sm" type="none"/>
-            <a:tailEnd len="sm" w="sm" type="none"/>
+            <a:headEnd type="none" w="sm" len="sm"/>
+            <a:tailEnd type="none" w="sm" len="sm"/>
           </a:ln>
         </p:spPr>
         <p:txBody>
-          <a:bodyPr anchorCtr="0" anchor="ctr" bIns="91425" lIns="91425" spcFirstLastPara="1" rIns="91425" wrap="square" tIns="91425">
+          <a:bodyPr spcFirstLastPara="1" wrap="square" lIns="91425" tIns="91425" rIns="91425" bIns="91425" anchor="ctr" anchorCtr="0">
             <a:noAutofit/>
           </a:bodyPr>
           <a:lstStyle/>
           <a:p>
-            <a:pPr indent="0" lvl="0" marL="0" rtl="0" algn="ctr">
-              <a:spcBef>
-                <a:spcPts val="0"/>
-              </a:spcBef>
-              <a:spcAft>
-                <a:spcPts val="0"/>
-              </a:spcAft>
-              <a:buNone/>
-            </a:pPr>
-            <a:r>
-              <a:t/>
-            </a:r>
+            <a:pPr marL="0" lvl="0" indent="0" algn="ctr" rtl="0">
+              <a:spcBef>
+                <a:spcPts val="0"/>
+              </a:spcBef>
+              <a:spcAft>
+                <a:spcPts val="0"/>
+              </a:spcAft>
+              <a:buNone/>
+            </a:pPr>
             <a:endParaRPr/>
           </a:p>
         </p:txBody>
@@ -13441,12 +13472,12 @@
           </a:ln>
         </p:spPr>
         <p:txBody>
-          <a:bodyPr anchorCtr="0" anchor="t" bIns="91425" lIns="91425" spcFirstLastPara="1" rIns="91425" wrap="square" tIns="91425">
+          <a:bodyPr spcFirstLastPara="1" wrap="square" lIns="91425" tIns="91425" rIns="91425" bIns="91425" anchor="t" anchorCtr="0">
             <a:spAutoFit/>
           </a:bodyPr>
           <a:lstStyle/>
           <a:p>
-            <a:pPr indent="0" lvl="0" marL="0" rtl="0" algn="l">
+            <a:pPr marL="0" lvl="0" indent="0" algn="l" rtl="0">
               <a:lnSpc>
                 <a:spcPct val="115000"/>
               </a:lnSpc>
@@ -13459,7 +13490,7 @@
               <a:buNone/>
             </a:pPr>
             <a:r>
-              <a:rPr b="1" lang="es" sz="1000">
+              <a:rPr lang="es" sz="1000" b="1">
                 <a:solidFill>
                   <a:srgbClr val="1C4587"/>
                 </a:solidFill>
@@ -13487,41 +13518,38 @@
           </a:xfrm>
           <a:prstGeom prst="rightArrow">
             <a:avLst>
-              <a:gd fmla="val 50000" name="adj1"/>
-              <a:gd fmla="val 50000" name="adj2"/>
+              <a:gd name="adj1" fmla="val 50000"/>
+              <a:gd name="adj2" fmla="val 50000"/>
             </a:avLst>
           </a:prstGeom>
           <a:solidFill>
             <a:srgbClr val="0B5394"/>
           </a:solidFill>
-          <a:ln cap="flat" cmpd="sng" w="9525">
+          <a:ln w="9525" cap="flat" cmpd="sng">
             <a:solidFill>
               <a:srgbClr val="0B5394"/>
             </a:solidFill>
             <a:prstDash val="solid"/>
             <a:round/>
-            <a:headEnd len="sm" w="sm" type="none"/>
-            <a:tailEnd len="sm" w="sm" type="none"/>
+            <a:headEnd type="none" w="sm" len="sm"/>
+            <a:tailEnd type="none" w="sm" len="sm"/>
           </a:ln>
         </p:spPr>
         <p:txBody>
-          <a:bodyPr anchorCtr="0" anchor="ctr" bIns="91425" lIns="91425" spcFirstLastPara="1" rIns="91425" wrap="square" tIns="91425">
+          <a:bodyPr spcFirstLastPara="1" wrap="square" lIns="91425" tIns="91425" rIns="91425" bIns="91425" anchor="ctr" anchorCtr="0">
             <a:noAutofit/>
           </a:bodyPr>
           <a:lstStyle/>
           <a:p>
-            <a:pPr indent="0" lvl="0" marL="0" rtl="0" algn="ctr">
-              <a:spcBef>
-                <a:spcPts val="0"/>
-              </a:spcBef>
-              <a:spcAft>
-                <a:spcPts val="0"/>
-              </a:spcAft>
-              <a:buNone/>
-            </a:pPr>
-            <a:r>
-              <a:t/>
-            </a:r>
+            <a:pPr marL="0" lvl="0" indent="0" algn="ctr" rtl="0">
+              <a:spcBef>
+                <a:spcPts val="0"/>
+              </a:spcBef>
+              <a:spcAft>
+                <a:spcPts val="0"/>
+              </a:spcAft>
+              <a:buNone/>
+            </a:pPr>
             <a:endParaRPr/>
           </a:p>
         </p:txBody>
@@ -13546,12 +13574,12 @@
           </a:ln>
         </p:spPr>
         <p:txBody>
-          <a:bodyPr anchorCtr="0" anchor="t" bIns="91425" lIns="91425" spcFirstLastPara="1" rIns="91425" wrap="square" tIns="91425">
+          <a:bodyPr spcFirstLastPara="1" wrap="square" lIns="91425" tIns="91425" rIns="91425" bIns="91425" anchor="t" anchorCtr="0">
             <a:spAutoFit/>
           </a:bodyPr>
           <a:lstStyle/>
           <a:p>
-            <a:pPr indent="0" lvl="0" marL="0" rtl="0" algn="l">
+            <a:pPr marL="0" lvl="0" indent="0" algn="l" rtl="0">
               <a:lnSpc>
                 <a:spcPct val="115000"/>
               </a:lnSpc>
@@ -13564,7 +13592,7 @@
               <a:buNone/>
             </a:pPr>
             <a:r>
-              <a:rPr b="1" lang="es" sz="1000">
+              <a:rPr lang="es" sz="1000" b="1">
                 <a:solidFill>
                   <a:srgbClr val="1C4587"/>
                 </a:solidFill>
@@ -13596,34 +13624,31 @@
           <a:solidFill>
             <a:srgbClr val="EFEFEF"/>
           </a:solidFill>
-          <a:ln cap="flat" cmpd="sng" w="9525">
+          <a:ln w="9525" cap="flat" cmpd="sng">
             <a:solidFill>
               <a:srgbClr val="B7B7B7"/>
             </a:solidFill>
             <a:prstDash val="solid"/>
             <a:round/>
-            <a:headEnd len="sm" w="sm" type="none"/>
-            <a:tailEnd len="sm" w="sm" type="none"/>
+            <a:headEnd type="none" w="sm" len="sm"/>
+            <a:tailEnd type="none" w="sm" len="sm"/>
           </a:ln>
         </p:spPr>
         <p:txBody>
-          <a:bodyPr anchorCtr="0" anchor="ctr" bIns="91425" lIns="91425" spcFirstLastPara="1" rIns="91425" wrap="square" tIns="91425">
+          <a:bodyPr spcFirstLastPara="1" wrap="square" lIns="91425" tIns="91425" rIns="91425" bIns="91425" anchor="ctr" anchorCtr="0">
             <a:noAutofit/>
           </a:bodyPr>
           <a:lstStyle/>
           <a:p>
-            <a:pPr indent="0" lvl="0" marL="0" rtl="0" algn="ctr">
-              <a:spcBef>
-                <a:spcPts val="0"/>
-              </a:spcBef>
-              <a:spcAft>
-                <a:spcPts val="0"/>
-              </a:spcAft>
-              <a:buNone/>
-            </a:pPr>
-            <a:r>
-              <a:t/>
-            </a:r>
+            <a:pPr marL="0" lvl="0" indent="0" algn="ctr" rtl="0">
+              <a:spcBef>
+                <a:spcPts val="0"/>
+              </a:spcBef>
+              <a:spcAft>
+                <a:spcPts val="0"/>
+              </a:spcAft>
+              <a:buNone/>
+            </a:pPr>
             <a:endParaRPr/>
           </a:p>
         </p:txBody>
@@ -13648,12 +13673,12 @@
           </a:ln>
         </p:spPr>
         <p:txBody>
-          <a:bodyPr anchorCtr="0" anchor="t" bIns="91425" lIns="91425" spcFirstLastPara="1" rIns="91425" wrap="square" tIns="91425">
+          <a:bodyPr spcFirstLastPara="1" wrap="square" lIns="91425" tIns="91425" rIns="91425" bIns="91425" anchor="t" anchorCtr="0">
             <a:spAutoFit/>
           </a:bodyPr>
           <a:lstStyle/>
           <a:p>
-            <a:pPr indent="0" lvl="0" marL="0" rtl="0" algn="l">
+            <a:pPr marL="0" lvl="0" indent="0" algn="l" rtl="0">
               <a:lnSpc>
                 <a:spcPct val="115000"/>
               </a:lnSpc>
@@ -13666,7 +13691,7 @@
               <a:buNone/>
             </a:pPr>
             <a:r>
-              <a:rPr b="1" lang="es" sz="1200">
+              <a:rPr lang="es" sz="1200" b="1">
                 <a:solidFill>
                   <a:srgbClr val="666666"/>
                 </a:solidFill>
@@ -13705,12 +13730,12 @@
           </a:ln>
         </p:spPr>
         <p:txBody>
-          <a:bodyPr anchorCtr="0" anchor="t" bIns="91425" lIns="91425" spcFirstLastPara="1" rIns="91425" wrap="square" tIns="91425">
+          <a:bodyPr spcFirstLastPara="1" wrap="square" lIns="91425" tIns="91425" rIns="91425" bIns="91425" anchor="t" anchorCtr="0">
             <a:spAutoFit/>
           </a:bodyPr>
           <a:lstStyle/>
           <a:p>
-            <a:pPr indent="-285750" lvl="0" marL="269999" rtl="0" algn="l">
+            <a:pPr marL="269999" lvl="0" indent="-285750" algn="l" rtl="0">
               <a:lnSpc>
                 <a:spcPct val="115000"/>
               </a:lnSpc>
@@ -13761,7 +13786,7 @@
             </a:endParaRPr>
           </a:p>
           <a:p>
-            <a:pPr indent="-285750" lvl="0" marL="269999" rtl="0" algn="l">
+            <a:pPr marL="269999" lvl="0" indent="-285750" algn="l" rtl="0">
               <a:lnSpc>
                 <a:spcPct val="115000"/>
               </a:lnSpc>
@@ -13788,31 +13813,7 @@
                 <a:cs typeface="Sora"/>
                 <a:sym typeface="Sora"/>
               </a:rPr>
-              <a:t>Automatización procesos internos </a:t>
-            </a:r>
-            <a:r>
-              <a:rPr lang="es" sz="900">
-                <a:solidFill>
-                  <a:srgbClr val="666666"/>
-                </a:solidFill>
-                <a:latin typeface="Sora"/>
-                <a:ea typeface="Sora"/>
-                <a:cs typeface="Sora"/>
-                <a:sym typeface="Sora"/>
-              </a:rPr>
-              <a:t>(dificultad media)</a:t>
-            </a:r>
-            <a:r>
-              <a:rPr lang="es" sz="900">
-                <a:solidFill>
-                  <a:srgbClr val="666666"/>
-                </a:solidFill>
-                <a:latin typeface="Sora"/>
-                <a:ea typeface="Sora"/>
-                <a:cs typeface="Sora"/>
-                <a:sym typeface="Sora"/>
-              </a:rPr>
-              <a:t>:</a:t>
+              <a:t>Automatización procesos internos (dificultad media):</a:t>
             </a:r>
             <a:endParaRPr sz="900">
               <a:solidFill>
@@ -13825,7 +13826,7 @@
             </a:endParaRPr>
           </a:p>
           <a:p>
-            <a:pPr indent="-285750" lvl="1" marL="914400" rtl="0" algn="l">
+            <a:pPr marL="914400" lvl="1" indent="-285750" algn="l" rtl="0">
               <a:lnSpc>
                 <a:spcPct val="115000"/>
               </a:lnSpc>
@@ -13865,7 +13866,7 @@
             </a:endParaRPr>
           </a:p>
           <a:p>
-            <a:pPr indent="-285750" lvl="1" marL="914400" rtl="0" algn="l">
+            <a:pPr marL="914400" lvl="1" indent="-285750" algn="l" rtl="0">
               <a:lnSpc>
                 <a:spcPct val="115000"/>
               </a:lnSpc>
@@ -13905,7 +13906,7 @@
             </a:endParaRPr>
           </a:p>
           <a:p>
-            <a:pPr indent="-285750" lvl="1" marL="914400" rtl="0" algn="l">
+            <a:pPr marL="914400" lvl="1" indent="-285750" algn="l" rtl="0">
               <a:lnSpc>
                 <a:spcPct val="115000"/>
               </a:lnSpc>
@@ -13956,7 +13957,7 @@
             </a:endParaRPr>
           </a:p>
           <a:p>
-            <a:pPr indent="-285750" lvl="0" marL="269999" rtl="0" algn="l">
+            <a:pPr marL="269999" lvl="0" indent="-285750" algn="l" rtl="0">
               <a:lnSpc>
                 <a:spcPct val="115000"/>
               </a:lnSpc>
@@ -13983,31 +13984,7 @@
                 <a:cs typeface="Sora"/>
                 <a:sym typeface="Sora"/>
               </a:rPr>
-              <a:t>Agentes (</a:t>
-            </a:r>
-            <a:r>
-              <a:rPr lang="es" sz="900">
-                <a:solidFill>
-                  <a:srgbClr val="666666"/>
-                </a:solidFill>
-                <a:latin typeface="Sora"/>
-                <a:ea typeface="Sora"/>
-                <a:cs typeface="Sora"/>
-                <a:sym typeface="Sora"/>
-              </a:rPr>
-              <a:t>difícil</a:t>
-            </a:r>
-            <a:r>
-              <a:rPr lang="es" sz="900">
-                <a:solidFill>
-                  <a:srgbClr val="666666"/>
-                </a:solidFill>
-                <a:latin typeface="Sora"/>
-                <a:ea typeface="Sora"/>
-                <a:cs typeface="Sora"/>
-                <a:sym typeface="Sora"/>
-              </a:rPr>
-              <a:t>)</a:t>
+              <a:t>Agentes (difícil)</a:t>
             </a:r>
             <a:br>
               <a:rPr lang="es" sz="900">
@@ -14041,11 +14018,11 @@
 </file>
 
 <file path=ppt/slides/slide8.xml><?xml version="1.0" encoding="utf-8"?>
-<p:sld xmlns:a="http://schemas.openxmlformats.org/drawingml/2006/main" xmlns:r="http://schemas.openxmlformats.org/officeDocument/2006/relationships" xmlns:mc="http://schemas.openxmlformats.org/markup-compatibility/2006" xmlns:mv="urn:schemas-microsoft-com:mac:vml" xmlns:p="http://schemas.openxmlformats.org/presentationml/2006/main" xmlns:c="http://schemas.openxmlformats.org/drawingml/2006/chart" xmlns:dgm="http://schemas.openxmlformats.org/drawingml/2006/diagram" xmlns:o="urn:schemas-microsoft-com:office:office" xmlns:v="urn:schemas-microsoft-com:vml" xmlns:pvml="urn:schemas-microsoft-com:office:powerpoint" xmlns:com="http://schemas.openxmlformats.org/drawingml/2006/compatibility" xmlns:p14="http://schemas.microsoft.com/office/powerpoint/2010/main" xmlns:p15="http://schemas.microsoft.com/office/powerpoint/2012/main" xmlns:ahyp="http://schemas.microsoft.com/office/drawing/2018/hyperlinkcolor">
+<p:sld xmlns:a="http://schemas.openxmlformats.org/drawingml/2006/main" xmlns:r="http://schemas.openxmlformats.org/officeDocument/2006/relationships" xmlns:p="http://schemas.openxmlformats.org/presentationml/2006/main">
   <p:cSld>
     <p:spTree>
       <p:nvGrpSpPr>
-        <p:cNvPr id="170" name="Shape 170"/>
+        <p:cNvPr id="1" name="Shape 170"/>
         <p:cNvGrpSpPr/>
         <p:nvPr/>
       </p:nvGrpSpPr>
@@ -14105,12 +14082,12 @@
           </a:ln>
         </p:spPr>
         <p:txBody>
-          <a:bodyPr anchorCtr="0" anchor="t" bIns="91425" lIns="91425" spcFirstLastPara="1" rIns="91425" wrap="square" tIns="91425">
+          <a:bodyPr spcFirstLastPara="1" wrap="square" lIns="91425" tIns="91425" rIns="91425" bIns="91425" anchor="t" anchorCtr="0">
             <a:spAutoFit/>
           </a:bodyPr>
           <a:lstStyle/>
           <a:p>
-            <a:pPr indent="0" lvl="0" marL="0" rtl="0" algn="l">
+            <a:pPr marL="0" lvl="0" indent="0" algn="l" rtl="0">
               <a:lnSpc>
                 <a:spcPct val="115000"/>
               </a:lnSpc>
@@ -14159,34 +14136,31 @@
           <a:solidFill>
             <a:srgbClr val="0B5394"/>
           </a:solidFill>
-          <a:ln cap="flat" cmpd="sng" w="9525">
+          <a:ln w="9525" cap="flat" cmpd="sng">
             <a:solidFill>
               <a:srgbClr val="0B5394"/>
             </a:solidFill>
             <a:prstDash val="solid"/>
             <a:round/>
-            <a:headEnd len="sm" w="sm" type="none"/>
-            <a:tailEnd len="sm" w="sm" type="none"/>
+            <a:headEnd type="none" w="sm" len="sm"/>
+            <a:tailEnd type="none" w="sm" len="sm"/>
           </a:ln>
         </p:spPr>
         <p:txBody>
-          <a:bodyPr anchorCtr="0" anchor="ctr" bIns="91425" lIns="91425" spcFirstLastPara="1" rIns="91425" wrap="square" tIns="91425">
+          <a:bodyPr spcFirstLastPara="1" wrap="square" lIns="91425" tIns="91425" rIns="91425" bIns="91425" anchor="ctr" anchorCtr="0">
             <a:noAutofit/>
           </a:bodyPr>
           <a:lstStyle/>
           <a:p>
-            <a:pPr indent="0" lvl="0" marL="0" rtl="0" algn="ctr">
-              <a:spcBef>
-                <a:spcPts val="0"/>
-              </a:spcBef>
-              <a:spcAft>
-                <a:spcPts val="0"/>
-              </a:spcAft>
-              <a:buNone/>
-            </a:pPr>
-            <a:r>
-              <a:t/>
-            </a:r>
+            <a:pPr marL="0" lvl="0" indent="0" algn="ctr" rtl="0">
+              <a:spcBef>
+                <a:spcPts val="0"/>
+              </a:spcBef>
+              <a:spcAft>
+                <a:spcPts val="0"/>
+              </a:spcAft>
+              <a:buNone/>
+            </a:pPr>
             <a:endParaRPr/>
           </a:p>
         </p:txBody>
@@ -14211,12 +14185,12 @@
           </a:ln>
         </p:spPr>
         <p:txBody>
-          <a:bodyPr anchorCtr="0" anchor="t" bIns="91425" lIns="91425" spcFirstLastPara="1" rIns="91425" wrap="square" tIns="91425">
+          <a:bodyPr spcFirstLastPara="1" wrap="square" lIns="91425" tIns="91425" rIns="91425" bIns="91425" anchor="t" anchorCtr="0">
             <a:spAutoFit/>
           </a:bodyPr>
           <a:lstStyle/>
           <a:p>
-            <a:pPr indent="0" lvl="0" marL="0" rtl="0" algn="l">
+            <a:pPr marL="0" lvl="0" indent="0" algn="l" rtl="0">
               <a:lnSpc>
                 <a:spcPct val="115000"/>
               </a:lnSpc>
@@ -14271,7 +14245,7 @@
         <p:spPr>
           <a:xfrm>
             <a:off x="89951" y="1380325"/>
-            <a:ext cx="5129324" cy="3388649"/>
+            <a:ext cx="7740404" cy="3681072"/>
           </a:xfrm>
           <a:prstGeom prst="rect">
             <a:avLst/>
@@ -14302,12 +14276,12 @@
           </a:ln>
         </p:spPr>
         <p:txBody>
-          <a:bodyPr anchorCtr="0" anchor="t" bIns="91425" lIns="91425" spcFirstLastPara="1" rIns="91425" wrap="square" tIns="91425">
+          <a:bodyPr spcFirstLastPara="1" wrap="square" lIns="91425" tIns="91425" rIns="91425" bIns="91425" anchor="t" anchorCtr="0">
             <a:spAutoFit/>
           </a:bodyPr>
           <a:lstStyle/>
           <a:p>
-            <a:pPr indent="0" lvl="0" marL="0" rtl="0" algn="l">
+            <a:pPr marL="0" lvl="0" indent="0" algn="l" rtl="0">
               <a:lnSpc>
                 <a:spcPct val="115000"/>
               </a:lnSpc>
@@ -14320,7 +14294,7 @@
               <a:buNone/>
             </a:pPr>
             <a:r>
-              <a:rPr b="1" lang="es" sz="900" u="sng">
+              <a:rPr lang="es" sz="900" b="1" u="sng">
                 <a:solidFill>
                   <a:schemeClr val="hlink"/>
                 </a:solidFill>
@@ -14381,7 +14355,288 @@
 </file>
 
 <file path=ppt/theme/theme1.xml><?xml version="1.0" encoding="utf-8"?>
-<a:theme xmlns:a="http://schemas.openxmlformats.org/drawingml/2006/main" xmlns:r="http://schemas.openxmlformats.org/officeDocument/2006/relationships">
+<a:theme xmlns:a="http://schemas.openxmlformats.org/drawingml/2006/main" name="Simple Light">
+  <a:themeElements>
+    <a:clrScheme name="Simple Light">
+      <a:dk1>
+        <a:srgbClr val="000000"/>
+      </a:dk1>
+      <a:lt1>
+        <a:srgbClr val="FFFFFF"/>
+      </a:lt1>
+      <a:dk2>
+        <a:srgbClr val="595959"/>
+      </a:dk2>
+      <a:lt2>
+        <a:srgbClr val="EEEEEE"/>
+      </a:lt2>
+      <a:accent1>
+        <a:srgbClr val="4285F4"/>
+      </a:accent1>
+      <a:accent2>
+        <a:srgbClr val="212121"/>
+      </a:accent2>
+      <a:accent3>
+        <a:srgbClr val="78909C"/>
+      </a:accent3>
+      <a:accent4>
+        <a:srgbClr val="FFAB40"/>
+      </a:accent4>
+      <a:accent5>
+        <a:srgbClr val="0097A7"/>
+      </a:accent5>
+      <a:accent6>
+        <a:srgbClr val="EEFF41"/>
+      </a:accent6>
+      <a:hlink>
+        <a:srgbClr val="0097A7"/>
+      </a:hlink>
+      <a:folHlink>
+        <a:srgbClr val="0097A7"/>
+      </a:folHlink>
+    </a:clrScheme>
+    <a:fontScheme name="Office">
+      <a:majorFont>
+        <a:latin typeface="Arial"/>
+        <a:ea typeface=""/>
+        <a:cs typeface=""/>
+        <a:font script="Jpan" typeface="ＭＳ Ｐゴシック"/>
+        <a:font script="Hang" typeface="맑은 고딕"/>
+        <a:font script="Hans" typeface="宋体"/>
+        <a:font script="Hant" typeface="新細明體"/>
+        <a:font script="Arab" typeface="Times New Roman"/>
+        <a:font script="Hebr" typeface="Times New Roman"/>
+        <a:font script="Thai" typeface="Angsana New"/>
+        <a:font script="Ethi" typeface="Nyala"/>
+        <a:font script="Beng" typeface="Vrinda"/>
+        <a:font script="Gujr" typeface="Shruti"/>
+        <a:font script="Khmr" typeface="MoolBoran"/>
+        <a:font script="Knda" typeface="Tunga"/>
+        <a:font script="Guru" typeface="Raavi"/>
+        <a:font script="Cans" typeface="Euphemia"/>
+        <a:font script="Cher" typeface="Plantagenet Cherokee"/>
+        <a:font script="Yiii" typeface="Microsoft Yi Baiti"/>
+        <a:font script="Tibt" typeface="Microsoft Himalaya"/>
+        <a:font script="Thaa" typeface="MV Boli"/>
+        <a:font script="Deva" typeface="Mangal"/>
+        <a:font script="Telu" typeface="Gautami"/>
+        <a:font script="Taml" typeface="Latha"/>
+        <a:font script="Syrc" typeface="Estrangelo Edessa"/>
+        <a:font script="Orya" typeface="Kalinga"/>
+        <a:font script="Mlym" typeface="Kartika"/>
+        <a:font script="Laoo" typeface="DokChampa"/>
+        <a:font script="Sinh" typeface="Iskoola Pota"/>
+        <a:font script="Mong" typeface="Mongolian Baiti"/>
+        <a:font script="Viet" typeface="Times New Roman"/>
+        <a:font script="Uigh" typeface="Microsoft Uighur"/>
+        <a:font script="Geor" typeface="Sylfaen"/>
+      </a:majorFont>
+      <a:minorFont>
+        <a:latin typeface="Arial"/>
+        <a:ea typeface=""/>
+        <a:cs typeface=""/>
+        <a:font script="Jpan" typeface="ＭＳ Ｐゴシック"/>
+        <a:font script="Hang" typeface="맑은 고딕"/>
+        <a:font script="Hans" typeface="宋体"/>
+        <a:font script="Hant" typeface="新細明體"/>
+        <a:font script="Arab" typeface="Arial"/>
+        <a:font script="Hebr" typeface="Arial"/>
+        <a:font script="Thai" typeface="Cordia New"/>
+        <a:font script="Ethi" typeface="Nyala"/>
+        <a:font script="Beng" typeface="Vrinda"/>
+        <a:font script="Gujr" typeface="Shruti"/>
+        <a:font script="Khmr" typeface="DaunPenh"/>
+        <a:font script="Knda" typeface="Tunga"/>
+        <a:font script="Guru" typeface="Raavi"/>
+        <a:font script="Cans" typeface="Euphemia"/>
+        <a:font script="Cher" typeface="Plantagenet Cherokee"/>
+        <a:font script="Yiii" typeface="Microsoft Yi Baiti"/>
+        <a:font script="Tibt" typeface="Microsoft Himalaya"/>
+        <a:font script="Thaa" typeface="MV Boli"/>
+        <a:font script="Deva" typeface="Mangal"/>
+        <a:font script="Telu" typeface="Gautami"/>
+        <a:font script="Taml" typeface="Latha"/>
+        <a:font script="Syrc" typeface="Estrangelo Edessa"/>
+        <a:font script="Orya" typeface="Kalinga"/>
+        <a:font script="Mlym" typeface="Kartika"/>
+        <a:font script="Laoo" typeface="DokChampa"/>
+        <a:font script="Sinh" typeface="Iskoola Pota"/>
+        <a:font script="Mong" typeface="Mongolian Baiti"/>
+        <a:font script="Viet" typeface="Arial"/>
+        <a:font script="Uigh" typeface="Microsoft Uighur"/>
+        <a:font script="Geor" typeface="Sylfaen"/>
+      </a:minorFont>
+    </a:fontScheme>
+    <a:fmtScheme name="Office">
+      <a:fillStyleLst>
+        <a:solidFill>
+          <a:schemeClr val="phClr"/>
+        </a:solidFill>
+        <a:gradFill rotWithShape="1">
+          <a:gsLst>
+            <a:gs pos="0">
+              <a:schemeClr val="phClr">
+                <a:tint val="50000"/>
+                <a:satMod val="300000"/>
+              </a:schemeClr>
+            </a:gs>
+            <a:gs pos="35000">
+              <a:schemeClr val="phClr">
+                <a:tint val="37000"/>
+                <a:satMod val="300000"/>
+              </a:schemeClr>
+            </a:gs>
+            <a:gs pos="100000">
+              <a:schemeClr val="phClr">
+                <a:tint val="15000"/>
+                <a:satMod val="350000"/>
+              </a:schemeClr>
+            </a:gs>
+          </a:gsLst>
+          <a:lin ang="16200000" scaled="1"/>
+        </a:gradFill>
+        <a:gradFill rotWithShape="1">
+          <a:gsLst>
+            <a:gs pos="0">
+              <a:schemeClr val="phClr">
+                <a:tint val="100000"/>
+                <a:shade val="100000"/>
+                <a:satMod val="130000"/>
+              </a:schemeClr>
+            </a:gs>
+            <a:gs pos="100000">
+              <a:schemeClr val="phClr">
+                <a:tint val="50000"/>
+                <a:shade val="100000"/>
+                <a:satMod val="350000"/>
+              </a:schemeClr>
+            </a:gs>
+          </a:gsLst>
+          <a:lin ang="16200000" scaled="0"/>
+        </a:gradFill>
+      </a:fillStyleLst>
+      <a:lnStyleLst>
+        <a:ln w="9525" cap="flat" cmpd="sng" algn="ctr">
+          <a:solidFill>
+            <a:schemeClr val="phClr">
+              <a:shade val="95000"/>
+              <a:satMod val="105000"/>
+            </a:schemeClr>
+          </a:solidFill>
+          <a:prstDash val="solid"/>
+        </a:ln>
+        <a:ln w="25400" cap="flat" cmpd="sng" algn="ctr">
+          <a:solidFill>
+            <a:schemeClr val="phClr"/>
+          </a:solidFill>
+          <a:prstDash val="solid"/>
+        </a:ln>
+        <a:ln w="38100" cap="flat" cmpd="sng" algn="ctr">
+          <a:solidFill>
+            <a:schemeClr val="phClr"/>
+          </a:solidFill>
+          <a:prstDash val="solid"/>
+        </a:ln>
+      </a:lnStyleLst>
+      <a:effectStyleLst>
+        <a:effectStyle>
+          <a:effectLst>
+            <a:outerShdw blurRad="40000" dist="20000" dir="5400000" rotWithShape="0">
+              <a:srgbClr val="000000">
+                <a:alpha val="38000"/>
+              </a:srgbClr>
+            </a:outerShdw>
+          </a:effectLst>
+        </a:effectStyle>
+        <a:effectStyle>
+          <a:effectLst>
+            <a:outerShdw blurRad="40000" dist="23000" dir="5400000" rotWithShape="0">
+              <a:srgbClr val="000000">
+                <a:alpha val="35000"/>
+              </a:srgbClr>
+            </a:outerShdw>
+          </a:effectLst>
+        </a:effectStyle>
+        <a:effectStyle>
+          <a:effectLst>
+            <a:outerShdw blurRad="40000" dist="23000" dir="5400000" rotWithShape="0">
+              <a:srgbClr val="000000">
+                <a:alpha val="35000"/>
+              </a:srgbClr>
+            </a:outerShdw>
+          </a:effectLst>
+          <a:scene3d>
+            <a:camera prst="orthographicFront">
+              <a:rot lat="0" lon="0" rev="0"/>
+            </a:camera>
+            <a:lightRig rig="threePt" dir="t">
+              <a:rot lat="0" lon="0" rev="1200000"/>
+            </a:lightRig>
+          </a:scene3d>
+          <a:sp3d>
+            <a:bevelT w="63500" h="25400"/>
+          </a:sp3d>
+        </a:effectStyle>
+      </a:effectStyleLst>
+      <a:bgFillStyleLst>
+        <a:solidFill>
+          <a:schemeClr val="phClr"/>
+        </a:solidFill>
+        <a:gradFill rotWithShape="1">
+          <a:gsLst>
+            <a:gs pos="0">
+              <a:schemeClr val="phClr">
+                <a:tint val="40000"/>
+                <a:satMod val="350000"/>
+              </a:schemeClr>
+            </a:gs>
+            <a:gs pos="40000">
+              <a:schemeClr val="phClr">
+                <a:tint val="45000"/>
+                <a:shade val="99000"/>
+                <a:satMod val="350000"/>
+              </a:schemeClr>
+            </a:gs>
+            <a:gs pos="100000">
+              <a:schemeClr val="phClr">
+                <a:shade val="20000"/>
+                <a:satMod val="255000"/>
+              </a:schemeClr>
+            </a:gs>
+          </a:gsLst>
+          <a:path path="circle">
+            <a:fillToRect l="50000" t="-80000" r="50000" b="180000"/>
+          </a:path>
+        </a:gradFill>
+        <a:gradFill rotWithShape="1">
+          <a:gsLst>
+            <a:gs pos="0">
+              <a:schemeClr val="phClr">
+                <a:tint val="80000"/>
+                <a:satMod val="300000"/>
+              </a:schemeClr>
+            </a:gs>
+            <a:gs pos="100000">
+              <a:schemeClr val="phClr">
+                <a:shade val="30000"/>
+                <a:satMod val="200000"/>
+              </a:schemeClr>
+            </a:gs>
+          </a:gsLst>
+          <a:path path="circle">
+            <a:fillToRect l="50000" t="50000" r="50000" b="50000"/>
+          </a:path>
+        </a:gradFill>
+      </a:bgFillStyleLst>
+    </a:fmtScheme>
+  </a:themeElements>
+  <a:objectDefaults/>
+  <a:extraClrSchemeLst/>
+</a:theme>
+</file>
+
+<file path=ppt/theme/theme2.xml><?xml version="1.0" encoding="utf-8"?>
+<a:theme xmlns:a="http://schemas.openxmlformats.org/drawingml/2006/main">
   <a:themeElements>
     <a:clrScheme name="Default">
       <a:dk1>
@@ -14656,284 +14911,7 @@
       </a:bgFillStyleLst>
     </a:fmtScheme>
   </a:themeElements>
-</a:theme>
-</file>
-
-<file path=ppt/theme/theme2.xml><?xml version="1.0" encoding="utf-8"?>
-<a:theme xmlns:a="http://schemas.openxmlformats.org/drawingml/2006/main" xmlns:r="http://schemas.openxmlformats.org/officeDocument/2006/relationships" name="Simple Light">
-  <a:themeElements>
-    <a:clrScheme name="Simple Light">
-      <a:dk1>
-        <a:srgbClr val="000000"/>
-      </a:dk1>
-      <a:lt1>
-        <a:srgbClr val="FFFFFF"/>
-      </a:lt1>
-      <a:dk2>
-        <a:srgbClr val="595959"/>
-      </a:dk2>
-      <a:lt2>
-        <a:srgbClr val="EEEEEE"/>
-      </a:lt2>
-      <a:accent1>
-        <a:srgbClr val="4285F4"/>
-      </a:accent1>
-      <a:accent2>
-        <a:srgbClr val="212121"/>
-      </a:accent2>
-      <a:accent3>
-        <a:srgbClr val="78909C"/>
-      </a:accent3>
-      <a:accent4>
-        <a:srgbClr val="FFAB40"/>
-      </a:accent4>
-      <a:accent5>
-        <a:srgbClr val="0097A7"/>
-      </a:accent5>
-      <a:accent6>
-        <a:srgbClr val="EEFF41"/>
-      </a:accent6>
-      <a:hlink>
-        <a:srgbClr val="0097A7"/>
-      </a:hlink>
-      <a:folHlink>
-        <a:srgbClr val="0097A7"/>
-      </a:folHlink>
-    </a:clrScheme>
-    <a:fontScheme name="Office">
-      <a:majorFont>
-        <a:latin typeface="Arial"/>
-        <a:ea typeface=""/>
-        <a:cs typeface=""/>
-        <a:font script="Jpan" typeface="ＭＳ Ｐゴシック"/>
-        <a:font script="Hang" typeface="맑은 고딕"/>
-        <a:font script="Hans" typeface="宋体"/>
-        <a:font script="Hant" typeface="新細明體"/>
-        <a:font script="Arab" typeface="Times New Roman"/>
-        <a:font script="Hebr" typeface="Times New Roman"/>
-        <a:font script="Thai" typeface="Angsana New"/>
-        <a:font script="Ethi" typeface="Nyala"/>
-        <a:font script="Beng" typeface="Vrinda"/>
-        <a:font script="Gujr" typeface="Shruti"/>
-        <a:font script="Khmr" typeface="MoolBoran"/>
-        <a:font script="Knda" typeface="Tunga"/>
-        <a:font script="Guru" typeface="Raavi"/>
-        <a:font script="Cans" typeface="Euphemia"/>
-        <a:font script="Cher" typeface="Plantagenet Cherokee"/>
-        <a:font script="Yiii" typeface="Microsoft Yi Baiti"/>
-        <a:font script="Tibt" typeface="Microsoft Himalaya"/>
-        <a:font script="Thaa" typeface="MV Boli"/>
-        <a:font script="Deva" typeface="Mangal"/>
-        <a:font script="Telu" typeface="Gautami"/>
-        <a:font script="Taml" typeface="Latha"/>
-        <a:font script="Syrc" typeface="Estrangelo Edessa"/>
-        <a:font script="Orya" typeface="Kalinga"/>
-        <a:font script="Mlym" typeface="Kartika"/>
-        <a:font script="Laoo" typeface="DokChampa"/>
-        <a:font script="Sinh" typeface="Iskoola Pota"/>
-        <a:font script="Mong" typeface="Mongolian Baiti"/>
-        <a:font script="Viet" typeface="Times New Roman"/>
-        <a:font script="Uigh" typeface="Microsoft Uighur"/>
-        <a:font script="Geor" typeface="Sylfaen"/>
-      </a:majorFont>
-      <a:minorFont>
-        <a:latin typeface="Arial"/>
-        <a:ea typeface=""/>
-        <a:cs typeface=""/>
-        <a:font script="Jpan" typeface="ＭＳ Ｐゴシック"/>
-        <a:font script="Hang" typeface="맑은 고딕"/>
-        <a:font script="Hans" typeface="宋体"/>
-        <a:font script="Hant" typeface="新細明體"/>
-        <a:font script="Arab" typeface="Arial"/>
-        <a:font script="Hebr" typeface="Arial"/>
-        <a:font script="Thai" typeface="Cordia New"/>
-        <a:font script="Ethi" typeface="Nyala"/>
-        <a:font script="Beng" typeface="Vrinda"/>
-        <a:font script="Gujr" typeface="Shruti"/>
-        <a:font script="Khmr" typeface="DaunPenh"/>
-        <a:font script="Knda" typeface="Tunga"/>
-        <a:font script="Guru" typeface="Raavi"/>
-        <a:font script="Cans" typeface="Euphemia"/>
-        <a:font script="Cher" typeface="Plantagenet Cherokee"/>
-        <a:font script="Yiii" typeface="Microsoft Yi Baiti"/>
-        <a:font script="Tibt" typeface="Microsoft Himalaya"/>
-        <a:font script="Thaa" typeface="MV Boli"/>
-        <a:font script="Deva" typeface="Mangal"/>
-        <a:font script="Telu" typeface="Gautami"/>
-        <a:font script="Taml" typeface="Latha"/>
-        <a:font script="Syrc" typeface="Estrangelo Edessa"/>
-        <a:font script="Orya" typeface="Kalinga"/>
-        <a:font script="Mlym" typeface="Kartika"/>
-        <a:font script="Laoo" typeface="DokChampa"/>
-        <a:font script="Sinh" typeface="Iskoola Pota"/>
-        <a:font script="Mong" typeface="Mongolian Baiti"/>
-        <a:font script="Viet" typeface="Arial"/>
-        <a:font script="Uigh" typeface="Microsoft Uighur"/>
-        <a:font script="Geor" typeface="Sylfaen"/>
-      </a:minorFont>
-    </a:fontScheme>
-    <a:fmtScheme name="Office">
-      <a:fillStyleLst>
-        <a:solidFill>
-          <a:schemeClr val="phClr"/>
-        </a:solidFill>
-        <a:gradFill rotWithShape="1">
-          <a:gsLst>
-            <a:gs pos="0">
-              <a:schemeClr val="phClr">
-                <a:tint val="50000"/>
-                <a:satMod val="300000"/>
-              </a:schemeClr>
-            </a:gs>
-            <a:gs pos="35000">
-              <a:schemeClr val="phClr">
-                <a:tint val="37000"/>
-                <a:satMod val="300000"/>
-              </a:schemeClr>
-            </a:gs>
-            <a:gs pos="100000">
-              <a:schemeClr val="phClr">
-                <a:tint val="15000"/>
-                <a:satMod val="350000"/>
-              </a:schemeClr>
-            </a:gs>
-          </a:gsLst>
-          <a:lin ang="16200000" scaled="1"/>
-        </a:gradFill>
-        <a:gradFill rotWithShape="1">
-          <a:gsLst>
-            <a:gs pos="0">
-              <a:schemeClr val="phClr">
-                <a:tint val="100000"/>
-                <a:shade val="100000"/>
-                <a:satMod val="130000"/>
-              </a:schemeClr>
-            </a:gs>
-            <a:gs pos="100000">
-              <a:schemeClr val="phClr">
-                <a:tint val="50000"/>
-                <a:shade val="100000"/>
-                <a:satMod val="350000"/>
-              </a:schemeClr>
-            </a:gs>
-          </a:gsLst>
-          <a:lin ang="16200000" scaled="0"/>
-        </a:gradFill>
-      </a:fillStyleLst>
-      <a:lnStyleLst>
-        <a:ln w="9525" cap="flat" cmpd="sng" algn="ctr">
-          <a:solidFill>
-            <a:schemeClr val="phClr">
-              <a:shade val="95000"/>
-              <a:satMod val="105000"/>
-            </a:schemeClr>
-          </a:solidFill>
-          <a:prstDash val="solid"/>
-        </a:ln>
-        <a:ln w="25400" cap="flat" cmpd="sng" algn="ctr">
-          <a:solidFill>
-            <a:schemeClr val="phClr"/>
-          </a:solidFill>
-          <a:prstDash val="solid"/>
-        </a:ln>
-        <a:ln w="38100" cap="flat" cmpd="sng" algn="ctr">
-          <a:solidFill>
-            <a:schemeClr val="phClr"/>
-          </a:solidFill>
-          <a:prstDash val="solid"/>
-        </a:ln>
-      </a:lnStyleLst>
-      <a:effectStyleLst>
-        <a:effectStyle>
-          <a:effectLst>
-            <a:outerShdw blurRad="40000" dist="20000" dir="5400000" rotWithShape="0">
-              <a:srgbClr val="000000">
-                <a:alpha val="38000"/>
-              </a:srgbClr>
-            </a:outerShdw>
-          </a:effectLst>
-        </a:effectStyle>
-        <a:effectStyle>
-          <a:effectLst>
-            <a:outerShdw blurRad="40000" dist="23000" dir="5400000" rotWithShape="0">
-              <a:srgbClr val="000000">
-                <a:alpha val="35000"/>
-              </a:srgbClr>
-            </a:outerShdw>
-          </a:effectLst>
-        </a:effectStyle>
-        <a:effectStyle>
-          <a:effectLst>
-            <a:outerShdw blurRad="40000" dist="23000" dir="5400000" rotWithShape="0">
-              <a:srgbClr val="000000">
-                <a:alpha val="35000"/>
-              </a:srgbClr>
-            </a:outerShdw>
-          </a:effectLst>
-          <a:scene3d>
-            <a:camera prst="orthographicFront">
-              <a:rot lat="0" lon="0" rev="0"/>
-            </a:camera>
-            <a:lightRig rig="threePt" dir="t">
-              <a:rot lat="0" lon="0" rev="1200000"/>
-            </a:lightRig>
-          </a:scene3d>
-          <a:sp3d>
-            <a:bevelT w="63500" h="25400"/>
-          </a:sp3d>
-        </a:effectStyle>
-      </a:effectStyleLst>
-      <a:bgFillStyleLst>
-        <a:solidFill>
-          <a:schemeClr val="phClr"/>
-        </a:solidFill>
-        <a:gradFill rotWithShape="1">
-          <a:gsLst>
-            <a:gs pos="0">
-              <a:schemeClr val="phClr">
-                <a:tint val="40000"/>
-                <a:satMod val="350000"/>
-              </a:schemeClr>
-            </a:gs>
-            <a:gs pos="40000">
-              <a:schemeClr val="phClr">
-                <a:tint val="45000"/>
-                <a:shade val="99000"/>
-                <a:satMod val="350000"/>
-              </a:schemeClr>
-            </a:gs>
-            <a:gs pos="100000">
-              <a:schemeClr val="phClr">
-                <a:shade val="20000"/>
-                <a:satMod val="255000"/>
-              </a:schemeClr>
-            </a:gs>
-          </a:gsLst>
-          <a:path path="circle">
-            <a:fillToRect l="50000" t="-80000" r="50000" b="180000"/>
-          </a:path>
-        </a:gradFill>
-        <a:gradFill rotWithShape="1">
-          <a:gsLst>
-            <a:gs pos="0">
-              <a:schemeClr val="phClr">
-                <a:tint val="80000"/>
-                <a:satMod val="300000"/>
-              </a:schemeClr>
-            </a:gs>
-            <a:gs pos="100000">
-              <a:schemeClr val="phClr">
-                <a:shade val="30000"/>
-                <a:satMod val="200000"/>
-              </a:schemeClr>
-            </a:gs>
-          </a:gsLst>
-          <a:path path="circle">
-            <a:fillToRect l="50000" t="50000" r="50000" b="50000"/>
-          </a:path>
-        </a:gradFill>
-      </a:bgFillStyleLst>
-    </a:fmtScheme>
-  </a:themeElements>
+  <a:objectDefaults/>
+  <a:extraClrSchemeLst/>
 </a:theme>
 </file>